--- a/UI.pptx
+++ b/UI.pptx
@@ -9,6 +9,8 @@
     <p:sldId id="256" r:id="rId3"/>
     <p:sldId id="258" r:id="rId4"/>
     <p:sldId id="259" r:id="rId5"/>
+    <p:sldId id="260" r:id="rId6"/>
+    <p:sldId id="261" r:id="rId7"/>
   </p:sldIdLst>
   <p:sldSz cx="12192000" cy="6858000"/>
   <p:notesSz cx="6858000" cy="9144000"/>
@@ -262,7 +264,7 @@
           <a:p>
             <a:fld id="{FD712C1A-6004-44D9-86CA-686F02092DF3}" type="datetimeFigureOut">
               <a:rPr lang="ko-KR" altLang="en-US" smtClean="0"/>
-              <a:t>2026-08-10</a:t>
+              <a:t>2026-08-11</a:t>
             </a:fld>
             <a:endParaRPr lang="ko-KR" altLang="en-US"/>
           </a:p>
@@ -460,7 +462,7 @@
           <a:p>
             <a:fld id="{FD712C1A-6004-44D9-86CA-686F02092DF3}" type="datetimeFigureOut">
               <a:rPr lang="ko-KR" altLang="en-US" smtClean="0"/>
-              <a:t>2026-08-10</a:t>
+              <a:t>2026-08-11</a:t>
             </a:fld>
             <a:endParaRPr lang="ko-KR" altLang="en-US"/>
           </a:p>
@@ -668,7 +670,7 @@
           <a:p>
             <a:fld id="{FD712C1A-6004-44D9-86CA-686F02092DF3}" type="datetimeFigureOut">
               <a:rPr lang="ko-KR" altLang="en-US" smtClean="0"/>
-              <a:t>2026-08-10</a:t>
+              <a:t>2026-08-11</a:t>
             </a:fld>
             <a:endParaRPr lang="ko-KR" altLang="en-US"/>
           </a:p>
@@ -866,7 +868,7 @@
           <a:p>
             <a:fld id="{FD712C1A-6004-44D9-86CA-686F02092DF3}" type="datetimeFigureOut">
               <a:rPr lang="ko-KR" altLang="en-US" smtClean="0"/>
-              <a:t>2026-08-10</a:t>
+              <a:t>2026-08-11</a:t>
             </a:fld>
             <a:endParaRPr lang="ko-KR" altLang="en-US"/>
           </a:p>
@@ -1141,7 +1143,7 @@
           <a:p>
             <a:fld id="{FD712C1A-6004-44D9-86CA-686F02092DF3}" type="datetimeFigureOut">
               <a:rPr lang="ko-KR" altLang="en-US" smtClean="0"/>
-              <a:t>2026-08-10</a:t>
+              <a:t>2026-08-11</a:t>
             </a:fld>
             <a:endParaRPr lang="ko-KR" altLang="en-US"/>
           </a:p>
@@ -1406,7 +1408,7 @@
           <a:p>
             <a:fld id="{FD712C1A-6004-44D9-86CA-686F02092DF3}" type="datetimeFigureOut">
               <a:rPr lang="ko-KR" altLang="en-US" smtClean="0"/>
-              <a:t>2026-08-10</a:t>
+              <a:t>2026-08-11</a:t>
             </a:fld>
             <a:endParaRPr lang="ko-KR" altLang="en-US"/>
           </a:p>
@@ -1818,7 +1820,7 @@
           <a:p>
             <a:fld id="{FD712C1A-6004-44D9-86CA-686F02092DF3}" type="datetimeFigureOut">
               <a:rPr lang="ko-KR" altLang="en-US" smtClean="0"/>
-              <a:t>2026-08-10</a:t>
+              <a:t>2026-08-11</a:t>
             </a:fld>
             <a:endParaRPr lang="ko-KR" altLang="en-US"/>
           </a:p>
@@ -1959,7 +1961,7 @@
           <a:p>
             <a:fld id="{FD712C1A-6004-44D9-86CA-686F02092DF3}" type="datetimeFigureOut">
               <a:rPr lang="ko-KR" altLang="en-US" smtClean="0"/>
-              <a:t>2026-08-10</a:t>
+              <a:t>2026-08-11</a:t>
             </a:fld>
             <a:endParaRPr lang="ko-KR" altLang="en-US"/>
           </a:p>
@@ -2072,7 +2074,7 @@
           <a:p>
             <a:fld id="{FD712C1A-6004-44D9-86CA-686F02092DF3}" type="datetimeFigureOut">
               <a:rPr lang="ko-KR" altLang="en-US" smtClean="0"/>
-              <a:t>2026-08-10</a:t>
+              <a:t>2026-08-11</a:t>
             </a:fld>
             <a:endParaRPr lang="ko-KR" altLang="en-US"/>
           </a:p>
@@ -2383,7 +2385,7 @@
           <a:p>
             <a:fld id="{FD712C1A-6004-44D9-86CA-686F02092DF3}" type="datetimeFigureOut">
               <a:rPr lang="ko-KR" altLang="en-US" smtClean="0"/>
-              <a:t>2026-08-10</a:t>
+              <a:t>2026-08-11</a:t>
             </a:fld>
             <a:endParaRPr lang="ko-KR" altLang="en-US"/>
           </a:p>
@@ -2671,7 +2673,7 @@
           <a:p>
             <a:fld id="{FD712C1A-6004-44D9-86CA-686F02092DF3}" type="datetimeFigureOut">
               <a:rPr lang="ko-KR" altLang="en-US" smtClean="0"/>
-              <a:t>2026-08-10</a:t>
+              <a:t>2026-08-11</a:t>
             </a:fld>
             <a:endParaRPr lang="ko-KR" altLang="en-US"/>
           </a:p>
@@ -2912,7 +2914,7 @@
           <a:p>
             <a:fld id="{FD712C1A-6004-44D9-86CA-686F02092DF3}" type="datetimeFigureOut">
               <a:rPr lang="ko-KR" altLang="en-US" smtClean="0"/>
-              <a:t>2026-08-10</a:t>
+              <a:t>2026-08-11</a:t>
             </a:fld>
             <a:endParaRPr lang="ko-KR" altLang="en-US"/>
           </a:p>
@@ -27849,6 +27851,9147 @@
 </p:sld>
 </file>
 
+<file path=ppt/slides/slide5.xml><?xml version="1.0" encoding="utf-8"?>
+<p:sld xmlns:a="http://schemas.openxmlformats.org/drawingml/2006/main" xmlns:r="http://schemas.openxmlformats.org/officeDocument/2006/relationships" xmlns:p="http://schemas.openxmlformats.org/presentationml/2006/main">
+  <p:cSld>
+    <p:spTree>
+      <p:nvGrpSpPr>
+        <p:cNvPr id="1" name=""/>
+        <p:cNvGrpSpPr/>
+        <p:nvPr/>
+      </p:nvGrpSpPr>
+      <p:grpSpPr>
+        <a:xfrm>
+          <a:off x="0" y="0"/>
+          <a:ext cx="0" cy="0"/>
+          <a:chOff x="0" y="0"/>
+          <a:chExt cx="0" cy="0"/>
+        </a:xfrm>
+      </p:grpSpPr>
+      <p:sp>
+        <p:nvSpPr>
+          <p:cNvPr id="56" name="TextBox 55">
+            <a:extLst>
+              <a:ext uri="{FF2B5EF4-FFF2-40B4-BE49-F238E27FC236}">
+                <a16:creationId xmlns:a16="http://schemas.microsoft.com/office/drawing/2014/main" id="{8AAC15C9-BB50-E0B8-9CCB-2397069CC6C9}"/>
+              </a:ext>
+            </a:extLst>
+          </p:cNvPr>
+          <p:cNvSpPr txBox="1"/>
+          <p:nvPr/>
+        </p:nvSpPr>
+        <p:spPr>
+          <a:xfrm>
+            <a:off x="280509" y="153899"/>
+            <a:ext cx="1670921" cy="276999"/>
+          </a:xfrm>
+          <a:prstGeom prst="rect">
+            <a:avLst/>
+          </a:prstGeom>
+          <a:solidFill>
+            <a:schemeClr val="tx1"/>
+          </a:solidFill>
+        </p:spPr>
+        <p:txBody>
+          <a:bodyPr wrap="square" rtlCol="0">
+            <a:spAutoFit/>
+          </a:bodyPr>
+          <a:lstStyle/>
+          <a:p>
+            <a:pPr algn="ctr"/>
+            <a:r>
+              <a:rPr lang="ko-KR" altLang="en-US" sz="1200" dirty="0">
+                <a:solidFill>
+                  <a:schemeClr val="bg1"/>
+                </a:solidFill>
+              </a:rPr>
+              <a:t>알 카테고리</a:t>
+            </a:r>
+            <a:endParaRPr lang="en-US" altLang="ko-KR" sz="1200" dirty="0">
+              <a:solidFill>
+                <a:schemeClr val="bg1"/>
+              </a:solidFill>
+            </a:endParaRPr>
+          </a:p>
+        </p:txBody>
+      </p:sp>
+      <p:grpSp>
+        <p:nvGrpSpPr>
+          <p:cNvPr id="110" name="그룹 109">
+            <a:extLst>
+              <a:ext uri="{FF2B5EF4-FFF2-40B4-BE49-F238E27FC236}">
+                <a16:creationId xmlns:a16="http://schemas.microsoft.com/office/drawing/2014/main" id="{564073E9-E37F-46BB-D5C8-E147C34F266B}"/>
+              </a:ext>
+            </a:extLst>
+          </p:cNvPr>
+          <p:cNvGrpSpPr/>
+          <p:nvPr/>
+        </p:nvGrpSpPr>
+        <p:grpSpPr>
+          <a:xfrm>
+            <a:off x="1006474" y="1632174"/>
+            <a:ext cx="4489873" cy="3180792"/>
+            <a:chOff x="6962303" y="1954970"/>
+            <a:chExt cx="4489873" cy="3180792"/>
+          </a:xfrm>
+        </p:grpSpPr>
+        <p:sp>
+          <p:nvSpPr>
+            <p:cNvPr id="57" name="사각형: 둥근 모서리 56">
+              <a:extLst>
+                <a:ext uri="{FF2B5EF4-FFF2-40B4-BE49-F238E27FC236}">
+                  <a16:creationId xmlns:a16="http://schemas.microsoft.com/office/drawing/2014/main" id="{4D2FC849-ACB7-E4D5-6E83-3486B6F90B13}"/>
+                </a:ext>
+              </a:extLst>
+            </p:cNvPr>
+            <p:cNvSpPr/>
+            <p:nvPr/>
+          </p:nvSpPr>
+          <p:spPr>
+            <a:xfrm>
+              <a:off x="6962303" y="2341762"/>
+              <a:ext cx="2200521" cy="2794000"/>
+            </a:xfrm>
+            <a:prstGeom prst="roundRect">
+              <a:avLst>
+                <a:gd name="adj" fmla="val 2239"/>
+              </a:avLst>
+            </a:prstGeom>
+            <a:solidFill>
+              <a:schemeClr val="bg2">
+                <a:lumMod val="90000"/>
+              </a:schemeClr>
+            </a:solidFill>
+          </p:spPr>
+          <p:style>
+            <a:lnRef idx="2">
+              <a:schemeClr val="accent1">
+                <a:shade val="50000"/>
+              </a:schemeClr>
+            </a:lnRef>
+            <a:fillRef idx="1">
+              <a:schemeClr val="accent1"/>
+            </a:fillRef>
+            <a:effectRef idx="0">
+              <a:schemeClr val="accent1"/>
+            </a:effectRef>
+            <a:fontRef idx="minor">
+              <a:schemeClr val="lt1"/>
+            </a:fontRef>
+          </p:style>
+          <p:txBody>
+            <a:bodyPr rtlCol="0" anchor="ctr"/>
+            <a:lstStyle/>
+            <a:p>
+              <a:pPr algn="ctr"/>
+              <a:endParaRPr lang="ko-KR" altLang="en-US"/>
+            </a:p>
+          </p:txBody>
+        </p:sp>
+        <p:sp>
+          <p:nvSpPr>
+            <p:cNvPr id="58" name="사각형: 둥근 모서리 57">
+              <a:extLst>
+                <a:ext uri="{FF2B5EF4-FFF2-40B4-BE49-F238E27FC236}">
+                  <a16:creationId xmlns:a16="http://schemas.microsoft.com/office/drawing/2014/main" id="{A298E2F6-801E-40FE-8A37-B86CA03C2660}"/>
+                </a:ext>
+              </a:extLst>
+            </p:cNvPr>
+            <p:cNvSpPr/>
+            <p:nvPr/>
+          </p:nvSpPr>
+          <p:spPr>
+            <a:xfrm>
+              <a:off x="7536578" y="2030612"/>
+              <a:ext cx="358775" cy="311150"/>
+            </a:xfrm>
+            <a:prstGeom prst="roundRect">
+              <a:avLst>
+                <a:gd name="adj" fmla="val 2239"/>
+              </a:avLst>
+            </a:prstGeom>
+            <a:solidFill>
+              <a:schemeClr val="accent2">
+                <a:lumMod val="60000"/>
+                <a:lumOff val="40000"/>
+              </a:schemeClr>
+            </a:solidFill>
+          </p:spPr>
+          <p:style>
+            <a:lnRef idx="2">
+              <a:schemeClr val="accent1">
+                <a:shade val="50000"/>
+              </a:schemeClr>
+            </a:lnRef>
+            <a:fillRef idx="1">
+              <a:schemeClr val="accent1"/>
+            </a:fillRef>
+            <a:effectRef idx="0">
+              <a:schemeClr val="accent1"/>
+            </a:effectRef>
+            <a:fontRef idx="minor">
+              <a:schemeClr val="lt1"/>
+            </a:fontRef>
+          </p:style>
+          <p:txBody>
+            <a:bodyPr rtlCol="0" anchor="ctr"/>
+            <a:lstStyle/>
+            <a:p>
+              <a:pPr algn="ctr"/>
+              <a:endParaRPr lang="ko-KR" altLang="en-US"/>
+            </a:p>
+          </p:txBody>
+        </p:sp>
+        <p:sp>
+          <p:nvSpPr>
+            <p:cNvPr id="59" name="사각형: 둥근 모서리 58">
+              <a:extLst>
+                <a:ext uri="{FF2B5EF4-FFF2-40B4-BE49-F238E27FC236}">
+                  <a16:creationId xmlns:a16="http://schemas.microsoft.com/office/drawing/2014/main" id="{86F6FAD8-2694-C5AD-257B-7B45745A219D}"/>
+                </a:ext>
+              </a:extLst>
+            </p:cNvPr>
+            <p:cNvSpPr/>
+            <p:nvPr/>
+          </p:nvSpPr>
+          <p:spPr>
+            <a:xfrm>
+              <a:off x="7107996" y="2027177"/>
+              <a:ext cx="358775" cy="311150"/>
+            </a:xfrm>
+            <a:prstGeom prst="roundRect">
+              <a:avLst>
+                <a:gd name="adj" fmla="val 2239"/>
+              </a:avLst>
+            </a:prstGeom>
+            <a:solidFill>
+              <a:schemeClr val="accent2">
+                <a:lumMod val="60000"/>
+                <a:lumOff val="40000"/>
+              </a:schemeClr>
+            </a:solidFill>
+          </p:spPr>
+          <p:style>
+            <a:lnRef idx="2">
+              <a:schemeClr val="accent1">
+                <a:shade val="50000"/>
+              </a:schemeClr>
+            </a:lnRef>
+            <a:fillRef idx="1">
+              <a:schemeClr val="accent1"/>
+            </a:fillRef>
+            <a:effectRef idx="0">
+              <a:schemeClr val="accent1"/>
+            </a:effectRef>
+            <a:fontRef idx="minor">
+              <a:schemeClr val="lt1"/>
+            </a:fontRef>
+          </p:style>
+          <p:txBody>
+            <a:bodyPr rtlCol="0" anchor="ctr"/>
+            <a:lstStyle/>
+            <a:p>
+              <a:pPr algn="ctr"/>
+              <a:endParaRPr lang="ko-KR" altLang="en-US"/>
+            </a:p>
+          </p:txBody>
+        </p:sp>
+        <p:sp>
+          <p:nvSpPr>
+            <p:cNvPr id="60" name="사각형: 둥근 모서리 59">
+              <a:extLst>
+                <a:ext uri="{FF2B5EF4-FFF2-40B4-BE49-F238E27FC236}">
+                  <a16:creationId xmlns:a16="http://schemas.microsoft.com/office/drawing/2014/main" id="{FF00FFC7-2004-EF3B-1283-CA4D9EC419F7}"/>
+                </a:ext>
+              </a:extLst>
+            </p:cNvPr>
+            <p:cNvSpPr/>
+            <p:nvPr/>
+          </p:nvSpPr>
+          <p:spPr>
+            <a:xfrm>
+              <a:off x="7982182" y="2030612"/>
+              <a:ext cx="358775" cy="311150"/>
+            </a:xfrm>
+            <a:prstGeom prst="roundRect">
+              <a:avLst>
+                <a:gd name="adj" fmla="val 2239"/>
+              </a:avLst>
+            </a:prstGeom>
+            <a:solidFill>
+              <a:schemeClr val="accent2">
+                <a:lumMod val="60000"/>
+                <a:lumOff val="40000"/>
+              </a:schemeClr>
+            </a:solidFill>
+          </p:spPr>
+          <p:style>
+            <a:lnRef idx="2">
+              <a:schemeClr val="accent1">
+                <a:shade val="50000"/>
+              </a:schemeClr>
+            </a:lnRef>
+            <a:fillRef idx="1">
+              <a:schemeClr val="accent1"/>
+            </a:fillRef>
+            <a:effectRef idx="0">
+              <a:schemeClr val="accent1"/>
+            </a:effectRef>
+            <a:fontRef idx="minor">
+              <a:schemeClr val="lt1"/>
+            </a:fontRef>
+          </p:style>
+          <p:txBody>
+            <a:bodyPr rtlCol="0" anchor="ctr"/>
+            <a:lstStyle/>
+            <a:p>
+              <a:pPr algn="ctr"/>
+              <a:endParaRPr lang="ko-KR" altLang="en-US"/>
+            </a:p>
+          </p:txBody>
+        </p:sp>
+        <p:pic>
+          <p:nvPicPr>
+            <p:cNvPr id="61" name="Picture 2" descr="잎 - 무료 자연개 아이콘">
+              <a:extLst>
+                <a:ext uri="{FF2B5EF4-FFF2-40B4-BE49-F238E27FC236}">
+                  <a16:creationId xmlns:a16="http://schemas.microsoft.com/office/drawing/2014/main" id="{676D9960-27FD-FF54-228D-3A718DDD7681}"/>
+                </a:ext>
+              </a:extLst>
+            </p:cNvPr>
+            <p:cNvPicPr>
+              <a:picLocks noChangeAspect="1" noChangeArrowheads="1"/>
+            </p:cNvPicPr>
+            <p:nvPr/>
+          </p:nvPicPr>
+          <p:blipFill>
+            <a:blip r:embed="rId2">
+              <a:extLst>
+                <a:ext uri="{28A0092B-C50C-407E-A947-70E740481C1C}">
+                  <a14:useLocalDpi xmlns:a14="http://schemas.microsoft.com/office/drawing/2010/main" val="0"/>
+                </a:ext>
+              </a:extLst>
+            </a:blip>
+            <a:srcRect/>
+            <a:stretch>
+              <a:fillRect/>
+            </a:stretch>
+          </p:blipFill>
+          <p:spPr bwMode="auto">
+            <a:xfrm>
+              <a:off x="7590348" y="2059484"/>
+              <a:ext cx="251234" cy="251234"/>
+            </a:xfrm>
+            <a:prstGeom prst="rect">
+              <a:avLst/>
+            </a:prstGeom>
+            <a:noFill/>
+            <a:extLst>
+              <a:ext uri="{909E8E84-426E-40DD-AFC4-6F175D3DCCD1}">
+                <a14:hiddenFill xmlns:a14="http://schemas.microsoft.com/office/drawing/2010/main">
+                  <a:solidFill>
+                    <a:srgbClr val="FFFFFF"/>
+                  </a:solidFill>
+                </a14:hiddenFill>
+              </a:ext>
+            </a:extLst>
+          </p:spPr>
+        </p:pic>
+        <p:pic>
+          <p:nvPicPr>
+            <p:cNvPr id="62" name="Picture 2" descr="Material 디자인 스타일의 달팽이 아이콘">
+              <a:extLst>
+                <a:ext uri="{FF2B5EF4-FFF2-40B4-BE49-F238E27FC236}">
+                  <a16:creationId xmlns:a16="http://schemas.microsoft.com/office/drawing/2014/main" id="{E0B64878-9997-3A2E-E987-5D52851997C1}"/>
+                </a:ext>
+              </a:extLst>
+            </p:cNvPr>
+            <p:cNvPicPr>
+              <a:picLocks noChangeAspect="1" noChangeArrowheads="1"/>
+            </p:cNvPicPr>
+            <p:nvPr/>
+          </p:nvPicPr>
+          <p:blipFill>
+            <a:blip r:embed="rId3">
+              <a:extLst>
+                <a:ext uri="{BEBA8EAE-BF5A-486C-A8C5-ECC9F3942E4B}">
+                  <a14:imgProps xmlns:a14="http://schemas.microsoft.com/office/drawing/2010/main">
+                    <a14:imgLayer r:embed="rId4">
+                      <a14:imgEffect>
+                        <a14:backgroundRemoval t="10000" b="90000" l="8750" r="91250">
+                          <a14:foregroundMark x1="90833" y1="41250" x2="90833" y2="41250"/>
+                          <a14:foregroundMark x1="91250" y1="16167" x2="91250" y2="16167"/>
+                          <a14:foregroundMark x1="8750" y1="46000" x2="8750" y2="46000"/>
+                        </a14:backgroundRemoval>
+                      </a14:imgEffect>
+                    </a14:imgLayer>
+                  </a14:imgProps>
+                </a:ext>
+                <a:ext uri="{28A0092B-C50C-407E-A947-70E740481C1C}">
+                  <a14:useLocalDpi xmlns:a14="http://schemas.microsoft.com/office/drawing/2010/main" val="0"/>
+                </a:ext>
+              </a:extLst>
+            </a:blip>
+            <a:srcRect/>
+            <a:stretch>
+              <a:fillRect/>
+            </a:stretch>
+          </p:blipFill>
+          <p:spPr bwMode="auto">
+            <a:xfrm>
+              <a:off x="7138805" y="2034047"/>
+              <a:ext cx="297156" cy="297156"/>
+            </a:xfrm>
+            <a:prstGeom prst="rect">
+              <a:avLst/>
+            </a:prstGeom>
+            <a:noFill/>
+            <a:extLst>
+              <a:ext uri="{909E8E84-426E-40DD-AFC4-6F175D3DCCD1}">
+                <a14:hiddenFill xmlns:a14="http://schemas.microsoft.com/office/drawing/2010/main">
+                  <a:solidFill>
+                    <a:srgbClr val="FFFFFF"/>
+                  </a:solidFill>
+                </a14:hiddenFill>
+              </a:ext>
+            </a:extLst>
+          </p:spPr>
+        </p:pic>
+        <p:pic>
+          <p:nvPicPr>
+            <p:cNvPr id="63" name="Picture 4" descr="상점 아이콘 구매 기호입니다 장바구니 아이콘재고에 대 한 가방에 대한 스톡 벡터 아트 및 기타 이미지 - 가방, 고객, 구매 -  iStock">
+              <a:extLst>
+                <a:ext uri="{FF2B5EF4-FFF2-40B4-BE49-F238E27FC236}">
+                  <a16:creationId xmlns:a16="http://schemas.microsoft.com/office/drawing/2014/main" id="{D9E08D37-7342-DA02-F1B9-8C08DC53D1D6}"/>
+                </a:ext>
+              </a:extLst>
+            </p:cNvPr>
+            <p:cNvPicPr>
+              <a:picLocks noChangeAspect="1" noChangeArrowheads="1"/>
+            </p:cNvPicPr>
+            <p:nvPr/>
+          </p:nvPicPr>
+          <p:blipFill>
+            <a:blip r:embed="rId5">
+              <a:extLst>
+                <a:ext uri="{BEBA8EAE-BF5A-486C-A8C5-ECC9F3942E4B}">
+                  <a14:imgProps xmlns:a14="http://schemas.microsoft.com/office/drawing/2010/main">
+                    <a14:imgLayer r:embed="rId6">
+                      <a14:imgEffect>
+                        <a14:backgroundRemoval t="10000" b="90000" l="10000" r="90000">
+                          <a14:foregroundMark x1="46154" y1="42067" x2="53846" y2="41106"/>
+                          <a14:foregroundMark x1="63462" y1="32452" x2="63462" y2="32452"/>
+                          <a14:foregroundMark x1="41587" y1="29087" x2="40144" y2="29567"/>
+                        </a14:backgroundRemoval>
+                      </a14:imgEffect>
+                    </a14:imgLayer>
+                  </a14:imgProps>
+                </a:ext>
+                <a:ext uri="{28A0092B-C50C-407E-A947-70E740481C1C}">
+                  <a14:useLocalDpi xmlns:a14="http://schemas.microsoft.com/office/drawing/2010/main" val="0"/>
+                </a:ext>
+              </a:extLst>
+            </a:blip>
+            <a:srcRect/>
+            <a:stretch>
+              <a:fillRect/>
+            </a:stretch>
+          </p:blipFill>
+          <p:spPr bwMode="auto">
+            <a:xfrm>
+              <a:off x="7971237" y="1996815"/>
+              <a:ext cx="385763" cy="385763"/>
+            </a:xfrm>
+            <a:prstGeom prst="rect">
+              <a:avLst/>
+            </a:prstGeom>
+            <a:noFill/>
+            <a:extLst>
+              <a:ext uri="{909E8E84-426E-40DD-AFC4-6F175D3DCCD1}">
+                <a14:hiddenFill xmlns:a14="http://schemas.microsoft.com/office/drawing/2010/main">
+                  <a:solidFill>
+                    <a:srgbClr val="FFFFFF"/>
+                  </a:solidFill>
+                </a14:hiddenFill>
+              </a:ext>
+            </a:extLst>
+          </p:spPr>
+        </p:pic>
+        <p:sp>
+          <p:nvSpPr>
+            <p:cNvPr id="64" name="사각형: 둥근 모서리 63">
+              <a:extLst>
+                <a:ext uri="{FF2B5EF4-FFF2-40B4-BE49-F238E27FC236}">
+                  <a16:creationId xmlns:a16="http://schemas.microsoft.com/office/drawing/2014/main" id="{CF11F975-2CB9-3789-1FDC-A0D5C1061752}"/>
+                </a:ext>
+              </a:extLst>
+            </p:cNvPr>
+            <p:cNvSpPr/>
+            <p:nvPr/>
+          </p:nvSpPr>
+          <p:spPr>
+            <a:xfrm>
+              <a:off x="9162824" y="2334638"/>
+              <a:ext cx="2200521" cy="2794000"/>
+            </a:xfrm>
+            <a:prstGeom prst="roundRect">
+              <a:avLst>
+                <a:gd name="adj" fmla="val 2239"/>
+              </a:avLst>
+            </a:prstGeom>
+            <a:solidFill>
+              <a:schemeClr val="bg2">
+                <a:lumMod val="90000"/>
+              </a:schemeClr>
+            </a:solidFill>
+          </p:spPr>
+          <p:style>
+            <a:lnRef idx="2">
+              <a:schemeClr val="accent1">
+                <a:shade val="50000"/>
+              </a:schemeClr>
+            </a:lnRef>
+            <a:fillRef idx="1">
+              <a:schemeClr val="accent1"/>
+            </a:fillRef>
+            <a:effectRef idx="0">
+              <a:schemeClr val="accent1"/>
+            </a:effectRef>
+            <a:fontRef idx="minor">
+              <a:schemeClr val="lt1"/>
+            </a:fontRef>
+          </p:style>
+          <p:txBody>
+            <a:bodyPr rtlCol="0" anchor="ctr"/>
+            <a:lstStyle/>
+            <a:p>
+              <a:pPr algn="ctr"/>
+              <a:endParaRPr lang="ko-KR" altLang="en-US"/>
+            </a:p>
+          </p:txBody>
+        </p:sp>
+        <p:sp>
+          <p:nvSpPr>
+            <p:cNvPr id="65" name="사각형: 둥근 모서리 64">
+              <a:extLst>
+                <a:ext uri="{FF2B5EF4-FFF2-40B4-BE49-F238E27FC236}">
+                  <a16:creationId xmlns:a16="http://schemas.microsoft.com/office/drawing/2014/main" id="{A47C611F-5AEF-BB7A-B605-75FE814C0B5A}"/>
+                </a:ext>
+              </a:extLst>
+            </p:cNvPr>
+            <p:cNvSpPr/>
+            <p:nvPr/>
+          </p:nvSpPr>
+          <p:spPr>
+            <a:xfrm>
+              <a:off x="11110538" y="2239388"/>
+              <a:ext cx="323850" cy="323850"/>
+            </a:xfrm>
+            <a:prstGeom prst="roundRect">
+              <a:avLst/>
+            </a:prstGeom>
+            <a:solidFill>
+              <a:schemeClr val="bg2">
+                <a:lumMod val="90000"/>
+              </a:schemeClr>
+            </a:solidFill>
+          </p:spPr>
+          <p:style>
+            <a:lnRef idx="2">
+              <a:schemeClr val="accent1">
+                <a:shade val="50000"/>
+              </a:schemeClr>
+            </a:lnRef>
+            <a:fillRef idx="1">
+              <a:schemeClr val="accent1"/>
+            </a:fillRef>
+            <a:effectRef idx="0">
+              <a:schemeClr val="accent1"/>
+            </a:effectRef>
+            <a:fontRef idx="minor">
+              <a:schemeClr val="lt1"/>
+            </a:fontRef>
+          </p:style>
+          <p:txBody>
+            <a:bodyPr rtlCol="0" anchor="ctr"/>
+            <a:lstStyle/>
+            <a:p>
+              <a:pPr algn="ctr"/>
+              <a:endParaRPr lang="ko-KR" altLang="en-US"/>
+            </a:p>
+          </p:txBody>
+        </p:sp>
+        <p:sp>
+          <p:nvSpPr>
+            <p:cNvPr id="66" name="곱하기 기호 65">
+              <a:extLst>
+                <a:ext uri="{FF2B5EF4-FFF2-40B4-BE49-F238E27FC236}">
+                  <a16:creationId xmlns:a16="http://schemas.microsoft.com/office/drawing/2014/main" id="{6D8C23B6-65FC-937E-C31F-B62402E7886B}"/>
+                </a:ext>
+              </a:extLst>
+            </p:cNvPr>
+            <p:cNvSpPr/>
+            <p:nvPr/>
+          </p:nvSpPr>
+          <p:spPr>
+            <a:xfrm>
+              <a:off x="11093401" y="2222137"/>
+              <a:ext cx="358775" cy="358775"/>
+            </a:xfrm>
+            <a:prstGeom prst="mathMultiply">
+              <a:avLst>
+                <a:gd name="adj1" fmla="val 16941"/>
+              </a:avLst>
+            </a:prstGeom>
+          </p:spPr>
+          <p:style>
+            <a:lnRef idx="2">
+              <a:schemeClr val="accent1">
+                <a:shade val="50000"/>
+              </a:schemeClr>
+            </a:lnRef>
+            <a:fillRef idx="1">
+              <a:schemeClr val="accent1"/>
+            </a:fillRef>
+            <a:effectRef idx="0">
+              <a:schemeClr val="accent1"/>
+            </a:effectRef>
+            <a:fontRef idx="minor">
+              <a:schemeClr val="lt1"/>
+            </a:fontRef>
+          </p:style>
+          <p:txBody>
+            <a:bodyPr rtlCol="0" anchor="ctr"/>
+            <a:lstStyle/>
+            <a:p>
+              <a:pPr algn="ctr"/>
+              <a:endParaRPr lang="ko-KR" altLang="en-US"/>
+            </a:p>
+          </p:txBody>
+        </p:sp>
+        <p:sp>
+          <p:nvSpPr>
+            <p:cNvPr id="67" name="TextBox 66">
+              <a:extLst>
+                <a:ext uri="{FF2B5EF4-FFF2-40B4-BE49-F238E27FC236}">
+                  <a16:creationId xmlns:a16="http://schemas.microsoft.com/office/drawing/2014/main" id="{9937A7CA-4071-42A1-C200-1C4A14DE9EE0}"/>
+                </a:ext>
+              </a:extLst>
+            </p:cNvPr>
+            <p:cNvSpPr txBox="1"/>
+            <p:nvPr/>
+          </p:nvSpPr>
+          <p:spPr>
+            <a:xfrm>
+              <a:off x="7456215" y="2394100"/>
+              <a:ext cx="1244600" cy="261610"/>
+            </a:xfrm>
+            <a:prstGeom prst="rect">
+              <a:avLst/>
+            </a:prstGeom>
+            <a:noFill/>
+          </p:spPr>
+          <p:txBody>
+            <a:bodyPr wrap="square" rtlCol="0">
+              <a:spAutoFit/>
+            </a:bodyPr>
+            <a:lstStyle/>
+            <a:p>
+              <a:pPr algn="ctr"/>
+              <a:r>
+                <a:rPr lang="ko-KR" altLang="en-US" sz="1100" b="1"/>
+                <a:t>알 목록</a:t>
+              </a:r>
+            </a:p>
+          </p:txBody>
+        </p:sp>
+        <p:sp>
+          <p:nvSpPr>
+            <p:cNvPr id="68" name="사각형: 둥근 모서리 67">
+              <a:extLst>
+                <a:ext uri="{FF2B5EF4-FFF2-40B4-BE49-F238E27FC236}">
+                  <a16:creationId xmlns:a16="http://schemas.microsoft.com/office/drawing/2014/main" id="{6D2E2D5C-CE42-D93F-2D94-79DBA7BA7038}"/>
+                </a:ext>
+              </a:extLst>
+            </p:cNvPr>
+            <p:cNvSpPr/>
+            <p:nvPr/>
+          </p:nvSpPr>
+          <p:spPr>
+            <a:xfrm>
+              <a:off x="9320012" y="2771292"/>
+              <a:ext cx="601164" cy="582120"/>
+            </a:xfrm>
+            <a:prstGeom prst="roundRect">
+              <a:avLst/>
+            </a:prstGeom>
+            <a:solidFill>
+              <a:schemeClr val="bg2">
+                <a:lumMod val="75000"/>
+              </a:schemeClr>
+            </a:solidFill>
+            <a:ln>
+              <a:noFill/>
+            </a:ln>
+          </p:spPr>
+          <p:style>
+            <a:lnRef idx="2">
+              <a:schemeClr val="accent1">
+                <a:shade val="50000"/>
+              </a:schemeClr>
+            </a:lnRef>
+            <a:fillRef idx="1">
+              <a:schemeClr val="accent1"/>
+            </a:fillRef>
+            <a:effectRef idx="0">
+              <a:schemeClr val="accent1"/>
+            </a:effectRef>
+            <a:fontRef idx="minor">
+              <a:schemeClr val="lt1"/>
+            </a:fontRef>
+          </p:style>
+          <p:txBody>
+            <a:bodyPr rtlCol="0" anchor="ctr"/>
+            <a:lstStyle/>
+            <a:p>
+              <a:pPr algn="ctr"/>
+              <a:endParaRPr lang="ko-KR" altLang="en-US"/>
+            </a:p>
+          </p:txBody>
+        </p:sp>
+        <p:sp>
+          <p:nvSpPr>
+            <p:cNvPr id="69" name="사각형: 둥근 모서리 68">
+              <a:extLst>
+                <a:ext uri="{FF2B5EF4-FFF2-40B4-BE49-F238E27FC236}">
+                  <a16:creationId xmlns:a16="http://schemas.microsoft.com/office/drawing/2014/main" id="{73709B3B-64E7-B109-90B7-971FEC8D83AE}"/>
+                </a:ext>
+              </a:extLst>
+            </p:cNvPr>
+            <p:cNvSpPr/>
+            <p:nvPr/>
+          </p:nvSpPr>
+          <p:spPr>
+            <a:xfrm>
+              <a:off x="7114111" y="2774945"/>
+              <a:ext cx="400050" cy="400050"/>
+            </a:xfrm>
+            <a:prstGeom prst="roundRect">
+              <a:avLst/>
+            </a:prstGeom>
+          </p:spPr>
+          <p:style>
+            <a:lnRef idx="2">
+              <a:schemeClr val="accent1">
+                <a:shade val="50000"/>
+              </a:schemeClr>
+            </a:lnRef>
+            <a:fillRef idx="1">
+              <a:schemeClr val="accent1"/>
+            </a:fillRef>
+            <a:effectRef idx="0">
+              <a:schemeClr val="accent1"/>
+            </a:effectRef>
+            <a:fontRef idx="minor">
+              <a:schemeClr val="lt1"/>
+            </a:fontRef>
+          </p:style>
+          <p:txBody>
+            <a:bodyPr rtlCol="0" anchor="ctr"/>
+            <a:lstStyle/>
+            <a:p>
+              <a:pPr algn="ctr"/>
+              <a:endParaRPr lang="ko-KR" altLang="en-US"/>
+            </a:p>
+          </p:txBody>
+        </p:sp>
+        <p:sp>
+          <p:nvSpPr>
+            <p:cNvPr id="70" name="사각형: 둥근 모서리 69">
+              <a:extLst>
+                <a:ext uri="{FF2B5EF4-FFF2-40B4-BE49-F238E27FC236}">
+                  <a16:creationId xmlns:a16="http://schemas.microsoft.com/office/drawing/2014/main" id="{02EE2378-C7AE-A3A3-C1BC-CF3C593CAE31}"/>
+                </a:ext>
+              </a:extLst>
+            </p:cNvPr>
+            <p:cNvSpPr/>
+            <p:nvPr/>
+          </p:nvSpPr>
+          <p:spPr>
+            <a:xfrm>
+              <a:off x="7612850" y="2774945"/>
+              <a:ext cx="400050" cy="400050"/>
+            </a:xfrm>
+            <a:prstGeom prst="roundRect">
+              <a:avLst/>
+            </a:prstGeom>
+          </p:spPr>
+          <p:style>
+            <a:lnRef idx="2">
+              <a:schemeClr val="accent1">
+                <a:shade val="50000"/>
+              </a:schemeClr>
+            </a:lnRef>
+            <a:fillRef idx="1">
+              <a:schemeClr val="accent1"/>
+            </a:fillRef>
+            <a:effectRef idx="0">
+              <a:schemeClr val="accent1"/>
+            </a:effectRef>
+            <a:fontRef idx="minor">
+              <a:schemeClr val="lt1"/>
+            </a:fontRef>
+          </p:style>
+          <p:txBody>
+            <a:bodyPr rtlCol="0" anchor="ctr"/>
+            <a:lstStyle/>
+            <a:p>
+              <a:pPr algn="ctr"/>
+              <a:endParaRPr lang="ko-KR" altLang="en-US"/>
+            </a:p>
+          </p:txBody>
+        </p:sp>
+        <p:sp>
+          <p:nvSpPr>
+            <p:cNvPr id="71" name="사각형: 둥근 모서리 70">
+              <a:extLst>
+                <a:ext uri="{FF2B5EF4-FFF2-40B4-BE49-F238E27FC236}">
+                  <a16:creationId xmlns:a16="http://schemas.microsoft.com/office/drawing/2014/main" id="{54DB15EB-A79D-CE09-84E0-A4DDE1E178A0}"/>
+                </a:ext>
+              </a:extLst>
+            </p:cNvPr>
+            <p:cNvSpPr/>
+            <p:nvPr/>
+          </p:nvSpPr>
+          <p:spPr>
+            <a:xfrm>
+              <a:off x="8110442" y="2774945"/>
+              <a:ext cx="400050" cy="400050"/>
+            </a:xfrm>
+            <a:prstGeom prst="roundRect">
+              <a:avLst/>
+            </a:prstGeom>
+          </p:spPr>
+          <p:style>
+            <a:lnRef idx="2">
+              <a:schemeClr val="accent1">
+                <a:shade val="50000"/>
+              </a:schemeClr>
+            </a:lnRef>
+            <a:fillRef idx="1">
+              <a:schemeClr val="accent1"/>
+            </a:fillRef>
+            <a:effectRef idx="0">
+              <a:schemeClr val="accent1"/>
+            </a:effectRef>
+            <a:fontRef idx="minor">
+              <a:schemeClr val="lt1"/>
+            </a:fontRef>
+          </p:style>
+          <p:txBody>
+            <a:bodyPr rtlCol="0" anchor="ctr"/>
+            <a:lstStyle/>
+            <a:p>
+              <a:pPr algn="ctr"/>
+              <a:endParaRPr lang="ko-KR" altLang="en-US"/>
+            </a:p>
+          </p:txBody>
+        </p:sp>
+        <p:sp>
+          <p:nvSpPr>
+            <p:cNvPr id="72" name="사각형: 둥근 모서리 71">
+              <a:extLst>
+                <a:ext uri="{FF2B5EF4-FFF2-40B4-BE49-F238E27FC236}">
+                  <a16:creationId xmlns:a16="http://schemas.microsoft.com/office/drawing/2014/main" id="{38582039-2DB6-3E6D-B27D-897D9A06342F}"/>
+                </a:ext>
+              </a:extLst>
+            </p:cNvPr>
+            <p:cNvSpPr/>
+            <p:nvPr/>
+          </p:nvSpPr>
+          <p:spPr>
+            <a:xfrm>
+              <a:off x="8608034" y="2774945"/>
+              <a:ext cx="400050" cy="400050"/>
+            </a:xfrm>
+            <a:prstGeom prst="roundRect">
+              <a:avLst/>
+            </a:prstGeom>
+          </p:spPr>
+          <p:style>
+            <a:lnRef idx="2">
+              <a:schemeClr val="accent1">
+                <a:shade val="50000"/>
+              </a:schemeClr>
+            </a:lnRef>
+            <a:fillRef idx="1">
+              <a:schemeClr val="accent1"/>
+            </a:fillRef>
+            <a:effectRef idx="0">
+              <a:schemeClr val="accent1"/>
+            </a:effectRef>
+            <a:fontRef idx="minor">
+              <a:schemeClr val="lt1"/>
+            </a:fontRef>
+          </p:style>
+          <p:txBody>
+            <a:bodyPr rtlCol="0" anchor="ctr"/>
+            <a:lstStyle/>
+            <a:p>
+              <a:pPr algn="ctr"/>
+              <a:endParaRPr lang="ko-KR" altLang="en-US"/>
+            </a:p>
+          </p:txBody>
+        </p:sp>
+        <p:sp>
+          <p:nvSpPr>
+            <p:cNvPr id="73" name="사각형: 둥근 모서리 72">
+              <a:extLst>
+                <a:ext uri="{FF2B5EF4-FFF2-40B4-BE49-F238E27FC236}">
+                  <a16:creationId xmlns:a16="http://schemas.microsoft.com/office/drawing/2014/main" id="{D0EBEFB8-A5BB-F956-94B2-B3F67AFDA861}"/>
+                </a:ext>
+              </a:extLst>
+            </p:cNvPr>
+            <p:cNvSpPr/>
+            <p:nvPr/>
+          </p:nvSpPr>
+          <p:spPr>
+            <a:xfrm>
+              <a:off x="7114111" y="3282945"/>
+              <a:ext cx="400050" cy="400050"/>
+            </a:xfrm>
+            <a:prstGeom prst="roundRect">
+              <a:avLst/>
+            </a:prstGeom>
+          </p:spPr>
+          <p:style>
+            <a:lnRef idx="2">
+              <a:schemeClr val="accent1">
+                <a:shade val="50000"/>
+              </a:schemeClr>
+            </a:lnRef>
+            <a:fillRef idx="1">
+              <a:schemeClr val="accent1"/>
+            </a:fillRef>
+            <a:effectRef idx="0">
+              <a:schemeClr val="accent1"/>
+            </a:effectRef>
+            <a:fontRef idx="minor">
+              <a:schemeClr val="lt1"/>
+            </a:fontRef>
+          </p:style>
+          <p:txBody>
+            <a:bodyPr rtlCol="0" anchor="ctr"/>
+            <a:lstStyle/>
+            <a:p>
+              <a:pPr algn="ctr"/>
+              <a:endParaRPr lang="ko-KR" altLang="en-US"/>
+            </a:p>
+          </p:txBody>
+        </p:sp>
+        <p:sp>
+          <p:nvSpPr>
+            <p:cNvPr id="74" name="사각형: 둥근 모서리 73">
+              <a:extLst>
+                <a:ext uri="{FF2B5EF4-FFF2-40B4-BE49-F238E27FC236}">
+                  <a16:creationId xmlns:a16="http://schemas.microsoft.com/office/drawing/2014/main" id="{55BC3219-9D8D-CF48-6709-B6890B31A474}"/>
+                </a:ext>
+              </a:extLst>
+            </p:cNvPr>
+            <p:cNvSpPr/>
+            <p:nvPr/>
+          </p:nvSpPr>
+          <p:spPr>
+            <a:xfrm>
+              <a:off x="7612850" y="3282945"/>
+              <a:ext cx="400050" cy="400050"/>
+            </a:xfrm>
+            <a:prstGeom prst="roundRect">
+              <a:avLst/>
+            </a:prstGeom>
+          </p:spPr>
+          <p:style>
+            <a:lnRef idx="2">
+              <a:schemeClr val="accent1">
+                <a:shade val="50000"/>
+              </a:schemeClr>
+            </a:lnRef>
+            <a:fillRef idx="1">
+              <a:schemeClr val="accent1"/>
+            </a:fillRef>
+            <a:effectRef idx="0">
+              <a:schemeClr val="accent1"/>
+            </a:effectRef>
+            <a:fontRef idx="minor">
+              <a:schemeClr val="lt1"/>
+            </a:fontRef>
+          </p:style>
+          <p:txBody>
+            <a:bodyPr rtlCol="0" anchor="ctr"/>
+            <a:lstStyle/>
+            <a:p>
+              <a:pPr algn="ctr"/>
+              <a:endParaRPr lang="ko-KR" altLang="en-US"/>
+            </a:p>
+          </p:txBody>
+        </p:sp>
+        <p:sp>
+          <p:nvSpPr>
+            <p:cNvPr id="75" name="사각형: 둥근 모서리 74">
+              <a:extLst>
+                <a:ext uri="{FF2B5EF4-FFF2-40B4-BE49-F238E27FC236}">
+                  <a16:creationId xmlns:a16="http://schemas.microsoft.com/office/drawing/2014/main" id="{B57694F0-A736-9CA1-FC90-BE58D74EF92F}"/>
+                </a:ext>
+              </a:extLst>
+            </p:cNvPr>
+            <p:cNvSpPr/>
+            <p:nvPr/>
+          </p:nvSpPr>
+          <p:spPr>
+            <a:xfrm>
+              <a:off x="8110442" y="3282945"/>
+              <a:ext cx="400050" cy="400050"/>
+            </a:xfrm>
+            <a:prstGeom prst="roundRect">
+              <a:avLst/>
+            </a:prstGeom>
+          </p:spPr>
+          <p:style>
+            <a:lnRef idx="2">
+              <a:schemeClr val="accent1">
+                <a:shade val="50000"/>
+              </a:schemeClr>
+            </a:lnRef>
+            <a:fillRef idx="1">
+              <a:schemeClr val="accent1"/>
+            </a:fillRef>
+            <a:effectRef idx="0">
+              <a:schemeClr val="accent1"/>
+            </a:effectRef>
+            <a:fontRef idx="minor">
+              <a:schemeClr val="lt1"/>
+            </a:fontRef>
+          </p:style>
+          <p:txBody>
+            <a:bodyPr rtlCol="0" anchor="ctr"/>
+            <a:lstStyle/>
+            <a:p>
+              <a:pPr algn="ctr"/>
+              <a:endParaRPr lang="ko-KR" altLang="en-US"/>
+            </a:p>
+          </p:txBody>
+        </p:sp>
+        <p:sp>
+          <p:nvSpPr>
+            <p:cNvPr id="76" name="사각형: 둥근 모서리 75">
+              <a:extLst>
+                <a:ext uri="{FF2B5EF4-FFF2-40B4-BE49-F238E27FC236}">
+                  <a16:creationId xmlns:a16="http://schemas.microsoft.com/office/drawing/2014/main" id="{439E140A-9532-A429-22BA-9A8F77EFFCC8}"/>
+                </a:ext>
+              </a:extLst>
+            </p:cNvPr>
+            <p:cNvSpPr/>
+            <p:nvPr/>
+          </p:nvSpPr>
+          <p:spPr>
+            <a:xfrm>
+              <a:off x="8608034" y="3282945"/>
+              <a:ext cx="400050" cy="400050"/>
+            </a:xfrm>
+            <a:prstGeom prst="roundRect">
+              <a:avLst/>
+            </a:prstGeom>
+          </p:spPr>
+          <p:style>
+            <a:lnRef idx="2">
+              <a:schemeClr val="accent1">
+                <a:shade val="50000"/>
+              </a:schemeClr>
+            </a:lnRef>
+            <a:fillRef idx="1">
+              <a:schemeClr val="accent1"/>
+            </a:fillRef>
+            <a:effectRef idx="0">
+              <a:schemeClr val="accent1"/>
+            </a:effectRef>
+            <a:fontRef idx="minor">
+              <a:schemeClr val="lt1"/>
+            </a:fontRef>
+          </p:style>
+          <p:txBody>
+            <a:bodyPr rtlCol="0" anchor="ctr"/>
+            <a:lstStyle/>
+            <a:p>
+              <a:pPr algn="ctr"/>
+              <a:endParaRPr lang="ko-KR" altLang="en-US"/>
+            </a:p>
+          </p:txBody>
+        </p:sp>
+        <p:sp>
+          <p:nvSpPr>
+            <p:cNvPr id="77" name="사각형: 둥근 모서리 76">
+              <a:extLst>
+                <a:ext uri="{FF2B5EF4-FFF2-40B4-BE49-F238E27FC236}">
+                  <a16:creationId xmlns:a16="http://schemas.microsoft.com/office/drawing/2014/main" id="{651E5BBC-4D91-B6B9-D65C-A8F531EE5D54}"/>
+                </a:ext>
+              </a:extLst>
+            </p:cNvPr>
+            <p:cNvSpPr/>
+            <p:nvPr/>
+          </p:nvSpPr>
+          <p:spPr>
+            <a:xfrm>
+              <a:off x="7114111" y="3790945"/>
+              <a:ext cx="400050" cy="400050"/>
+            </a:xfrm>
+            <a:prstGeom prst="roundRect">
+              <a:avLst/>
+            </a:prstGeom>
+          </p:spPr>
+          <p:style>
+            <a:lnRef idx="2">
+              <a:schemeClr val="accent1">
+                <a:shade val="50000"/>
+              </a:schemeClr>
+            </a:lnRef>
+            <a:fillRef idx="1">
+              <a:schemeClr val="accent1"/>
+            </a:fillRef>
+            <a:effectRef idx="0">
+              <a:schemeClr val="accent1"/>
+            </a:effectRef>
+            <a:fontRef idx="minor">
+              <a:schemeClr val="lt1"/>
+            </a:fontRef>
+          </p:style>
+          <p:txBody>
+            <a:bodyPr rtlCol="0" anchor="ctr"/>
+            <a:lstStyle/>
+            <a:p>
+              <a:pPr algn="ctr"/>
+              <a:endParaRPr lang="ko-KR" altLang="en-US"/>
+            </a:p>
+          </p:txBody>
+        </p:sp>
+        <p:sp>
+          <p:nvSpPr>
+            <p:cNvPr id="78" name="사각형: 둥근 모서리 77">
+              <a:extLst>
+                <a:ext uri="{FF2B5EF4-FFF2-40B4-BE49-F238E27FC236}">
+                  <a16:creationId xmlns:a16="http://schemas.microsoft.com/office/drawing/2014/main" id="{C01EB51C-D15C-31C1-AB4D-024B5E0F6CD6}"/>
+                </a:ext>
+              </a:extLst>
+            </p:cNvPr>
+            <p:cNvSpPr/>
+            <p:nvPr/>
+          </p:nvSpPr>
+          <p:spPr>
+            <a:xfrm>
+              <a:off x="7612850" y="3790945"/>
+              <a:ext cx="400050" cy="400050"/>
+            </a:xfrm>
+            <a:prstGeom prst="roundRect">
+              <a:avLst/>
+            </a:prstGeom>
+          </p:spPr>
+          <p:style>
+            <a:lnRef idx="2">
+              <a:schemeClr val="accent1">
+                <a:shade val="50000"/>
+              </a:schemeClr>
+            </a:lnRef>
+            <a:fillRef idx="1">
+              <a:schemeClr val="accent1"/>
+            </a:fillRef>
+            <a:effectRef idx="0">
+              <a:schemeClr val="accent1"/>
+            </a:effectRef>
+            <a:fontRef idx="minor">
+              <a:schemeClr val="lt1"/>
+            </a:fontRef>
+          </p:style>
+          <p:txBody>
+            <a:bodyPr rtlCol="0" anchor="ctr"/>
+            <a:lstStyle/>
+            <a:p>
+              <a:pPr algn="ctr"/>
+              <a:endParaRPr lang="ko-KR" altLang="en-US"/>
+            </a:p>
+          </p:txBody>
+        </p:sp>
+        <p:sp>
+          <p:nvSpPr>
+            <p:cNvPr id="79" name="사각형: 둥근 모서리 78">
+              <a:extLst>
+                <a:ext uri="{FF2B5EF4-FFF2-40B4-BE49-F238E27FC236}">
+                  <a16:creationId xmlns:a16="http://schemas.microsoft.com/office/drawing/2014/main" id="{FB142F99-0C68-90B0-E009-2F3BBF1BF3BF}"/>
+                </a:ext>
+              </a:extLst>
+            </p:cNvPr>
+            <p:cNvSpPr/>
+            <p:nvPr/>
+          </p:nvSpPr>
+          <p:spPr>
+            <a:xfrm>
+              <a:off x="8110442" y="3790945"/>
+              <a:ext cx="400050" cy="400050"/>
+            </a:xfrm>
+            <a:prstGeom prst="roundRect">
+              <a:avLst/>
+            </a:prstGeom>
+          </p:spPr>
+          <p:style>
+            <a:lnRef idx="2">
+              <a:schemeClr val="accent1">
+                <a:shade val="50000"/>
+              </a:schemeClr>
+            </a:lnRef>
+            <a:fillRef idx="1">
+              <a:schemeClr val="accent1"/>
+            </a:fillRef>
+            <a:effectRef idx="0">
+              <a:schemeClr val="accent1"/>
+            </a:effectRef>
+            <a:fontRef idx="minor">
+              <a:schemeClr val="lt1"/>
+            </a:fontRef>
+          </p:style>
+          <p:txBody>
+            <a:bodyPr rtlCol="0" anchor="ctr"/>
+            <a:lstStyle/>
+            <a:p>
+              <a:pPr algn="ctr"/>
+              <a:endParaRPr lang="ko-KR" altLang="en-US"/>
+            </a:p>
+          </p:txBody>
+        </p:sp>
+        <p:sp>
+          <p:nvSpPr>
+            <p:cNvPr id="80" name="사각형: 둥근 모서리 79">
+              <a:extLst>
+                <a:ext uri="{FF2B5EF4-FFF2-40B4-BE49-F238E27FC236}">
+                  <a16:creationId xmlns:a16="http://schemas.microsoft.com/office/drawing/2014/main" id="{3B6E9D0F-C41B-6770-0230-30D2106A67D3}"/>
+                </a:ext>
+              </a:extLst>
+            </p:cNvPr>
+            <p:cNvSpPr/>
+            <p:nvPr/>
+          </p:nvSpPr>
+          <p:spPr>
+            <a:xfrm>
+              <a:off x="8608034" y="3790945"/>
+              <a:ext cx="400050" cy="400050"/>
+            </a:xfrm>
+            <a:prstGeom prst="roundRect">
+              <a:avLst/>
+            </a:prstGeom>
+          </p:spPr>
+          <p:style>
+            <a:lnRef idx="2">
+              <a:schemeClr val="accent1">
+                <a:shade val="50000"/>
+              </a:schemeClr>
+            </a:lnRef>
+            <a:fillRef idx="1">
+              <a:schemeClr val="accent1"/>
+            </a:fillRef>
+            <a:effectRef idx="0">
+              <a:schemeClr val="accent1"/>
+            </a:effectRef>
+            <a:fontRef idx="minor">
+              <a:schemeClr val="lt1"/>
+            </a:fontRef>
+          </p:style>
+          <p:txBody>
+            <a:bodyPr rtlCol="0" anchor="ctr"/>
+            <a:lstStyle/>
+            <a:p>
+              <a:pPr algn="ctr"/>
+              <a:endParaRPr lang="ko-KR" altLang="en-US"/>
+            </a:p>
+          </p:txBody>
+        </p:sp>
+        <p:sp>
+          <p:nvSpPr>
+            <p:cNvPr id="81" name="사각형: 둥근 모서리 80">
+              <a:extLst>
+                <a:ext uri="{FF2B5EF4-FFF2-40B4-BE49-F238E27FC236}">
+                  <a16:creationId xmlns:a16="http://schemas.microsoft.com/office/drawing/2014/main" id="{55B5C92D-6E13-9BD7-A30C-D3F34423C025}"/>
+                </a:ext>
+              </a:extLst>
+            </p:cNvPr>
+            <p:cNvSpPr/>
+            <p:nvPr/>
+          </p:nvSpPr>
+          <p:spPr>
+            <a:xfrm>
+              <a:off x="7114111" y="4298945"/>
+              <a:ext cx="400050" cy="400050"/>
+            </a:xfrm>
+            <a:prstGeom prst="roundRect">
+              <a:avLst/>
+            </a:prstGeom>
+          </p:spPr>
+          <p:style>
+            <a:lnRef idx="2">
+              <a:schemeClr val="accent1">
+                <a:shade val="50000"/>
+              </a:schemeClr>
+            </a:lnRef>
+            <a:fillRef idx="1">
+              <a:schemeClr val="accent1"/>
+            </a:fillRef>
+            <a:effectRef idx="0">
+              <a:schemeClr val="accent1"/>
+            </a:effectRef>
+            <a:fontRef idx="minor">
+              <a:schemeClr val="lt1"/>
+            </a:fontRef>
+          </p:style>
+          <p:txBody>
+            <a:bodyPr rtlCol="0" anchor="ctr"/>
+            <a:lstStyle/>
+            <a:p>
+              <a:pPr algn="ctr"/>
+              <a:endParaRPr lang="ko-KR" altLang="en-US"/>
+            </a:p>
+          </p:txBody>
+        </p:sp>
+        <p:sp>
+          <p:nvSpPr>
+            <p:cNvPr id="82" name="사각형: 둥근 모서리 81">
+              <a:extLst>
+                <a:ext uri="{FF2B5EF4-FFF2-40B4-BE49-F238E27FC236}">
+                  <a16:creationId xmlns:a16="http://schemas.microsoft.com/office/drawing/2014/main" id="{3747D7B6-1317-4AC7-4E27-A07B471F8E3D}"/>
+                </a:ext>
+              </a:extLst>
+            </p:cNvPr>
+            <p:cNvSpPr/>
+            <p:nvPr/>
+          </p:nvSpPr>
+          <p:spPr>
+            <a:xfrm>
+              <a:off x="7612850" y="4298945"/>
+              <a:ext cx="400050" cy="400050"/>
+            </a:xfrm>
+            <a:prstGeom prst="roundRect">
+              <a:avLst/>
+            </a:prstGeom>
+          </p:spPr>
+          <p:style>
+            <a:lnRef idx="2">
+              <a:schemeClr val="accent1">
+                <a:shade val="50000"/>
+              </a:schemeClr>
+            </a:lnRef>
+            <a:fillRef idx="1">
+              <a:schemeClr val="accent1"/>
+            </a:fillRef>
+            <a:effectRef idx="0">
+              <a:schemeClr val="accent1"/>
+            </a:effectRef>
+            <a:fontRef idx="minor">
+              <a:schemeClr val="lt1"/>
+            </a:fontRef>
+          </p:style>
+          <p:txBody>
+            <a:bodyPr rtlCol="0" anchor="ctr"/>
+            <a:lstStyle/>
+            <a:p>
+              <a:pPr algn="ctr"/>
+              <a:endParaRPr lang="ko-KR" altLang="en-US"/>
+            </a:p>
+          </p:txBody>
+        </p:sp>
+        <p:sp>
+          <p:nvSpPr>
+            <p:cNvPr id="83" name="사각형: 둥근 모서리 82">
+              <a:extLst>
+                <a:ext uri="{FF2B5EF4-FFF2-40B4-BE49-F238E27FC236}">
+                  <a16:creationId xmlns:a16="http://schemas.microsoft.com/office/drawing/2014/main" id="{F3FFF262-DEF9-4CC8-27D5-A07DE7B28591}"/>
+                </a:ext>
+              </a:extLst>
+            </p:cNvPr>
+            <p:cNvSpPr/>
+            <p:nvPr/>
+          </p:nvSpPr>
+          <p:spPr>
+            <a:xfrm>
+              <a:off x="8110442" y="4298945"/>
+              <a:ext cx="400050" cy="400050"/>
+            </a:xfrm>
+            <a:prstGeom prst="roundRect">
+              <a:avLst/>
+            </a:prstGeom>
+          </p:spPr>
+          <p:style>
+            <a:lnRef idx="2">
+              <a:schemeClr val="accent1">
+                <a:shade val="50000"/>
+              </a:schemeClr>
+            </a:lnRef>
+            <a:fillRef idx="1">
+              <a:schemeClr val="accent1"/>
+            </a:fillRef>
+            <a:effectRef idx="0">
+              <a:schemeClr val="accent1"/>
+            </a:effectRef>
+            <a:fontRef idx="minor">
+              <a:schemeClr val="lt1"/>
+            </a:fontRef>
+          </p:style>
+          <p:txBody>
+            <a:bodyPr rtlCol="0" anchor="ctr"/>
+            <a:lstStyle/>
+            <a:p>
+              <a:pPr algn="ctr"/>
+              <a:endParaRPr lang="ko-KR" altLang="en-US"/>
+            </a:p>
+          </p:txBody>
+        </p:sp>
+        <p:sp>
+          <p:nvSpPr>
+            <p:cNvPr id="84" name="사각형: 둥근 모서리 83">
+              <a:extLst>
+                <a:ext uri="{FF2B5EF4-FFF2-40B4-BE49-F238E27FC236}">
+                  <a16:creationId xmlns:a16="http://schemas.microsoft.com/office/drawing/2014/main" id="{EBB0DC86-6846-5567-4F29-C62EC2C0DE1F}"/>
+                </a:ext>
+              </a:extLst>
+            </p:cNvPr>
+            <p:cNvSpPr/>
+            <p:nvPr/>
+          </p:nvSpPr>
+          <p:spPr>
+            <a:xfrm>
+              <a:off x="8608034" y="4298945"/>
+              <a:ext cx="400050" cy="400050"/>
+            </a:xfrm>
+            <a:prstGeom prst="roundRect">
+              <a:avLst/>
+            </a:prstGeom>
+          </p:spPr>
+          <p:style>
+            <a:lnRef idx="2">
+              <a:schemeClr val="accent1">
+                <a:shade val="50000"/>
+              </a:schemeClr>
+            </a:lnRef>
+            <a:fillRef idx="1">
+              <a:schemeClr val="accent1"/>
+            </a:fillRef>
+            <a:effectRef idx="0">
+              <a:schemeClr val="accent1"/>
+            </a:effectRef>
+            <a:fontRef idx="minor">
+              <a:schemeClr val="lt1"/>
+            </a:fontRef>
+          </p:style>
+          <p:txBody>
+            <a:bodyPr rtlCol="0" anchor="ctr"/>
+            <a:lstStyle/>
+            <a:p>
+              <a:pPr algn="ctr"/>
+              <a:endParaRPr lang="ko-KR" altLang="en-US"/>
+            </a:p>
+          </p:txBody>
+        </p:sp>
+        <p:sp>
+          <p:nvSpPr>
+            <p:cNvPr id="85" name="사각형: 둥근 모서리 84">
+              <a:extLst>
+                <a:ext uri="{FF2B5EF4-FFF2-40B4-BE49-F238E27FC236}">
+                  <a16:creationId xmlns:a16="http://schemas.microsoft.com/office/drawing/2014/main" id="{70EECB07-9261-1084-0AE7-8034CDE6094F}"/>
+                </a:ext>
+              </a:extLst>
+            </p:cNvPr>
+            <p:cNvSpPr/>
+            <p:nvPr/>
+          </p:nvSpPr>
+          <p:spPr>
+            <a:xfrm>
+              <a:off x="7112946" y="4823484"/>
+              <a:ext cx="400050" cy="175419"/>
+            </a:xfrm>
+            <a:prstGeom prst="roundRect">
+              <a:avLst/>
+            </a:prstGeom>
+          </p:spPr>
+          <p:style>
+            <a:lnRef idx="2">
+              <a:schemeClr val="accent1">
+                <a:shade val="50000"/>
+              </a:schemeClr>
+            </a:lnRef>
+            <a:fillRef idx="1">
+              <a:schemeClr val="accent1"/>
+            </a:fillRef>
+            <a:effectRef idx="0">
+              <a:schemeClr val="accent1"/>
+            </a:effectRef>
+            <a:fontRef idx="minor">
+              <a:schemeClr val="lt1"/>
+            </a:fontRef>
+          </p:style>
+          <p:txBody>
+            <a:bodyPr rtlCol="0" anchor="ctr"/>
+            <a:lstStyle/>
+            <a:p>
+              <a:pPr algn="ctr"/>
+              <a:endParaRPr lang="ko-KR" altLang="en-US"/>
+            </a:p>
+          </p:txBody>
+        </p:sp>
+        <p:sp>
+          <p:nvSpPr>
+            <p:cNvPr id="86" name="사각형: 둥근 모서리 85">
+              <a:extLst>
+                <a:ext uri="{FF2B5EF4-FFF2-40B4-BE49-F238E27FC236}">
+                  <a16:creationId xmlns:a16="http://schemas.microsoft.com/office/drawing/2014/main" id="{EE865E6B-6F86-AD86-E94D-187B8F74B43A}"/>
+                </a:ext>
+              </a:extLst>
+            </p:cNvPr>
+            <p:cNvSpPr/>
+            <p:nvPr/>
+          </p:nvSpPr>
+          <p:spPr>
+            <a:xfrm>
+              <a:off x="7611685" y="4823484"/>
+              <a:ext cx="400050" cy="175419"/>
+            </a:xfrm>
+            <a:prstGeom prst="roundRect">
+              <a:avLst/>
+            </a:prstGeom>
+          </p:spPr>
+          <p:style>
+            <a:lnRef idx="2">
+              <a:schemeClr val="accent1">
+                <a:shade val="50000"/>
+              </a:schemeClr>
+            </a:lnRef>
+            <a:fillRef idx="1">
+              <a:schemeClr val="accent1"/>
+            </a:fillRef>
+            <a:effectRef idx="0">
+              <a:schemeClr val="accent1"/>
+            </a:effectRef>
+            <a:fontRef idx="minor">
+              <a:schemeClr val="lt1"/>
+            </a:fontRef>
+          </p:style>
+          <p:txBody>
+            <a:bodyPr rtlCol="0" anchor="ctr"/>
+            <a:lstStyle/>
+            <a:p>
+              <a:pPr algn="ctr"/>
+              <a:endParaRPr lang="ko-KR" altLang="en-US"/>
+            </a:p>
+          </p:txBody>
+        </p:sp>
+        <p:sp>
+          <p:nvSpPr>
+            <p:cNvPr id="87" name="사각형: 둥근 모서리 86">
+              <a:extLst>
+                <a:ext uri="{FF2B5EF4-FFF2-40B4-BE49-F238E27FC236}">
+                  <a16:creationId xmlns:a16="http://schemas.microsoft.com/office/drawing/2014/main" id="{D9C37494-B6E1-4FF9-FA96-BDC4585512B6}"/>
+                </a:ext>
+              </a:extLst>
+            </p:cNvPr>
+            <p:cNvSpPr/>
+            <p:nvPr/>
+          </p:nvSpPr>
+          <p:spPr>
+            <a:xfrm>
+              <a:off x="8109277" y="4823484"/>
+              <a:ext cx="400050" cy="175419"/>
+            </a:xfrm>
+            <a:prstGeom prst="roundRect">
+              <a:avLst/>
+            </a:prstGeom>
+          </p:spPr>
+          <p:style>
+            <a:lnRef idx="2">
+              <a:schemeClr val="accent1">
+                <a:shade val="50000"/>
+              </a:schemeClr>
+            </a:lnRef>
+            <a:fillRef idx="1">
+              <a:schemeClr val="accent1"/>
+            </a:fillRef>
+            <a:effectRef idx="0">
+              <a:schemeClr val="accent1"/>
+            </a:effectRef>
+            <a:fontRef idx="minor">
+              <a:schemeClr val="lt1"/>
+            </a:fontRef>
+          </p:style>
+          <p:txBody>
+            <a:bodyPr rtlCol="0" anchor="ctr"/>
+            <a:lstStyle/>
+            <a:p>
+              <a:pPr algn="ctr"/>
+              <a:endParaRPr lang="ko-KR" altLang="en-US"/>
+            </a:p>
+          </p:txBody>
+        </p:sp>
+        <p:sp>
+          <p:nvSpPr>
+            <p:cNvPr id="88" name="사각형: 둥근 모서리 87">
+              <a:extLst>
+                <a:ext uri="{FF2B5EF4-FFF2-40B4-BE49-F238E27FC236}">
+                  <a16:creationId xmlns:a16="http://schemas.microsoft.com/office/drawing/2014/main" id="{B1122B16-DCE5-B1B9-ACEF-2F33E1B365F4}"/>
+                </a:ext>
+              </a:extLst>
+            </p:cNvPr>
+            <p:cNvSpPr/>
+            <p:nvPr/>
+          </p:nvSpPr>
+          <p:spPr>
+            <a:xfrm>
+              <a:off x="8606869" y="4823484"/>
+              <a:ext cx="400050" cy="175419"/>
+            </a:xfrm>
+            <a:prstGeom prst="roundRect">
+              <a:avLst/>
+            </a:prstGeom>
+          </p:spPr>
+          <p:style>
+            <a:lnRef idx="2">
+              <a:schemeClr val="accent1">
+                <a:shade val="50000"/>
+              </a:schemeClr>
+            </a:lnRef>
+            <a:fillRef idx="1">
+              <a:schemeClr val="accent1"/>
+            </a:fillRef>
+            <a:effectRef idx="0">
+              <a:schemeClr val="accent1"/>
+            </a:effectRef>
+            <a:fontRef idx="minor">
+              <a:schemeClr val="lt1"/>
+            </a:fontRef>
+          </p:style>
+          <p:txBody>
+            <a:bodyPr rtlCol="0" anchor="ctr"/>
+            <a:lstStyle/>
+            <a:p>
+              <a:pPr algn="ctr"/>
+              <a:endParaRPr lang="ko-KR" altLang="en-US"/>
+            </a:p>
+          </p:txBody>
+        </p:sp>
+        <p:grpSp>
+          <p:nvGrpSpPr>
+            <p:cNvPr id="89" name="그룹 88">
+              <a:extLst>
+                <a:ext uri="{FF2B5EF4-FFF2-40B4-BE49-F238E27FC236}">
+                  <a16:creationId xmlns:a16="http://schemas.microsoft.com/office/drawing/2014/main" id="{4F059F81-4BCC-5440-9226-AFDE69ACFF13}"/>
+                </a:ext>
+              </a:extLst>
+            </p:cNvPr>
+            <p:cNvGrpSpPr/>
+            <p:nvPr/>
+          </p:nvGrpSpPr>
+          <p:grpSpPr>
+            <a:xfrm>
+              <a:off x="9788690" y="1954970"/>
+              <a:ext cx="1141042" cy="442051"/>
+              <a:chOff x="6711477" y="1465221"/>
+              <a:chExt cx="1416357" cy="548711"/>
+            </a:xfrm>
+          </p:grpSpPr>
+          <p:sp>
+            <p:nvSpPr>
+              <p:cNvPr id="90" name="사각형: 둥근 모서리 89">
+                <a:extLst>
+                  <a:ext uri="{FF2B5EF4-FFF2-40B4-BE49-F238E27FC236}">
+                    <a16:creationId xmlns:a16="http://schemas.microsoft.com/office/drawing/2014/main" id="{A9E379F4-709D-1FBA-95B6-A1A0F64908C6}"/>
+                  </a:ext>
+                </a:extLst>
+              </p:cNvPr>
+              <p:cNvSpPr/>
+              <p:nvPr/>
+            </p:nvSpPr>
+            <p:spPr>
+              <a:xfrm>
+                <a:off x="6839352" y="1586038"/>
+                <a:ext cx="955998" cy="274512"/>
+              </a:xfrm>
+              <a:prstGeom prst="roundRect">
+                <a:avLst>
+                  <a:gd name="adj" fmla="val 50000"/>
+                </a:avLst>
+              </a:prstGeom>
+              <a:solidFill>
+                <a:schemeClr val="bg2">
+                  <a:lumMod val="90000"/>
+                </a:schemeClr>
+              </a:solidFill>
+              <a:ln>
+                <a:noFill/>
+              </a:ln>
+            </p:spPr>
+            <p:style>
+              <a:lnRef idx="2">
+                <a:schemeClr val="accent1">
+                  <a:shade val="50000"/>
+                </a:schemeClr>
+              </a:lnRef>
+              <a:fillRef idx="1">
+                <a:schemeClr val="accent1"/>
+              </a:fillRef>
+              <a:effectRef idx="0">
+                <a:schemeClr val="accent1"/>
+              </a:effectRef>
+              <a:fontRef idx="minor">
+                <a:schemeClr val="lt1"/>
+              </a:fontRef>
+            </p:style>
+            <p:txBody>
+              <a:bodyPr rtlCol="0" anchor="ctr"/>
+              <a:lstStyle/>
+              <a:p>
+                <a:pPr algn="ctr"/>
+                <a:endParaRPr lang="ko-KR" altLang="en-US"/>
+              </a:p>
+            </p:txBody>
+          </p:sp>
+          <p:pic>
+            <p:nvPicPr>
+              <p:cNvPr id="91" name="그림 90">
+                <a:extLst>
+                  <a:ext uri="{FF2B5EF4-FFF2-40B4-BE49-F238E27FC236}">
+                    <a16:creationId xmlns:a16="http://schemas.microsoft.com/office/drawing/2014/main" id="{33D814AA-6EEF-4818-DF5B-4B439B4EB9E1}"/>
+                  </a:ext>
+                </a:extLst>
+              </p:cNvPr>
+              <p:cNvPicPr>
+                <a:picLocks noChangeAspect="1"/>
+              </p:cNvPicPr>
+              <p:nvPr/>
+            </p:nvPicPr>
+            <p:blipFill>
+              <a:blip r:embed="rId7">
+                <a:extLst>
+                  <a:ext uri="{28A0092B-C50C-407E-A947-70E740481C1C}">
+                    <a14:useLocalDpi xmlns:a14="http://schemas.microsoft.com/office/drawing/2010/main" val="0"/>
+                  </a:ext>
+                </a:extLst>
+              </a:blip>
+              <a:stretch>
+                <a:fillRect/>
+              </a:stretch>
+            </p:blipFill>
+            <p:spPr>
+              <a:xfrm>
+                <a:off x="6711477" y="1465221"/>
+                <a:ext cx="548711" cy="548711"/>
+              </a:xfrm>
+              <a:prstGeom prst="rect">
+                <a:avLst/>
+              </a:prstGeom>
+            </p:spPr>
+          </p:pic>
+          <p:sp>
+            <p:nvSpPr>
+              <p:cNvPr id="92" name="TextBox 91">
+                <a:extLst>
+                  <a:ext uri="{FF2B5EF4-FFF2-40B4-BE49-F238E27FC236}">
+                    <a16:creationId xmlns:a16="http://schemas.microsoft.com/office/drawing/2014/main" id="{B4C755CA-2AC1-8A76-A4B8-6BAD0DF4D55C}"/>
+                  </a:ext>
+                </a:extLst>
+              </p:cNvPr>
+              <p:cNvSpPr txBox="1"/>
+              <p:nvPr/>
+            </p:nvSpPr>
+            <p:spPr>
+              <a:xfrm>
+                <a:off x="6883235" y="1560569"/>
+                <a:ext cx="1244599" cy="315182"/>
+              </a:xfrm>
+              <a:prstGeom prst="rect">
+                <a:avLst/>
+              </a:prstGeom>
+              <a:noFill/>
+            </p:spPr>
+            <p:txBody>
+              <a:bodyPr wrap="square" rtlCol="0">
+                <a:spAutoFit/>
+              </a:bodyPr>
+              <a:lstStyle/>
+              <a:p>
+                <a:pPr algn="ctr"/>
+                <a:r>
+                  <a:rPr lang="en-US" altLang="ko-KR" sz="1050" b="1"/>
+                  <a:t>5,000</a:t>
+                </a:r>
+                <a:endParaRPr lang="ko-KR" altLang="en-US" sz="1050" b="1"/>
+              </a:p>
+            </p:txBody>
+          </p:sp>
+        </p:grpSp>
+        <p:sp>
+          <p:nvSpPr>
+            <p:cNvPr id="93" name="TextBox 92">
+              <a:extLst>
+                <a:ext uri="{FF2B5EF4-FFF2-40B4-BE49-F238E27FC236}">
+                  <a16:creationId xmlns:a16="http://schemas.microsoft.com/office/drawing/2014/main" id="{D826BE12-7213-3861-FBB5-DCD7D46F02AF}"/>
+                </a:ext>
+              </a:extLst>
+            </p:cNvPr>
+            <p:cNvSpPr txBox="1"/>
+            <p:nvPr/>
+          </p:nvSpPr>
+          <p:spPr>
+            <a:xfrm>
+              <a:off x="9640784" y="2387590"/>
+              <a:ext cx="1244600" cy="261610"/>
+            </a:xfrm>
+            <a:prstGeom prst="rect">
+              <a:avLst/>
+            </a:prstGeom>
+            <a:noFill/>
+          </p:spPr>
+          <p:txBody>
+            <a:bodyPr wrap="square" rtlCol="0">
+              <a:spAutoFit/>
+            </a:bodyPr>
+            <a:lstStyle/>
+            <a:p>
+              <a:pPr algn="ctr"/>
+              <a:r>
+                <a:rPr lang="ko-KR" altLang="en-US" sz="1100" b="1"/>
+                <a:t>부화기</a:t>
+              </a:r>
+            </a:p>
+          </p:txBody>
+        </p:sp>
+        <p:sp>
+          <p:nvSpPr>
+            <p:cNvPr id="94" name="사각형: 둥근 모서리 93">
+              <a:extLst>
+                <a:ext uri="{FF2B5EF4-FFF2-40B4-BE49-F238E27FC236}">
+                  <a16:creationId xmlns:a16="http://schemas.microsoft.com/office/drawing/2014/main" id="{86830250-06A6-5998-2332-35C37D9EE5C2}"/>
+                </a:ext>
+              </a:extLst>
+            </p:cNvPr>
+            <p:cNvSpPr/>
+            <p:nvPr/>
+          </p:nvSpPr>
+          <p:spPr>
+            <a:xfrm>
+              <a:off x="7982182" y="2030612"/>
+              <a:ext cx="358775" cy="311150"/>
+            </a:xfrm>
+            <a:prstGeom prst="roundRect">
+              <a:avLst>
+                <a:gd name="adj" fmla="val 2239"/>
+              </a:avLst>
+            </a:prstGeom>
+            <a:solidFill>
+              <a:schemeClr val="accent4">
+                <a:lumMod val="60000"/>
+                <a:lumOff val="40000"/>
+              </a:schemeClr>
+            </a:solidFill>
+          </p:spPr>
+          <p:style>
+            <a:lnRef idx="2">
+              <a:schemeClr val="accent1">
+                <a:shade val="50000"/>
+              </a:schemeClr>
+            </a:lnRef>
+            <a:fillRef idx="1">
+              <a:schemeClr val="accent1"/>
+            </a:fillRef>
+            <a:effectRef idx="0">
+              <a:schemeClr val="accent1"/>
+            </a:effectRef>
+            <a:fontRef idx="minor">
+              <a:schemeClr val="lt1"/>
+            </a:fontRef>
+          </p:style>
+          <p:txBody>
+            <a:bodyPr rtlCol="0" anchor="ctr"/>
+            <a:lstStyle/>
+            <a:p>
+              <a:pPr algn="ctr"/>
+              <a:endParaRPr lang="ko-KR" altLang="en-US"/>
+            </a:p>
+          </p:txBody>
+        </p:sp>
+        <p:sp>
+          <p:nvSpPr>
+            <p:cNvPr id="95" name="사각형: 둥근 모서리 94">
+              <a:extLst>
+                <a:ext uri="{FF2B5EF4-FFF2-40B4-BE49-F238E27FC236}">
+                  <a16:creationId xmlns:a16="http://schemas.microsoft.com/office/drawing/2014/main" id="{78CC4D31-3985-392A-784C-C4B501359281}"/>
+                </a:ext>
+              </a:extLst>
+            </p:cNvPr>
+            <p:cNvSpPr/>
+            <p:nvPr/>
+          </p:nvSpPr>
+          <p:spPr>
+            <a:xfrm>
+              <a:off x="8432884" y="2030052"/>
+              <a:ext cx="358775" cy="311150"/>
+            </a:xfrm>
+            <a:prstGeom prst="roundRect">
+              <a:avLst>
+                <a:gd name="adj" fmla="val 2239"/>
+              </a:avLst>
+            </a:prstGeom>
+            <a:solidFill>
+              <a:schemeClr val="accent2">
+                <a:lumMod val="60000"/>
+                <a:lumOff val="40000"/>
+              </a:schemeClr>
+            </a:solidFill>
+          </p:spPr>
+          <p:style>
+            <a:lnRef idx="2">
+              <a:schemeClr val="accent1">
+                <a:shade val="50000"/>
+              </a:schemeClr>
+            </a:lnRef>
+            <a:fillRef idx="1">
+              <a:schemeClr val="accent1"/>
+            </a:fillRef>
+            <a:effectRef idx="0">
+              <a:schemeClr val="accent1"/>
+            </a:effectRef>
+            <a:fontRef idx="minor">
+              <a:schemeClr val="lt1"/>
+            </a:fontRef>
+          </p:style>
+          <p:txBody>
+            <a:bodyPr rtlCol="0" anchor="ctr"/>
+            <a:lstStyle/>
+            <a:p>
+              <a:pPr algn="ctr"/>
+              <a:endParaRPr lang="ko-KR" altLang="en-US"/>
+            </a:p>
+          </p:txBody>
+        </p:sp>
+        <p:pic>
+          <p:nvPicPr>
+            <p:cNvPr id="96" name="Picture 4" descr="상점 아이콘 구매 기호입니다 장바구니 아이콘재고에 대 한 가방에 대한 스톡 벡터 아트 및 기타 이미지 - 가방, 고객, 구매 -  iStock">
+              <a:extLst>
+                <a:ext uri="{FF2B5EF4-FFF2-40B4-BE49-F238E27FC236}">
+                  <a16:creationId xmlns:a16="http://schemas.microsoft.com/office/drawing/2014/main" id="{A3C73261-2A49-713F-133F-671DF440D6F7}"/>
+                </a:ext>
+              </a:extLst>
+            </p:cNvPr>
+            <p:cNvPicPr>
+              <a:picLocks noChangeAspect="1" noChangeArrowheads="1"/>
+            </p:cNvPicPr>
+            <p:nvPr/>
+          </p:nvPicPr>
+          <p:blipFill>
+            <a:blip r:embed="rId5">
+              <a:extLst>
+                <a:ext uri="{BEBA8EAE-BF5A-486C-A8C5-ECC9F3942E4B}">
+                  <a14:imgProps xmlns:a14="http://schemas.microsoft.com/office/drawing/2010/main">
+                    <a14:imgLayer r:embed="rId6">
+                      <a14:imgEffect>
+                        <a14:backgroundRemoval t="10000" b="90000" l="10000" r="90000">
+                          <a14:foregroundMark x1="46154" y1="42067" x2="53846" y2="41106"/>
+                          <a14:foregroundMark x1="63462" y1="32452" x2="63462" y2="32452"/>
+                          <a14:foregroundMark x1="41587" y1="29087" x2="40144" y2="29567"/>
+                        </a14:backgroundRemoval>
+                      </a14:imgEffect>
+                    </a14:imgLayer>
+                  </a14:imgProps>
+                </a:ext>
+                <a:ext uri="{28A0092B-C50C-407E-A947-70E740481C1C}">
+                  <a14:useLocalDpi xmlns:a14="http://schemas.microsoft.com/office/drawing/2010/main" val="0"/>
+                </a:ext>
+              </a:extLst>
+            </a:blip>
+            <a:srcRect/>
+            <a:stretch>
+              <a:fillRect/>
+            </a:stretch>
+          </p:blipFill>
+          <p:spPr bwMode="auto">
+            <a:xfrm>
+              <a:off x="8421939" y="1996255"/>
+              <a:ext cx="385763" cy="385763"/>
+            </a:xfrm>
+            <a:prstGeom prst="rect">
+              <a:avLst/>
+            </a:prstGeom>
+            <a:noFill/>
+            <a:extLst>
+              <a:ext uri="{909E8E84-426E-40DD-AFC4-6F175D3DCCD1}">
+                <a14:hiddenFill xmlns:a14="http://schemas.microsoft.com/office/drawing/2010/main">
+                  <a:solidFill>
+                    <a:srgbClr val="FFFFFF"/>
+                  </a:solidFill>
+                </a14:hiddenFill>
+              </a:ext>
+            </a:extLst>
+          </p:spPr>
+        </p:pic>
+        <p:pic>
+          <p:nvPicPr>
+            <p:cNvPr id="97" name="Picture 8" descr="Eggs - Free food icons">
+              <a:extLst>
+                <a:ext uri="{FF2B5EF4-FFF2-40B4-BE49-F238E27FC236}">
+                  <a16:creationId xmlns:a16="http://schemas.microsoft.com/office/drawing/2014/main" id="{D2BCA0B6-36CC-208E-6D37-D63C0A437811}"/>
+                </a:ext>
+              </a:extLst>
+            </p:cNvPr>
+            <p:cNvPicPr>
+              <a:picLocks noChangeAspect="1" noChangeArrowheads="1"/>
+            </p:cNvPicPr>
+            <p:nvPr/>
+          </p:nvPicPr>
+          <p:blipFill>
+            <a:blip r:embed="rId8">
+              <a:extLst>
+                <a:ext uri="{28A0092B-C50C-407E-A947-70E740481C1C}">
+                  <a14:useLocalDpi xmlns:a14="http://schemas.microsoft.com/office/drawing/2010/main" val="0"/>
+                </a:ext>
+              </a:extLst>
+            </a:blip>
+            <a:srcRect/>
+            <a:stretch>
+              <a:fillRect/>
+            </a:stretch>
+          </p:blipFill>
+          <p:spPr bwMode="auto">
+            <a:xfrm>
+              <a:off x="8040627" y="2061420"/>
+              <a:ext cx="241884" cy="241884"/>
+            </a:xfrm>
+            <a:prstGeom prst="rect">
+              <a:avLst/>
+            </a:prstGeom>
+            <a:noFill/>
+            <a:extLst>
+              <a:ext uri="{909E8E84-426E-40DD-AFC4-6F175D3DCCD1}">
+                <a14:hiddenFill xmlns:a14="http://schemas.microsoft.com/office/drawing/2010/main">
+                  <a:solidFill>
+                    <a:srgbClr val="FFFFFF"/>
+                  </a:solidFill>
+                </a14:hiddenFill>
+              </a:ext>
+            </a:extLst>
+          </p:spPr>
+        </p:pic>
+        <p:sp>
+          <p:nvSpPr>
+            <p:cNvPr id="98" name="사각형: 둥근 모서리 97">
+              <a:extLst>
+                <a:ext uri="{FF2B5EF4-FFF2-40B4-BE49-F238E27FC236}">
+                  <a16:creationId xmlns:a16="http://schemas.microsoft.com/office/drawing/2014/main" id="{1428AB5E-AFA0-56CC-4A73-7779BF75AEB6}"/>
+                </a:ext>
+              </a:extLst>
+            </p:cNvPr>
+            <p:cNvSpPr/>
+            <p:nvPr/>
+          </p:nvSpPr>
+          <p:spPr>
+            <a:xfrm>
+              <a:off x="9975861" y="2771292"/>
+              <a:ext cx="601164" cy="582120"/>
+            </a:xfrm>
+            <a:prstGeom prst="roundRect">
+              <a:avLst/>
+            </a:prstGeom>
+            <a:solidFill>
+              <a:schemeClr val="bg2">
+                <a:lumMod val="75000"/>
+              </a:schemeClr>
+            </a:solidFill>
+            <a:ln>
+              <a:noFill/>
+            </a:ln>
+          </p:spPr>
+          <p:style>
+            <a:lnRef idx="2">
+              <a:schemeClr val="accent1">
+                <a:shade val="50000"/>
+              </a:schemeClr>
+            </a:lnRef>
+            <a:fillRef idx="1">
+              <a:schemeClr val="accent1"/>
+            </a:fillRef>
+            <a:effectRef idx="0">
+              <a:schemeClr val="accent1"/>
+            </a:effectRef>
+            <a:fontRef idx="minor">
+              <a:schemeClr val="lt1"/>
+            </a:fontRef>
+          </p:style>
+          <p:txBody>
+            <a:bodyPr rtlCol="0" anchor="ctr"/>
+            <a:lstStyle/>
+            <a:p>
+              <a:pPr algn="ctr"/>
+              <a:endParaRPr lang="ko-KR" altLang="en-US"/>
+            </a:p>
+          </p:txBody>
+        </p:sp>
+        <p:sp>
+          <p:nvSpPr>
+            <p:cNvPr id="99" name="사각형: 둥근 모서리 98">
+              <a:extLst>
+                <a:ext uri="{FF2B5EF4-FFF2-40B4-BE49-F238E27FC236}">
+                  <a16:creationId xmlns:a16="http://schemas.microsoft.com/office/drawing/2014/main" id="{55C03904-8D15-AFAA-4BBB-A9F9431D8580}"/>
+                </a:ext>
+              </a:extLst>
+            </p:cNvPr>
+            <p:cNvSpPr/>
+            <p:nvPr/>
+          </p:nvSpPr>
+          <p:spPr>
+            <a:xfrm>
+              <a:off x="10631709" y="2771292"/>
+              <a:ext cx="601164" cy="582120"/>
+            </a:xfrm>
+            <a:prstGeom prst="roundRect">
+              <a:avLst/>
+            </a:prstGeom>
+            <a:solidFill>
+              <a:schemeClr val="bg2">
+                <a:lumMod val="75000"/>
+              </a:schemeClr>
+            </a:solidFill>
+            <a:ln>
+              <a:noFill/>
+            </a:ln>
+          </p:spPr>
+          <p:style>
+            <a:lnRef idx="2">
+              <a:schemeClr val="accent1">
+                <a:shade val="50000"/>
+              </a:schemeClr>
+            </a:lnRef>
+            <a:fillRef idx="1">
+              <a:schemeClr val="accent1"/>
+            </a:fillRef>
+            <a:effectRef idx="0">
+              <a:schemeClr val="accent1"/>
+            </a:effectRef>
+            <a:fontRef idx="minor">
+              <a:schemeClr val="lt1"/>
+            </a:fontRef>
+          </p:style>
+          <p:txBody>
+            <a:bodyPr rtlCol="0" anchor="ctr"/>
+            <a:lstStyle/>
+            <a:p>
+              <a:pPr algn="ctr"/>
+              <a:endParaRPr lang="ko-KR" altLang="en-US"/>
+            </a:p>
+          </p:txBody>
+        </p:sp>
+        <p:sp>
+          <p:nvSpPr>
+            <p:cNvPr id="100" name="사각형: 둥근 모서리 99">
+              <a:extLst>
+                <a:ext uri="{FF2B5EF4-FFF2-40B4-BE49-F238E27FC236}">
+                  <a16:creationId xmlns:a16="http://schemas.microsoft.com/office/drawing/2014/main" id="{FC7A5156-4C09-EB8B-9285-DB83E6FD76F1}"/>
+                </a:ext>
+              </a:extLst>
+            </p:cNvPr>
+            <p:cNvSpPr/>
+            <p:nvPr/>
+          </p:nvSpPr>
+          <p:spPr>
+            <a:xfrm>
+              <a:off x="10905398" y="4738893"/>
+              <a:ext cx="310992" cy="276559"/>
+            </a:xfrm>
+            <a:prstGeom prst="roundRect">
+              <a:avLst/>
+            </a:prstGeom>
+            <a:solidFill>
+              <a:schemeClr val="bg2">
+                <a:lumMod val="75000"/>
+              </a:schemeClr>
+            </a:solidFill>
+            <a:ln>
+              <a:solidFill>
+                <a:schemeClr val="bg2">
+                  <a:lumMod val="75000"/>
+                </a:schemeClr>
+              </a:solidFill>
+            </a:ln>
+          </p:spPr>
+          <p:style>
+            <a:lnRef idx="2">
+              <a:schemeClr val="accent1">
+                <a:shade val="50000"/>
+              </a:schemeClr>
+            </a:lnRef>
+            <a:fillRef idx="1">
+              <a:schemeClr val="accent1"/>
+            </a:fillRef>
+            <a:effectRef idx="0">
+              <a:schemeClr val="accent1"/>
+            </a:effectRef>
+            <a:fontRef idx="minor">
+              <a:schemeClr val="lt1"/>
+            </a:fontRef>
+          </p:style>
+          <p:txBody>
+            <a:bodyPr rtlCol="0" anchor="ctr"/>
+            <a:lstStyle/>
+            <a:p>
+              <a:pPr algn="ctr"/>
+              <a:endParaRPr lang="ko-KR" altLang="en-US"/>
+            </a:p>
+          </p:txBody>
+        </p:sp>
+        <p:sp>
+          <p:nvSpPr>
+            <p:cNvPr id="101" name="곱하기 기호 100">
+              <a:extLst>
+                <a:ext uri="{FF2B5EF4-FFF2-40B4-BE49-F238E27FC236}">
+                  <a16:creationId xmlns:a16="http://schemas.microsoft.com/office/drawing/2014/main" id="{0B5AB648-804E-3DAC-2D55-C8AF4D829147}"/>
+                </a:ext>
+              </a:extLst>
+            </p:cNvPr>
+            <p:cNvSpPr/>
+            <p:nvPr/>
+          </p:nvSpPr>
+          <p:spPr>
+            <a:xfrm rot="18900000">
+              <a:off x="10092853" y="2882964"/>
+              <a:ext cx="358775" cy="358775"/>
+            </a:xfrm>
+            <a:prstGeom prst="mathMultiply">
+              <a:avLst>
+                <a:gd name="adj1" fmla="val 16941"/>
+              </a:avLst>
+            </a:prstGeom>
+            <a:solidFill>
+              <a:schemeClr val="bg2">
+                <a:lumMod val="50000"/>
+              </a:schemeClr>
+            </a:solidFill>
+            <a:ln>
+              <a:noFill/>
+            </a:ln>
+          </p:spPr>
+          <p:style>
+            <a:lnRef idx="2">
+              <a:schemeClr val="accent1">
+                <a:shade val="50000"/>
+              </a:schemeClr>
+            </a:lnRef>
+            <a:fillRef idx="1">
+              <a:schemeClr val="accent1"/>
+            </a:fillRef>
+            <a:effectRef idx="0">
+              <a:schemeClr val="accent1"/>
+            </a:effectRef>
+            <a:fontRef idx="minor">
+              <a:schemeClr val="lt1"/>
+            </a:fontRef>
+          </p:style>
+          <p:txBody>
+            <a:bodyPr rtlCol="0" anchor="ctr"/>
+            <a:lstStyle/>
+            <a:p>
+              <a:pPr algn="ctr"/>
+              <a:endParaRPr lang="ko-KR" altLang="en-US"/>
+            </a:p>
+          </p:txBody>
+        </p:sp>
+        <p:sp>
+          <p:nvSpPr>
+            <p:cNvPr id="102" name="곱하기 기호 101">
+              <a:extLst>
+                <a:ext uri="{FF2B5EF4-FFF2-40B4-BE49-F238E27FC236}">
+                  <a16:creationId xmlns:a16="http://schemas.microsoft.com/office/drawing/2014/main" id="{F1D1A9D8-37FA-5A35-CCC9-CA65E1A764B8}"/>
+                </a:ext>
+              </a:extLst>
+            </p:cNvPr>
+            <p:cNvSpPr/>
+            <p:nvPr/>
+          </p:nvSpPr>
+          <p:spPr>
+            <a:xfrm rot="18900000">
+              <a:off x="10752306" y="2882964"/>
+              <a:ext cx="358775" cy="358775"/>
+            </a:xfrm>
+            <a:prstGeom prst="mathMultiply">
+              <a:avLst>
+                <a:gd name="adj1" fmla="val 16941"/>
+              </a:avLst>
+            </a:prstGeom>
+            <a:solidFill>
+              <a:schemeClr val="bg2">
+                <a:lumMod val="50000"/>
+              </a:schemeClr>
+            </a:solidFill>
+            <a:ln>
+              <a:noFill/>
+            </a:ln>
+          </p:spPr>
+          <p:style>
+            <a:lnRef idx="2">
+              <a:schemeClr val="accent1">
+                <a:shade val="50000"/>
+              </a:schemeClr>
+            </a:lnRef>
+            <a:fillRef idx="1">
+              <a:schemeClr val="accent1"/>
+            </a:fillRef>
+            <a:effectRef idx="0">
+              <a:schemeClr val="accent1"/>
+            </a:effectRef>
+            <a:fontRef idx="minor">
+              <a:schemeClr val="lt1"/>
+            </a:fontRef>
+          </p:style>
+          <p:txBody>
+            <a:bodyPr rtlCol="0" anchor="ctr"/>
+            <a:lstStyle/>
+            <a:p>
+              <a:pPr algn="ctr"/>
+              <a:endParaRPr lang="ko-KR" altLang="en-US"/>
+            </a:p>
+          </p:txBody>
+        </p:sp>
+        <p:pic>
+          <p:nvPicPr>
+            <p:cNvPr id="103" name="Picture 8" descr="Eggs - Free food icons">
+              <a:extLst>
+                <a:ext uri="{FF2B5EF4-FFF2-40B4-BE49-F238E27FC236}">
+                  <a16:creationId xmlns:a16="http://schemas.microsoft.com/office/drawing/2014/main" id="{83432C77-661A-8386-786A-4237D3BF2133}"/>
+                </a:ext>
+              </a:extLst>
+            </p:cNvPr>
+            <p:cNvPicPr>
+              <a:picLocks noChangeAspect="1" noChangeArrowheads="1"/>
+            </p:cNvPicPr>
+            <p:nvPr/>
+          </p:nvPicPr>
+          <p:blipFill>
+            <a:blip r:embed="rId8">
+              <a:extLst>
+                <a:ext uri="{28A0092B-C50C-407E-A947-70E740481C1C}">
+                  <a14:useLocalDpi xmlns:a14="http://schemas.microsoft.com/office/drawing/2010/main" val="0"/>
+                </a:ext>
+              </a:extLst>
+            </a:blip>
+            <a:srcRect/>
+            <a:stretch>
+              <a:fillRect/>
+            </a:stretch>
+          </p:blipFill>
+          <p:spPr bwMode="auto">
+            <a:xfrm>
+              <a:off x="10949852" y="4760949"/>
+              <a:ext cx="241884" cy="241884"/>
+            </a:xfrm>
+            <a:prstGeom prst="rect">
+              <a:avLst/>
+            </a:prstGeom>
+            <a:noFill/>
+            <a:extLst>
+              <a:ext uri="{909E8E84-426E-40DD-AFC4-6F175D3DCCD1}">
+                <a14:hiddenFill xmlns:a14="http://schemas.microsoft.com/office/drawing/2010/main">
+                  <a:solidFill>
+                    <a:srgbClr val="FFFFFF"/>
+                  </a:solidFill>
+                </a14:hiddenFill>
+              </a:ext>
+            </a:extLst>
+          </p:spPr>
+        </p:pic>
+        <p:sp>
+          <p:nvSpPr>
+            <p:cNvPr id="104" name="곱하기 기호 103">
+              <a:extLst>
+                <a:ext uri="{FF2B5EF4-FFF2-40B4-BE49-F238E27FC236}">
+                  <a16:creationId xmlns:a16="http://schemas.microsoft.com/office/drawing/2014/main" id="{98F907C2-927E-28F2-8F25-51C328446F46}"/>
+                </a:ext>
+              </a:extLst>
+            </p:cNvPr>
+            <p:cNvSpPr/>
+            <p:nvPr/>
+          </p:nvSpPr>
+          <p:spPr>
+            <a:xfrm rot="18900000">
+              <a:off x="10933045" y="4749993"/>
+              <a:ext cx="246235" cy="246235"/>
+            </a:xfrm>
+            <a:prstGeom prst="mathMultiply">
+              <a:avLst>
+                <a:gd name="adj1" fmla="val 16941"/>
+              </a:avLst>
+            </a:prstGeom>
+            <a:solidFill>
+              <a:schemeClr val="bg2">
+                <a:lumMod val="50000"/>
+              </a:schemeClr>
+            </a:solidFill>
+            <a:ln>
+              <a:noFill/>
+            </a:ln>
+          </p:spPr>
+          <p:style>
+            <a:lnRef idx="2">
+              <a:schemeClr val="accent1">
+                <a:shade val="50000"/>
+              </a:schemeClr>
+            </a:lnRef>
+            <a:fillRef idx="1">
+              <a:schemeClr val="accent1"/>
+            </a:fillRef>
+            <a:effectRef idx="0">
+              <a:schemeClr val="accent1"/>
+            </a:effectRef>
+            <a:fontRef idx="minor">
+              <a:schemeClr val="lt1"/>
+            </a:fontRef>
+          </p:style>
+          <p:txBody>
+            <a:bodyPr rtlCol="0" anchor="ctr"/>
+            <a:lstStyle/>
+            <a:p>
+              <a:pPr algn="ctr"/>
+              <a:endParaRPr lang="ko-KR" altLang="en-US"/>
+            </a:p>
+          </p:txBody>
+        </p:sp>
+        <p:sp>
+          <p:nvSpPr>
+            <p:cNvPr id="105" name="타원 104">
+              <a:extLst>
+                <a:ext uri="{FF2B5EF4-FFF2-40B4-BE49-F238E27FC236}">
+                  <a16:creationId xmlns:a16="http://schemas.microsoft.com/office/drawing/2014/main" id="{DA1BCE5B-A61B-86A3-5C35-17EFA01FB71D}"/>
+                </a:ext>
+              </a:extLst>
+            </p:cNvPr>
+            <p:cNvSpPr/>
+            <p:nvPr/>
+          </p:nvSpPr>
+          <p:spPr>
+            <a:xfrm>
+              <a:off x="9463819" y="2906714"/>
+              <a:ext cx="311274" cy="311274"/>
+            </a:xfrm>
+            <a:prstGeom prst="ellipse">
+              <a:avLst/>
+            </a:prstGeom>
+          </p:spPr>
+          <p:style>
+            <a:lnRef idx="2">
+              <a:schemeClr val="accent1">
+                <a:shade val="50000"/>
+              </a:schemeClr>
+            </a:lnRef>
+            <a:fillRef idx="1">
+              <a:schemeClr val="accent1"/>
+            </a:fillRef>
+            <a:effectRef idx="0">
+              <a:schemeClr val="accent1"/>
+            </a:effectRef>
+            <a:fontRef idx="minor">
+              <a:schemeClr val="lt1"/>
+            </a:fontRef>
+          </p:style>
+          <p:txBody>
+            <a:bodyPr rtlCol="0" anchor="ctr"/>
+            <a:lstStyle/>
+            <a:p>
+              <a:pPr algn="ctr"/>
+              <a:endParaRPr lang="ko-KR" altLang="en-US"/>
+            </a:p>
+          </p:txBody>
+        </p:sp>
+        <p:sp>
+          <p:nvSpPr>
+            <p:cNvPr id="106" name="TextBox 105">
+              <a:extLst>
+                <a:ext uri="{FF2B5EF4-FFF2-40B4-BE49-F238E27FC236}">
+                  <a16:creationId xmlns:a16="http://schemas.microsoft.com/office/drawing/2014/main" id="{D0E3DB74-D1DD-121D-E592-EA756E173D9F}"/>
+                </a:ext>
+              </a:extLst>
+            </p:cNvPr>
+            <p:cNvSpPr txBox="1"/>
+            <p:nvPr/>
+          </p:nvSpPr>
+          <p:spPr>
+            <a:xfrm>
+              <a:off x="9125540" y="3114165"/>
+              <a:ext cx="1002671" cy="253916"/>
+            </a:xfrm>
+            <a:prstGeom prst="rect">
+              <a:avLst/>
+            </a:prstGeom>
+            <a:noFill/>
+          </p:spPr>
+          <p:txBody>
+            <a:bodyPr wrap="square" rtlCol="0">
+              <a:spAutoFit/>
+            </a:bodyPr>
+            <a:lstStyle/>
+            <a:p>
+              <a:pPr algn="ctr"/>
+              <a:r>
+                <a:rPr lang="en-US" altLang="ko-KR" sz="1050" b="1"/>
+                <a:t>00:09</a:t>
+              </a:r>
+              <a:endParaRPr lang="ko-KR" altLang="en-US" sz="1050" b="1"/>
+            </a:p>
+          </p:txBody>
+        </p:sp>
+        <p:sp>
+          <p:nvSpPr>
+            <p:cNvPr id="107" name="사각형: 둥근 모서리 106">
+              <a:extLst>
+                <a:ext uri="{FF2B5EF4-FFF2-40B4-BE49-F238E27FC236}">
+                  <a16:creationId xmlns:a16="http://schemas.microsoft.com/office/drawing/2014/main" id="{4F48082D-7FC1-C145-2728-1E21BF6297CE}"/>
+                </a:ext>
+              </a:extLst>
+            </p:cNvPr>
+            <p:cNvSpPr/>
+            <p:nvPr/>
+          </p:nvSpPr>
+          <p:spPr>
+            <a:xfrm>
+              <a:off x="9270866" y="2025059"/>
+              <a:ext cx="358775" cy="311150"/>
+            </a:xfrm>
+            <a:prstGeom prst="roundRect">
+              <a:avLst>
+                <a:gd name="adj" fmla="val 2239"/>
+              </a:avLst>
+            </a:prstGeom>
+            <a:solidFill>
+              <a:schemeClr val="accent2">
+                <a:lumMod val="60000"/>
+                <a:lumOff val="40000"/>
+              </a:schemeClr>
+            </a:solidFill>
+          </p:spPr>
+          <p:style>
+            <a:lnRef idx="2">
+              <a:schemeClr val="accent1">
+                <a:shade val="50000"/>
+              </a:schemeClr>
+            </a:lnRef>
+            <a:fillRef idx="1">
+              <a:schemeClr val="accent1"/>
+            </a:fillRef>
+            <a:effectRef idx="0">
+              <a:schemeClr val="accent1"/>
+            </a:effectRef>
+            <a:fontRef idx="minor">
+              <a:schemeClr val="lt1"/>
+            </a:fontRef>
+          </p:style>
+          <p:txBody>
+            <a:bodyPr rtlCol="0" anchor="ctr"/>
+            <a:lstStyle/>
+            <a:p>
+              <a:pPr algn="ctr"/>
+              <a:endParaRPr lang="ko-KR" altLang="en-US"/>
+            </a:p>
+          </p:txBody>
+        </p:sp>
+        <p:pic>
+          <p:nvPicPr>
+            <p:cNvPr id="108" name="Picture 2" descr="설정 - 무료 ui개 아이콘">
+              <a:extLst>
+                <a:ext uri="{FF2B5EF4-FFF2-40B4-BE49-F238E27FC236}">
+                  <a16:creationId xmlns:a16="http://schemas.microsoft.com/office/drawing/2014/main" id="{B704507A-C634-1EC5-6A30-2C285F2A055E}"/>
+                </a:ext>
+              </a:extLst>
+            </p:cNvPr>
+            <p:cNvPicPr>
+              <a:picLocks noChangeAspect="1" noChangeArrowheads="1"/>
+            </p:cNvPicPr>
+            <p:nvPr/>
+          </p:nvPicPr>
+          <p:blipFill>
+            <a:blip r:embed="rId9">
+              <a:extLst>
+                <a:ext uri="{28A0092B-C50C-407E-A947-70E740481C1C}">
+                  <a14:useLocalDpi xmlns:a14="http://schemas.microsoft.com/office/drawing/2010/main" val="0"/>
+                </a:ext>
+              </a:extLst>
+            </a:blip>
+            <a:srcRect/>
+            <a:stretch>
+              <a:fillRect/>
+            </a:stretch>
+          </p:blipFill>
+          <p:spPr bwMode="auto">
+            <a:xfrm>
+              <a:off x="9323031" y="2047074"/>
+              <a:ext cx="265099" cy="265099"/>
+            </a:xfrm>
+            <a:prstGeom prst="rect">
+              <a:avLst/>
+            </a:prstGeom>
+            <a:noFill/>
+            <a:extLst>
+              <a:ext uri="{909E8E84-426E-40DD-AFC4-6F175D3DCCD1}">
+                <a14:hiddenFill xmlns:a14="http://schemas.microsoft.com/office/drawing/2010/main">
+                  <a:solidFill>
+                    <a:srgbClr val="FFFFFF"/>
+                  </a:solidFill>
+                </a14:hiddenFill>
+              </a:ext>
+            </a:extLst>
+          </p:spPr>
+        </p:pic>
+      </p:grpSp>
+      <p:grpSp>
+        <p:nvGrpSpPr>
+          <p:cNvPr id="111" name="그룹 110">
+            <a:extLst>
+              <a:ext uri="{FF2B5EF4-FFF2-40B4-BE49-F238E27FC236}">
+                <a16:creationId xmlns:a16="http://schemas.microsoft.com/office/drawing/2014/main" id="{C1C65110-1CAC-A168-C3CE-161E6B2B0870}"/>
+              </a:ext>
+            </a:extLst>
+          </p:cNvPr>
+          <p:cNvGrpSpPr/>
+          <p:nvPr/>
+        </p:nvGrpSpPr>
+        <p:grpSpPr>
+          <a:xfrm>
+            <a:off x="6740918" y="1632174"/>
+            <a:ext cx="4489873" cy="3180792"/>
+            <a:chOff x="1435003" y="1958405"/>
+            <a:chExt cx="4489873" cy="3180792"/>
+          </a:xfrm>
+        </p:grpSpPr>
+        <p:sp>
+          <p:nvSpPr>
+            <p:cNvPr id="4" name="사각형: 둥근 모서리 3">
+              <a:extLst>
+                <a:ext uri="{FF2B5EF4-FFF2-40B4-BE49-F238E27FC236}">
+                  <a16:creationId xmlns:a16="http://schemas.microsoft.com/office/drawing/2014/main" id="{9E357BB7-5392-913B-A6A1-E084F97D75F5}"/>
+                </a:ext>
+              </a:extLst>
+            </p:cNvPr>
+            <p:cNvSpPr/>
+            <p:nvPr/>
+          </p:nvSpPr>
+          <p:spPr>
+            <a:xfrm>
+              <a:off x="1435003" y="2345197"/>
+              <a:ext cx="2200521" cy="2794000"/>
+            </a:xfrm>
+            <a:prstGeom prst="roundRect">
+              <a:avLst>
+                <a:gd name="adj" fmla="val 2239"/>
+              </a:avLst>
+            </a:prstGeom>
+            <a:solidFill>
+              <a:schemeClr val="bg2">
+                <a:lumMod val="90000"/>
+              </a:schemeClr>
+            </a:solidFill>
+          </p:spPr>
+          <p:style>
+            <a:lnRef idx="2">
+              <a:schemeClr val="accent1">
+                <a:shade val="50000"/>
+              </a:schemeClr>
+            </a:lnRef>
+            <a:fillRef idx="1">
+              <a:schemeClr val="accent1"/>
+            </a:fillRef>
+            <a:effectRef idx="0">
+              <a:schemeClr val="accent1"/>
+            </a:effectRef>
+            <a:fontRef idx="minor">
+              <a:schemeClr val="lt1"/>
+            </a:fontRef>
+          </p:style>
+          <p:txBody>
+            <a:bodyPr rtlCol="0" anchor="ctr"/>
+            <a:lstStyle/>
+            <a:p>
+              <a:pPr algn="ctr"/>
+              <a:endParaRPr lang="ko-KR" altLang="en-US"/>
+            </a:p>
+          </p:txBody>
+        </p:sp>
+        <p:sp>
+          <p:nvSpPr>
+            <p:cNvPr id="5" name="사각형: 둥근 모서리 4">
+              <a:extLst>
+                <a:ext uri="{FF2B5EF4-FFF2-40B4-BE49-F238E27FC236}">
+                  <a16:creationId xmlns:a16="http://schemas.microsoft.com/office/drawing/2014/main" id="{80F6B294-639F-C543-46C4-E5099C1FBBCC}"/>
+                </a:ext>
+              </a:extLst>
+            </p:cNvPr>
+            <p:cNvSpPr/>
+            <p:nvPr/>
+          </p:nvSpPr>
+          <p:spPr>
+            <a:xfrm>
+              <a:off x="2009278" y="2034047"/>
+              <a:ext cx="358775" cy="311150"/>
+            </a:xfrm>
+            <a:prstGeom prst="roundRect">
+              <a:avLst>
+                <a:gd name="adj" fmla="val 2239"/>
+              </a:avLst>
+            </a:prstGeom>
+            <a:solidFill>
+              <a:schemeClr val="accent2">
+                <a:lumMod val="60000"/>
+                <a:lumOff val="40000"/>
+              </a:schemeClr>
+            </a:solidFill>
+          </p:spPr>
+          <p:style>
+            <a:lnRef idx="2">
+              <a:schemeClr val="accent1">
+                <a:shade val="50000"/>
+              </a:schemeClr>
+            </a:lnRef>
+            <a:fillRef idx="1">
+              <a:schemeClr val="accent1"/>
+            </a:fillRef>
+            <a:effectRef idx="0">
+              <a:schemeClr val="accent1"/>
+            </a:effectRef>
+            <a:fontRef idx="minor">
+              <a:schemeClr val="lt1"/>
+            </a:fontRef>
+          </p:style>
+          <p:txBody>
+            <a:bodyPr rtlCol="0" anchor="ctr"/>
+            <a:lstStyle/>
+            <a:p>
+              <a:pPr algn="ctr"/>
+              <a:endParaRPr lang="ko-KR" altLang="en-US"/>
+            </a:p>
+          </p:txBody>
+        </p:sp>
+        <p:sp>
+          <p:nvSpPr>
+            <p:cNvPr id="6" name="사각형: 둥근 모서리 5">
+              <a:extLst>
+                <a:ext uri="{FF2B5EF4-FFF2-40B4-BE49-F238E27FC236}">
+                  <a16:creationId xmlns:a16="http://schemas.microsoft.com/office/drawing/2014/main" id="{46DE3336-476B-264A-BA55-A109B20C6A37}"/>
+                </a:ext>
+              </a:extLst>
+            </p:cNvPr>
+            <p:cNvSpPr/>
+            <p:nvPr/>
+          </p:nvSpPr>
+          <p:spPr>
+            <a:xfrm>
+              <a:off x="1580696" y="2030612"/>
+              <a:ext cx="358775" cy="311150"/>
+            </a:xfrm>
+            <a:prstGeom prst="roundRect">
+              <a:avLst>
+                <a:gd name="adj" fmla="val 2239"/>
+              </a:avLst>
+            </a:prstGeom>
+            <a:solidFill>
+              <a:schemeClr val="accent2">
+                <a:lumMod val="60000"/>
+                <a:lumOff val="40000"/>
+              </a:schemeClr>
+            </a:solidFill>
+          </p:spPr>
+          <p:style>
+            <a:lnRef idx="2">
+              <a:schemeClr val="accent1">
+                <a:shade val="50000"/>
+              </a:schemeClr>
+            </a:lnRef>
+            <a:fillRef idx="1">
+              <a:schemeClr val="accent1"/>
+            </a:fillRef>
+            <a:effectRef idx="0">
+              <a:schemeClr val="accent1"/>
+            </a:effectRef>
+            <a:fontRef idx="minor">
+              <a:schemeClr val="lt1"/>
+            </a:fontRef>
+          </p:style>
+          <p:txBody>
+            <a:bodyPr rtlCol="0" anchor="ctr"/>
+            <a:lstStyle/>
+            <a:p>
+              <a:pPr algn="ctr"/>
+              <a:endParaRPr lang="ko-KR" altLang="en-US"/>
+            </a:p>
+          </p:txBody>
+        </p:sp>
+        <p:sp>
+          <p:nvSpPr>
+            <p:cNvPr id="7" name="사각형: 둥근 모서리 6">
+              <a:extLst>
+                <a:ext uri="{FF2B5EF4-FFF2-40B4-BE49-F238E27FC236}">
+                  <a16:creationId xmlns:a16="http://schemas.microsoft.com/office/drawing/2014/main" id="{FC027527-D844-619C-D3C4-4617C9BC5DA0}"/>
+                </a:ext>
+              </a:extLst>
+            </p:cNvPr>
+            <p:cNvSpPr/>
+            <p:nvPr/>
+          </p:nvSpPr>
+          <p:spPr>
+            <a:xfrm>
+              <a:off x="2454882" y="2034047"/>
+              <a:ext cx="358775" cy="311150"/>
+            </a:xfrm>
+            <a:prstGeom prst="roundRect">
+              <a:avLst>
+                <a:gd name="adj" fmla="val 2239"/>
+              </a:avLst>
+            </a:prstGeom>
+            <a:solidFill>
+              <a:schemeClr val="accent2">
+                <a:lumMod val="60000"/>
+                <a:lumOff val="40000"/>
+              </a:schemeClr>
+            </a:solidFill>
+          </p:spPr>
+          <p:style>
+            <a:lnRef idx="2">
+              <a:schemeClr val="accent1">
+                <a:shade val="50000"/>
+              </a:schemeClr>
+            </a:lnRef>
+            <a:fillRef idx="1">
+              <a:schemeClr val="accent1"/>
+            </a:fillRef>
+            <a:effectRef idx="0">
+              <a:schemeClr val="accent1"/>
+            </a:effectRef>
+            <a:fontRef idx="minor">
+              <a:schemeClr val="lt1"/>
+            </a:fontRef>
+          </p:style>
+          <p:txBody>
+            <a:bodyPr rtlCol="0" anchor="ctr"/>
+            <a:lstStyle/>
+            <a:p>
+              <a:pPr algn="ctr"/>
+              <a:endParaRPr lang="ko-KR" altLang="en-US"/>
+            </a:p>
+          </p:txBody>
+        </p:sp>
+        <p:pic>
+          <p:nvPicPr>
+            <p:cNvPr id="8" name="Picture 2" descr="잎 - 무료 자연개 아이콘">
+              <a:extLst>
+                <a:ext uri="{FF2B5EF4-FFF2-40B4-BE49-F238E27FC236}">
+                  <a16:creationId xmlns:a16="http://schemas.microsoft.com/office/drawing/2014/main" id="{E22789E0-D585-B04E-C85B-1A3030E8819C}"/>
+                </a:ext>
+              </a:extLst>
+            </p:cNvPr>
+            <p:cNvPicPr>
+              <a:picLocks noChangeAspect="1" noChangeArrowheads="1"/>
+            </p:cNvPicPr>
+            <p:nvPr/>
+          </p:nvPicPr>
+          <p:blipFill>
+            <a:blip r:embed="rId2">
+              <a:extLst>
+                <a:ext uri="{28A0092B-C50C-407E-A947-70E740481C1C}">
+                  <a14:useLocalDpi xmlns:a14="http://schemas.microsoft.com/office/drawing/2010/main" val="0"/>
+                </a:ext>
+              </a:extLst>
+            </a:blip>
+            <a:srcRect/>
+            <a:stretch>
+              <a:fillRect/>
+            </a:stretch>
+          </p:blipFill>
+          <p:spPr bwMode="auto">
+            <a:xfrm>
+              <a:off x="2063048" y="2062919"/>
+              <a:ext cx="251234" cy="251234"/>
+            </a:xfrm>
+            <a:prstGeom prst="rect">
+              <a:avLst/>
+            </a:prstGeom>
+            <a:noFill/>
+            <a:extLst>
+              <a:ext uri="{909E8E84-426E-40DD-AFC4-6F175D3DCCD1}">
+                <a14:hiddenFill xmlns:a14="http://schemas.microsoft.com/office/drawing/2010/main">
+                  <a:solidFill>
+                    <a:srgbClr val="FFFFFF"/>
+                  </a:solidFill>
+                </a14:hiddenFill>
+              </a:ext>
+            </a:extLst>
+          </p:spPr>
+        </p:pic>
+        <p:pic>
+          <p:nvPicPr>
+            <p:cNvPr id="9" name="Picture 2" descr="Material 디자인 스타일의 달팽이 아이콘">
+              <a:extLst>
+                <a:ext uri="{FF2B5EF4-FFF2-40B4-BE49-F238E27FC236}">
+                  <a16:creationId xmlns:a16="http://schemas.microsoft.com/office/drawing/2014/main" id="{6C74E154-B4E5-A016-206F-37B38AF5A311}"/>
+                </a:ext>
+              </a:extLst>
+            </p:cNvPr>
+            <p:cNvPicPr>
+              <a:picLocks noChangeAspect="1" noChangeArrowheads="1"/>
+            </p:cNvPicPr>
+            <p:nvPr/>
+          </p:nvPicPr>
+          <p:blipFill>
+            <a:blip r:embed="rId3">
+              <a:extLst>
+                <a:ext uri="{BEBA8EAE-BF5A-486C-A8C5-ECC9F3942E4B}">
+                  <a14:imgProps xmlns:a14="http://schemas.microsoft.com/office/drawing/2010/main">
+                    <a14:imgLayer r:embed="rId4">
+                      <a14:imgEffect>
+                        <a14:backgroundRemoval t="10000" b="90000" l="8750" r="91250">
+                          <a14:foregroundMark x1="90833" y1="41250" x2="90833" y2="41250"/>
+                          <a14:foregroundMark x1="91250" y1="16167" x2="91250" y2="16167"/>
+                          <a14:foregroundMark x1="8750" y1="46000" x2="8750" y2="46000"/>
+                        </a14:backgroundRemoval>
+                      </a14:imgEffect>
+                    </a14:imgLayer>
+                  </a14:imgProps>
+                </a:ext>
+                <a:ext uri="{28A0092B-C50C-407E-A947-70E740481C1C}">
+                  <a14:useLocalDpi xmlns:a14="http://schemas.microsoft.com/office/drawing/2010/main" val="0"/>
+                </a:ext>
+              </a:extLst>
+            </a:blip>
+            <a:srcRect/>
+            <a:stretch>
+              <a:fillRect/>
+            </a:stretch>
+          </p:blipFill>
+          <p:spPr bwMode="auto">
+            <a:xfrm>
+              <a:off x="1611505" y="2037482"/>
+              <a:ext cx="297156" cy="297156"/>
+            </a:xfrm>
+            <a:prstGeom prst="rect">
+              <a:avLst/>
+            </a:prstGeom>
+            <a:noFill/>
+            <a:extLst>
+              <a:ext uri="{909E8E84-426E-40DD-AFC4-6F175D3DCCD1}">
+                <a14:hiddenFill xmlns:a14="http://schemas.microsoft.com/office/drawing/2010/main">
+                  <a:solidFill>
+                    <a:srgbClr val="FFFFFF"/>
+                  </a:solidFill>
+                </a14:hiddenFill>
+              </a:ext>
+            </a:extLst>
+          </p:spPr>
+        </p:pic>
+        <p:pic>
+          <p:nvPicPr>
+            <p:cNvPr id="10" name="Picture 4" descr="상점 아이콘 구매 기호입니다 장바구니 아이콘재고에 대 한 가방에 대한 스톡 벡터 아트 및 기타 이미지 - 가방, 고객, 구매 -  iStock">
+              <a:extLst>
+                <a:ext uri="{FF2B5EF4-FFF2-40B4-BE49-F238E27FC236}">
+                  <a16:creationId xmlns:a16="http://schemas.microsoft.com/office/drawing/2014/main" id="{F00442C2-8ED5-6A8A-C13B-06F60BEC2657}"/>
+                </a:ext>
+              </a:extLst>
+            </p:cNvPr>
+            <p:cNvPicPr>
+              <a:picLocks noChangeAspect="1" noChangeArrowheads="1"/>
+            </p:cNvPicPr>
+            <p:nvPr/>
+          </p:nvPicPr>
+          <p:blipFill>
+            <a:blip r:embed="rId5">
+              <a:extLst>
+                <a:ext uri="{BEBA8EAE-BF5A-486C-A8C5-ECC9F3942E4B}">
+                  <a14:imgProps xmlns:a14="http://schemas.microsoft.com/office/drawing/2010/main">
+                    <a14:imgLayer r:embed="rId6">
+                      <a14:imgEffect>
+                        <a14:backgroundRemoval t="10000" b="90000" l="10000" r="90000">
+                          <a14:foregroundMark x1="46154" y1="42067" x2="53846" y2="41106"/>
+                          <a14:foregroundMark x1="63462" y1="32452" x2="63462" y2="32452"/>
+                          <a14:foregroundMark x1="41587" y1="29087" x2="40144" y2="29567"/>
+                        </a14:backgroundRemoval>
+                      </a14:imgEffect>
+                    </a14:imgLayer>
+                  </a14:imgProps>
+                </a:ext>
+                <a:ext uri="{28A0092B-C50C-407E-A947-70E740481C1C}">
+                  <a14:useLocalDpi xmlns:a14="http://schemas.microsoft.com/office/drawing/2010/main" val="0"/>
+                </a:ext>
+              </a:extLst>
+            </a:blip>
+            <a:srcRect/>
+            <a:stretch>
+              <a:fillRect/>
+            </a:stretch>
+          </p:blipFill>
+          <p:spPr bwMode="auto">
+            <a:xfrm>
+              <a:off x="2443937" y="2000250"/>
+              <a:ext cx="385763" cy="385763"/>
+            </a:xfrm>
+            <a:prstGeom prst="rect">
+              <a:avLst/>
+            </a:prstGeom>
+            <a:noFill/>
+            <a:extLst>
+              <a:ext uri="{909E8E84-426E-40DD-AFC4-6F175D3DCCD1}">
+                <a14:hiddenFill xmlns:a14="http://schemas.microsoft.com/office/drawing/2010/main">
+                  <a:solidFill>
+                    <a:srgbClr val="FFFFFF"/>
+                  </a:solidFill>
+                </a14:hiddenFill>
+              </a:ext>
+            </a:extLst>
+          </p:spPr>
+        </p:pic>
+        <p:sp>
+          <p:nvSpPr>
+            <p:cNvPr id="11" name="사각형: 둥근 모서리 10">
+              <a:extLst>
+                <a:ext uri="{FF2B5EF4-FFF2-40B4-BE49-F238E27FC236}">
+                  <a16:creationId xmlns:a16="http://schemas.microsoft.com/office/drawing/2014/main" id="{B46EF760-03F9-F071-596C-480DA6311D2D}"/>
+                </a:ext>
+              </a:extLst>
+            </p:cNvPr>
+            <p:cNvSpPr/>
+            <p:nvPr/>
+          </p:nvSpPr>
+          <p:spPr>
+            <a:xfrm>
+              <a:off x="3635524" y="2338073"/>
+              <a:ext cx="2200521" cy="2794000"/>
+            </a:xfrm>
+            <a:prstGeom prst="roundRect">
+              <a:avLst>
+                <a:gd name="adj" fmla="val 2239"/>
+              </a:avLst>
+            </a:prstGeom>
+            <a:solidFill>
+              <a:schemeClr val="bg2">
+                <a:lumMod val="90000"/>
+              </a:schemeClr>
+            </a:solidFill>
+          </p:spPr>
+          <p:style>
+            <a:lnRef idx="2">
+              <a:schemeClr val="accent1">
+                <a:shade val="50000"/>
+              </a:schemeClr>
+            </a:lnRef>
+            <a:fillRef idx="1">
+              <a:schemeClr val="accent1"/>
+            </a:fillRef>
+            <a:effectRef idx="0">
+              <a:schemeClr val="accent1"/>
+            </a:effectRef>
+            <a:fontRef idx="minor">
+              <a:schemeClr val="lt1"/>
+            </a:fontRef>
+          </p:style>
+          <p:txBody>
+            <a:bodyPr rtlCol="0" anchor="ctr"/>
+            <a:lstStyle/>
+            <a:p>
+              <a:pPr algn="ctr"/>
+              <a:endParaRPr lang="ko-KR" altLang="en-US"/>
+            </a:p>
+          </p:txBody>
+        </p:sp>
+        <p:sp>
+          <p:nvSpPr>
+            <p:cNvPr id="12" name="사각형: 둥근 모서리 11">
+              <a:extLst>
+                <a:ext uri="{FF2B5EF4-FFF2-40B4-BE49-F238E27FC236}">
+                  <a16:creationId xmlns:a16="http://schemas.microsoft.com/office/drawing/2014/main" id="{6F323FB7-3A44-40F4-1C59-5F04D93D21B0}"/>
+                </a:ext>
+              </a:extLst>
+            </p:cNvPr>
+            <p:cNvSpPr/>
+            <p:nvPr/>
+          </p:nvSpPr>
+          <p:spPr>
+            <a:xfrm>
+              <a:off x="5583238" y="2242823"/>
+              <a:ext cx="323850" cy="323850"/>
+            </a:xfrm>
+            <a:prstGeom prst="roundRect">
+              <a:avLst/>
+            </a:prstGeom>
+            <a:solidFill>
+              <a:schemeClr val="bg2">
+                <a:lumMod val="90000"/>
+              </a:schemeClr>
+            </a:solidFill>
+          </p:spPr>
+          <p:style>
+            <a:lnRef idx="2">
+              <a:schemeClr val="accent1">
+                <a:shade val="50000"/>
+              </a:schemeClr>
+            </a:lnRef>
+            <a:fillRef idx="1">
+              <a:schemeClr val="accent1"/>
+            </a:fillRef>
+            <a:effectRef idx="0">
+              <a:schemeClr val="accent1"/>
+            </a:effectRef>
+            <a:fontRef idx="minor">
+              <a:schemeClr val="lt1"/>
+            </a:fontRef>
+          </p:style>
+          <p:txBody>
+            <a:bodyPr rtlCol="0" anchor="ctr"/>
+            <a:lstStyle/>
+            <a:p>
+              <a:pPr algn="ctr"/>
+              <a:endParaRPr lang="ko-KR" altLang="en-US"/>
+            </a:p>
+          </p:txBody>
+        </p:sp>
+        <p:sp>
+          <p:nvSpPr>
+            <p:cNvPr id="13" name="곱하기 기호 12">
+              <a:extLst>
+                <a:ext uri="{FF2B5EF4-FFF2-40B4-BE49-F238E27FC236}">
+                  <a16:creationId xmlns:a16="http://schemas.microsoft.com/office/drawing/2014/main" id="{51D15100-8671-E10E-D586-8B4971732B8A}"/>
+                </a:ext>
+              </a:extLst>
+            </p:cNvPr>
+            <p:cNvSpPr/>
+            <p:nvPr/>
+          </p:nvSpPr>
+          <p:spPr>
+            <a:xfrm>
+              <a:off x="5566101" y="2225572"/>
+              <a:ext cx="358775" cy="358775"/>
+            </a:xfrm>
+            <a:prstGeom prst="mathMultiply">
+              <a:avLst>
+                <a:gd name="adj1" fmla="val 16941"/>
+              </a:avLst>
+            </a:prstGeom>
+          </p:spPr>
+          <p:style>
+            <a:lnRef idx="2">
+              <a:schemeClr val="accent1">
+                <a:shade val="50000"/>
+              </a:schemeClr>
+            </a:lnRef>
+            <a:fillRef idx="1">
+              <a:schemeClr val="accent1"/>
+            </a:fillRef>
+            <a:effectRef idx="0">
+              <a:schemeClr val="accent1"/>
+            </a:effectRef>
+            <a:fontRef idx="minor">
+              <a:schemeClr val="lt1"/>
+            </a:fontRef>
+          </p:style>
+          <p:txBody>
+            <a:bodyPr rtlCol="0" anchor="ctr"/>
+            <a:lstStyle/>
+            <a:p>
+              <a:pPr algn="ctr"/>
+              <a:endParaRPr lang="ko-KR" altLang="en-US"/>
+            </a:p>
+          </p:txBody>
+        </p:sp>
+        <p:sp>
+          <p:nvSpPr>
+            <p:cNvPr id="14" name="TextBox 13">
+              <a:extLst>
+                <a:ext uri="{FF2B5EF4-FFF2-40B4-BE49-F238E27FC236}">
+                  <a16:creationId xmlns:a16="http://schemas.microsoft.com/office/drawing/2014/main" id="{458EC9C7-D2BC-9EEC-37DA-87434123D2FD}"/>
+                </a:ext>
+              </a:extLst>
+            </p:cNvPr>
+            <p:cNvSpPr txBox="1"/>
+            <p:nvPr/>
+          </p:nvSpPr>
+          <p:spPr>
+            <a:xfrm>
+              <a:off x="1928915" y="2397535"/>
+              <a:ext cx="1244600" cy="261610"/>
+            </a:xfrm>
+            <a:prstGeom prst="rect">
+              <a:avLst/>
+            </a:prstGeom>
+            <a:noFill/>
+          </p:spPr>
+          <p:txBody>
+            <a:bodyPr wrap="square" rtlCol="0">
+              <a:spAutoFit/>
+            </a:bodyPr>
+            <a:lstStyle/>
+            <a:p>
+              <a:pPr algn="ctr"/>
+              <a:r>
+                <a:rPr lang="ko-KR" altLang="en-US" sz="1100" b="1"/>
+                <a:t>알 목록</a:t>
+              </a:r>
+            </a:p>
+          </p:txBody>
+        </p:sp>
+        <p:grpSp>
+          <p:nvGrpSpPr>
+            <p:cNvPr id="36" name="그룹 35">
+              <a:extLst>
+                <a:ext uri="{FF2B5EF4-FFF2-40B4-BE49-F238E27FC236}">
+                  <a16:creationId xmlns:a16="http://schemas.microsoft.com/office/drawing/2014/main" id="{783EBB65-EBC2-7004-16F6-874789CC6AB0}"/>
+                </a:ext>
+              </a:extLst>
+            </p:cNvPr>
+            <p:cNvGrpSpPr/>
+            <p:nvPr/>
+          </p:nvGrpSpPr>
+          <p:grpSpPr>
+            <a:xfrm>
+              <a:off x="4261390" y="1958405"/>
+              <a:ext cx="1141042" cy="442051"/>
+              <a:chOff x="6711477" y="1465221"/>
+              <a:chExt cx="1416357" cy="548711"/>
+            </a:xfrm>
+          </p:grpSpPr>
+          <p:sp>
+            <p:nvSpPr>
+              <p:cNvPr id="37" name="사각형: 둥근 모서리 36">
+                <a:extLst>
+                  <a:ext uri="{FF2B5EF4-FFF2-40B4-BE49-F238E27FC236}">
+                    <a16:creationId xmlns:a16="http://schemas.microsoft.com/office/drawing/2014/main" id="{9849A210-D933-6351-FBA3-ADC150BD0579}"/>
+                  </a:ext>
+                </a:extLst>
+              </p:cNvPr>
+              <p:cNvSpPr/>
+              <p:nvPr/>
+            </p:nvSpPr>
+            <p:spPr>
+              <a:xfrm>
+                <a:off x="6839352" y="1586038"/>
+                <a:ext cx="955998" cy="274512"/>
+              </a:xfrm>
+              <a:prstGeom prst="roundRect">
+                <a:avLst>
+                  <a:gd name="adj" fmla="val 50000"/>
+                </a:avLst>
+              </a:prstGeom>
+              <a:solidFill>
+                <a:schemeClr val="bg2">
+                  <a:lumMod val="90000"/>
+                </a:schemeClr>
+              </a:solidFill>
+              <a:ln>
+                <a:noFill/>
+              </a:ln>
+            </p:spPr>
+            <p:style>
+              <a:lnRef idx="2">
+                <a:schemeClr val="accent1">
+                  <a:shade val="50000"/>
+                </a:schemeClr>
+              </a:lnRef>
+              <a:fillRef idx="1">
+                <a:schemeClr val="accent1"/>
+              </a:fillRef>
+              <a:effectRef idx="0">
+                <a:schemeClr val="accent1"/>
+              </a:effectRef>
+              <a:fontRef idx="minor">
+                <a:schemeClr val="lt1"/>
+              </a:fontRef>
+            </p:style>
+            <p:txBody>
+              <a:bodyPr rtlCol="0" anchor="ctr"/>
+              <a:lstStyle/>
+              <a:p>
+                <a:pPr algn="ctr"/>
+                <a:endParaRPr lang="ko-KR" altLang="en-US"/>
+              </a:p>
+            </p:txBody>
+          </p:sp>
+          <p:pic>
+            <p:nvPicPr>
+              <p:cNvPr id="38" name="그림 37">
+                <a:extLst>
+                  <a:ext uri="{FF2B5EF4-FFF2-40B4-BE49-F238E27FC236}">
+                    <a16:creationId xmlns:a16="http://schemas.microsoft.com/office/drawing/2014/main" id="{6B67B363-C9BC-CCA4-DB01-8CB6F0DB9F52}"/>
+                  </a:ext>
+                </a:extLst>
+              </p:cNvPr>
+              <p:cNvPicPr>
+                <a:picLocks noChangeAspect="1"/>
+              </p:cNvPicPr>
+              <p:nvPr/>
+            </p:nvPicPr>
+            <p:blipFill>
+              <a:blip r:embed="rId7">
+                <a:extLst>
+                  <a:ext uri="{28A0092B-C50C-407E-A947-70E740481C1C}">
+                    <a14:useLocalDpi xmlns:a14="http://schemas.microsoft.com/office/drawing/2010/main" val="0"/>
+                  </a:ext>
+                </a:extLst>
+              </a:blip>
+              <a:stretch>
+                <a:fillRect/>
+              </a:stretch>
+            </p:blipFill>
+            <p:spPr>
+              <a:xfrm>
+                <a:off x="6711477" y="1465221"/>
+                <a:ext cx="548711" cy="548711"/>
+              </a:xfrm>
+              <a:prstGeom prst="rect">
+                <a:avLst/>
+              </a:prstGeom>
+            </p:spPr>
+          </p:pic>
+          <p:sp>
+            <p:nvSpPr>
+              <p:cNvPr id="39" name="TextBox 38">
+                <a:extLst>
+                  <a:ext uri="{FF2B5EF4-FFF2-40B4-BE49-F238E27FC236}">
+                    <a16:creationId xmlns:a16="http://schemas.microsoft.com/office/drawing/2014/main" id="{2AC03882-4724-C136-7E92-08FA66D9C079}"/>
+                  </a:ext>
+                </a:extLst>
+              </p:cNvPr>
+              <p:cNvSpPr txBox="1"/>
+              <p:nvPr/>
+            </p:nvSpPr>
+            <p:spPr>
+              <a:xfrm>
+                <a:off x="6883235" y="1560569"/>
+                <a:ext cx="1244599" cy="315182"/>
+              </a:xfrm>
+              <a:prstGeom prst="rect">
+                <a:avLst/>
+              </a:prstGeom>
+              <a:noFill/>
+            </p:spPr>
+            <p:txBody>
+              <a:bodyPr wrap="square" rtlCol="0">
+                <a:spAutoFit/>
+              </a:bodyPr>
+              <a:lstStyle/>
+              <a:p>
+                <a:pPr algn="ctr"/>
+                <a:r>
+                  <a:rPr lang="en-US" altLang="ko-KR" sz="1050" b="1"/>
+                  <a:t>5,000</a:t>
+                </a:r>
+                <a:endParaRPr lang="ko-KR" altLang="en-US" sz="1050" b="1"/>
+              </a:p>
+            </p:txBody>
+          </p:sp>
+        </p:grpSp>
+        <p:sp>
+          <p:nvSpPr>
+            <p:cNvPr id="40" name="TextBox 39">
+              <a:extLst>
+                <a:ext uri="{FF2B5EF4-FFF2-40B4-BE49-F238E27FC236}">
+                  <a16:creationId xmlns:a16="http://schemas.microsoft.com/office/drawing/2014/main" id="{9CF8E812-2B07-69CB-8E04-18DA5D07DA2F}"/>
+                </a:ext>
+              </a:extLst>
+            </p:cNvPr>
+            <p:cNvSpPr txBox="1"/>
+            <p:nvPr/>
+          </p:nvSpPr>
+          <p:spPr>
+            <a:xfrm>
+              <a:off x="4113484" y="2391025"/>
+              <a:ext cx="1244600" cy="261610"/>
+            </a:xfrm>
+            <a:prstGeom prst="rect">
+              <a:avLst/>
+            </a:prstGeom>
+            <a:noFill/>
+          </p:spPr>
+          <p:txBody>
+            <a:bodyPr wrap="square" rtlCol="0">
+              <a:spAutoFit/>
+            </a:bodyPr>
+            <a:lstStyle/>
+            <a:p>
+              <a:pPr algn="ctr"/>
+              <a:r>
+                <a:rPr lang="ko-KR" altLang="en-US" sz="1100" b="1" dirty="0"/>
+                <a:t>부화기</a:t>
+              </a:r>
+            </a:p>
+          </p:txBody>
+        </p:sp>
+        <p:sp>
+          <p:nvSpPr>
+            <p:cNvPr id="41" name="사각형: 둥근 모서리 40">
+              <a:extLst>
+                <a:ext uri="{FF2B5EF4-FFF2-40B4-BE49-F238E27FC236}">
+                  <a16:creationId xmlns:a16="http://schemas.microsoft.com/office/drawing/2014/main" id="{8E473986-BA16-DE8D-C0C1-882CFBBCEB62}"/>
+                </a:ext>
+              </a:extLst>
+            </p:cNvPr>
+            <p:cNvSpPr/>
+            <p:nvPr/>
+          </p:nvSpPr>
+          <p:spPr>
+            <a:xfrm>
+              <a:off x="2454882" y="2034047"/>
+              <a:ext cx="358775" cy="311150"/>
+            </a:xfrm>
+            <a:prstGeom prst="roundRect">
+              <a:avLst>
+                <a:gd name="adj" fmla="val 2239"/>
+              </a:avLst>
+            </a:prstGeom>
+            <a:solidFill>
+              <a:schemeClr val="accent4">
+                <a:lumMod val="60000"/>
+                <a:lumOff val="40000"/>
+              </a:schemeClr>
+            </a:solidFill>
+          </p:spPr>
+          <p:style>
+            <a:lnRef idx="2">
+              <a:schemeClr val="accent1">
+                <a:shade val="50000"/>
+              </a:schemeClr>
+            </a:lnRef>
+            <a:fillRef idx="1">
+              <a:schemeClr val="accent1"/>
+            </a:fillRef>
+            <a:effectRef idx="0">
+              <a:schemeClr val="accent1"/>
+            </a:effectRef>
+            <a:fontRef idx="minor">
+              <a:schemeClr val="lt1"/>
+            </a:fontRef>
+          </p:style>
+          <p:txBody>
+            <a:bodyPr rtlCol="0" anchor="ctr"/>
+            <a:lstStyle/>
+            <a:p>
+              <a:pPr algn="ctr"/>
+              <a:endParaRPr lang="ko-KR" altLang="en-US"/>
+            </a:p>
+          </p:txBody>
+        </p:sp>
+        <p:sp>
+          <p:nvSpPr>
+            <p:cNvPr id="42" name="사각형: 둥근 모서리 41">
+              <a:extLst>
+                <a:ext uri="{FF2B5EF4-FFF2-40B4-BE49-F238E27FC236}">
+                  <a16:creationId xmlns:a16="http://schemas.microsoft.com/office/drawing/2014/main" id="{E39BD2E1-11CE-D3B3-111C-22003F06C64A}"/>
+                </a:ext>
+              </a:extLst>
+            </p:cNvPr>
+            <p:cNvSpPr/>
+            <p:nvPr/>
+          </p:nvSpPr>
+          <p:spPr>
+            <a:xfrm>
+              <a:off x="2905584" y="2033487"/>
+              <a:ext cx="358775" cy="311150"/>
+            </a:xfrm>
+            <a:prstGeom prst="roundRect">
+              <a:avLst>
+                <a:gd name="adj" fmla="val 2239"/>
+              </a:avLst>
+            </a:prstGeom>
+            <a:solidFill>
+              <a:schemeClr val="accent2">
+                <a:lumMod val="60000"/>
+                <a:lumOff val="40000"/>
+              </a:schemeClr>
+            </a:solidFill>
+          </p:spPr>
+          <p:style>
+            <a:lnRef idx="2">
+              <a:schemeClr val="accent1">
+                <a:shade val="50000"/>
+              </a:schemeClr>
+            </a:lnRef>
+            <a:fillRef idx="1">
+              <a:schemeClr val="accent1"/>
+            </a:fillRef>
+            <a:effectRef idx="0">
+              <a:schemeClr val="accent1"/>
+            </a:effectRef>
+            <a:fontRef idx="minor">
+              <a:schemeClr val="lt1"/>
+            </a:fontRef>
+          </p:style>
+          <p:txBody>
+            <a:bodyPr rtlCol="0" anchor="ctr"/>
+            <a:lstStyle/>
+            <a:p>
+              <a:pPr algn="ctr"/>
+              <a:endParaRPr lang="ko-KR" altLang="en-US"/>
+            </a:p>
+          </p:txBody>
+        </p:sp>
+        <p:pic>
+          <p:nvPicPr>
+            <p:cNvPr id="43" name="Picture 4" descr="상점 아이콘 구매 기호입니다 장바구니 아이콘재고에 대 한 가방에 대한 스톡 벡터 아트 및 기타 이미지 - 가방, 고객, 구매 -  iStock">
+              <a:extLst>
+                <a:ext uri="{FF2B5EF4-FFF2-40B4-BE49-F238E27FC236}">
+                  <a16:creationId xmlns:a16="http://schemas.microsoft.com/office/drawing/2014/main" id="{5996ADFC-AD52-A404-EC6C-B366DE34D4D2}"/>
+                </a:ext>
+              </a:extLst>
+            </p:cNvPr>
+            <p:cNvPicPr>
+              <a:picLocks noChangeAspect="1" noChangeArrowheads="1"/>
+            </p:cNvPicPr>
+            <p:nvPr/>
+          </p:nvPicPr>
+          <p:blipFill>
+            <a:blip r:embed="rId5">
+              <a:extLst>
+                <a:ext uri="{BEBA8EAE-BF5A-486C-A8C5-ECC9F3942E4B}">
+                  <a14:imgProps xmlns:a14="http://schemas.microsoft.com/office/drawing/2010/main">
+                    <a14:imgLayer r:embed="rId6">
+                      <a14:imgEffect>
+                        <a14:backgroundRemoval t="10000" b="90000" l="10000" r="90000">
+                          <a14:foregroundMark x1="46154" y1="42067" x2="53846" y2="41106"/>
+                          <a14:foregroundMark x1="63462" y1="32452" x2="63462" y2="32452"/>
+                          <a14:foregroundMark x1="41587" y1="29087" x2="40144" y2="29567"/>
+                        </a14:backgroundRemoval>
+                      </a14:imgEffect>
+                    </a14:imgLayer>
+                  </a14:imgProps>
+                </a:ext>
+                <a:ext uri="{28A0092B-C50C-407E-A947-70E740481C1C}">
+                  <a14:useLocalDpi xmlns:a14="http://schemas.microsoft.com/office/drawing/2010/main" val="0"/>
+                </a:ext>
+              </a:extLst>
+            </a:blip>
+            <a:srcRect/>
+            <a:stretch>
+              <a:fillRect/>
+            </a:stretch>
+          </p:blipFill>
+          <p:spPr bwMode="auto">
+            <a:xfrm>
+              <a:off x="2894639" y="1999690"/>
+              <a:ext cx="385763" cy="385763"/>
+            </a:xfrm>
+            <a:prstGeom prst="rect">
+              <a:avLst/>
+            </a:prstGeom>
+            <a:noFill/>
+            <a:extLst>
+              <a:ext uri="{909E8E84-426E-40DD-AFC4-6F175D3DCCD1}">
+                <a14:hiddenFill xmlns:a14="http://schemas.microsoft.com/office/drawing/2010/main">
+                  <a:solidFill>
+                    <a:srgbClr val="FFFFFF"/>
+                  </a:solidFill>
+                </a14:hiddenFill>
+              </a:ext>
+            </a:extLst>
+          </p:spPr>
+        </p:pic>
+        <p:pic>
+          <p:nvPicPr>
+            <p:cNvPr id="44" name="Picture 8" descr="Eggs - Free food icons">
+              <a:extLst>
+                <a:ext uri="{FF2B5EF4-FFF2-40B4-BE49-F238E27FC236}">
+                  <a16:creationId xmlns:a16="http://schemas.microsoft.com/office/drawing/2014/main" id="{8C75D0F4-0752-00B8-5E05-E26A23D26E1E}"/>
+                </a:ext>
+              </a:extLst>
+            </p:cNvPr>
+            <p:cNvPicPr>
+              <a:picLocks noChangeAspect="1" noChangeArrowheads="1"/>
+            </p:cNvPicPr>
+            <p:nvPr/>
+          </p:nvPicPr>
+          <p:blipFill>
+            <a:blip r:embed="rId8">
+              <a:extLst>
+                <a:ext uri="{28A0092B-C50C-407E-A947-70E740481C1C}">
+                  <a14:useLocalDpi xmlns:a14="http://schemas.microsoft.com/office/drawing/2010/main" val="0"/>
+                </a:ext>
+              </a:extLst>
+            </a:blip>
+            <a:srcRect/>
+            <a:stretch>
+              <a:fillRect/>
+            </a:stretch>
+          </p:blipFill>
+          <p:spPr bwMode="auto">
+            <a:xfrm>
+              <a:off x="2513327" y="2064855"/>
+              <a:ext cx="241884" cy="241884"/>
+            </a:xfrm>
+            <a:prstGeom prst="rect">
+              <a:avLst/>
+            </a:prstGeom>
+            <a:noFill/>
+            <a:extLst>
+              <a:ext uri="{909E8E84-426E-40DD-AFC4-6F175D3DCCD1}">
+                <a14:hiddenFill xmlns:a14="http://schemas.microsoft.com/office/drawing/2010/main">
+                  <a:solidFill>
+                    <a:srgbClr val="FFFFFF"/>
+                  </a:solidFill>
+                </a14:hiddenFill>
+              </a:ext>
+            </a:extLst>
+          </p:spPr>
+        </p:pic>
+        <p:sp>
+          <p:nvSpPr>
+            <p:cNvPr id="47" name="사각형: 둥근 모서리 46">
+              <a:extLst>
+                <a:ext uri="{FF2B5EF4-FFF2-40B4-BE49-F238E27FC236}">
+                  <a16:creationId xmlns:a16="http://schemas.microsoft.com/office/drawing/2014/main" id="{F30A7616-69F5-AB6F-4D37-2CF72CBD5252}"/>
+                </a:ext>
+              </a:extLst>
+            </p:cNvPr>
+            <p:cNvSpPr/>
+            <p:nvPr/>
+          </p:nvSpPr>
+          <p:spPr>
+            <a:xfrm>
+              <a:off x="5378098" y="4742328"/>
+              <a:ext cx="310992" cy="276559"/>
+            </a:xfrm>
+            <a:prstGeom prst="roundRect">
+              <a:avLst/>
+            </a:prstGeom>
+            <a:solidFill>
+              <a:schemeClr val="bg2">
+                <a:lumMod val="75000"/>
+              </a:schemeClr>
+            </a:solidFill>
+            <a:ln>
+              <a:solidFill>
+                <a:schemeClr val="bg2">
+                  <a:lumMod val="75000"/>
+                </a:schemeClr>
+              </a:solidFill>
+            </a:ln>
+          </p:spPr>
+          <p:style>
+            <a:lnRef idx="2">
+              <a:schemeClr val="accent1">
+                <a:shade val="50000"/>
+              </a:schemeClr>
+            </a:lnRef>
+            <a:fillRef idx="1">
+              <a:schemeClr val="accent1"/>
+            </a:fillRef>
+            <a:effectRef idx="0">
+              <a:schemeClr val="accent1"/>
+            </a:effectRef>
+            <a:fontRef idx="minor">
+              <a:schemeClr val="lt1"/>
+            </a:fontRef>
+          </p:style>
+          <p:txBody>
+            <a:bodyPr rtlCol="0" anchor="ctr"/>
+            <a:lstStyle/>
+            <a:p>
+              <a:pPr algn="ctr"/>
+              <a:endParaRPr lang="ko-KR" altLang="en-US"/>
+            </a:p>
+          </p:txBody>
+        </p:sp>
+        <p:pic>
+          <p:nvPicPr>
+            <p:cNvPr id="50" name="Picture 8" descr="Eggs - Free food icons">
+              <a:extLst>
+                <a:ext uri="{FF2B5EF4-FFF2-40B4-BE49-F238E27FC236}">
+                  <a16:creationId xmlns:a16="http://schemas.microsoft.com/office/drawing/2014/main" id="{C724B3C4-7073-A149-BBB8-17BFA2174849}"/>
+                </a:ext>
+              </a:extLst>
+            </p:cNvPr>
+            <p:cNvPicPr>
+              <a:picLocks noChangeAspect="1" noChangeArrowheads="1"/>
+            </p:cNvPicPr>
+            <p:nvPr/>
+          </p:nvPicPr>
+          <p:blipFill>
+            <a:blip r:embed="rId8">
+              <a:extLst>
+                <a:ext uri="{28A0092B-C50C-407E-A947-70E740481C1C}">
+                  <a14:useLocalDpi xmlns:a14="http://schemas.microsoft.com/office/drawing/2010/main" val="0"/>
+                </a:ext>
+              </a:extLst>
+            </a:blip>
+            <a:srcRect/>
+            <a:stretch>
+              <a:fillRect/>
+            </a:stretch>
+          </p:blipFill>
+          <p:spPr bwMode="auto">
+            <a:xfrm>
+              <a:off x="5422552" y="4764384"/>
+              <a:ext cx="241884" cy="241884"/>
+            </a:xfrm>
+            <a:prstGeom prst="rect">
+              <a:avLst/>
+            </a:prstGeom>
+            <a:noFill/>
+            <a:extLst>
+              <a:ext uri="{909E8E84-426E-40DD-AFC4-6F175D3DCCD1}">
+                <a14:hiddenFill xmlns:a14="http://schemas.microsoft.com/office/drawing/2010/main">
+                  <a:solidFill>
+                    <a:srgbClr val="FFFFFF"/>
+                  </a:solidFill>
+                </a14:hiddenFill>
+              </a:ext>
+            </a:extLst>
+          </p:spPr>
+        </p:pic>
+        <p:sp>
+          <p:nvSpPr>
+            <p:cNvPr id="51" name="곱하기 기호 50">
+              <a:extLst>
+                <a:ext uri="{FF2B5EF4-FFF2-40B4-BE49-F238E27FC236}">
+                  <a16:creationId xmlns:a16="http://schemas.microsoft.com/office/drawing/2014/main" id="{7AAEF284-6F89-2F5C-ED1C-670CB79B2F82}"/>
+                </a:ext>
+              </a:extLst>
+            </p:cNvPr>
+            <p:cNvSpPr/>
+            <p:nvPr/>
+          </p:nvSpPr>
+          <p:spPr>
+            <a:xfrm rot="18900000">
+              <a:off x="5405745" y="4753428"/>
+              <a:ext cx="246235" cy="246235"/>
+            </a:xfrm>
+            <a:prstGeom prst="mathMultiply">
+              <a:avLst>
+                <a:gd name="adj1" fmla="val 16941"/>
+              </a:avLst>
+            </a:prstGeom>
+            <a:solidFill>
+              <a:schemeClr val="bg2">
+                <a:lumMod val="50000"/>
+              </a:schemeClr>
+            </a:solidFill>
+            <a:ln>
+              <a:noFill/>
+            </a:ln>
+          </p:spPr>
+          <p:style>
+            <a:lnRef idx="2">
+              <a:schemeClr val="accent1">
+                <a:shade val="50000"/>
+              </a:schemeClr>
+            </a:lnRef>
+            <a:fillRef idx="1">
+              <a:schemeClr val="accent1"/>
+            </a:fillRef>
+            <a:effectRef idx="0">
+              <a:schemeClr val="accent1"/>
+            </a:effectRef>
+            <a:fontRef idx="minor">
+              <a:schemeClr val="lt1"/>
+            </a:fontRef>
+          </p:style>
+          <p:txBody>
+            <a:bodyPr rtlCol="0" anchor="ctr"/>
+            <a:lstStyle/>
+            <a:p>
+              <a:pPr algn="ctr"/>
+              <a:endParaRPr lang="ko-KR" altLang="en-US"/>
+            </a:p>
+          </p:txBody>
+        </p:sp>
+        <p:sp>
+          <p:nvSpPr>
+            <p:cNvPr id="54" name="사각형: 둥근 모서리 53">
+              <a:extLst>
+                <a:ext uri="{FF2B5EF4-FFF2-40B4-BE49-F238E27FC236}">
+                  <a16:creationId xmlns:a16="http://schemas.microsoft.com/office/drawing/2014/main" id="{476B547D-5028-EBC7-C3ED-0BD99FFEA51F}"/>
+                </a:ext>
+              </a:extLst>
+            </p:cNvPr>
+            <p:cNvSpPr/>
+            <p:nvPr/>
+          </p:nvSpPr>
+          <p:spPr>
+            <a:xfrm>
+              <a:off x="3743566" y="2028494"/>
+              <a:ext cx="358775" cy="311150"/>
+            </a:xfrm>
+            <a:prstGeom prst="roundRect">
+              <a:avLst>
+                <a:gd name="adj" fmla="val 2239"/>
+              </a:avLst>
+            </a:prstGeom>
+            <a:solidFill>
+              <a:schemeClr val="accent2">
+                <a:lumMod val="60000"/>
+                <a:lumOff val="40000"/>
+              </a:schemeClr>
+            </a:solidFill>
+          </p:spPr>
+          <p:style>
+            <a:lnRef idx="2">
+              <a:schemeClr val="accent1">
+                <a:shade val="50000"/>
+              </a:schemeClr>
+            </a:lnRef>
+            <a:fillRef idx="1">
+              <a:schemeClr val="accent1"/>
+            </a:fillRef>
+            <a:effectRef idx="0">
+              <a:schemeClr val="accent1"/>
+            </a:effectRef>
+            <a:fontRef idx="minor">
+              <a:schemeClr val="lt1"/>
+            </a:fontRef>
+          </p:style>
+          <p:txBody>
+            <a:bodyPr rtlCol="0" anchor="ctr"/>
+            <a:lstStyle/>
+            <a:p>
+              <a:pPr algn="ctr"/>
+              <a:endParaRPr lang="ko-KR" altLang="en-US"/>
+            </a:p>
+          </p:txBody>
+        </p:sp>
+        <p:pic>
+          <p:nvPicPr>
+            <p:cNvPr id="55" name="Picture 2" descr="설정 - 무료 ui개 아이콘">
+              <a:extLst>
+                <a:ext uri="{FF2B5EF4-FFF2-40B4-BE49-F238E27FC236}">
+                  <a16:creationId xmlns:a16="http://schemas.microsoft.com/office/drawing/2014/main" id="{E24E40B7-F4EF-EE80-7EF4-D0F02511E0E8}"/>
+                </a:ext>
+              </a:extLst>
+            </p:cNvPr>
+            <p:cNvPicPr>
+              <a:picLocks noChangeAspect="1" noChangeArrowheads="1"/>
+            </p:cNvPicPr>
+            <p:nvPr/>
+          </p:nvPicPr>
+          <p:blipFill>
+            <a:blip r:embed="rId9">
+              <a:extLst>
+                <a:ext uri="{28A0092B-C50C-407E-A947-70E740481C1C}">
+                  <a14:useLocalDpi xmlns:a14="http://schemas.microsoft.com/office/drawing/2010/main" val="0"/>
+                </a:ext>
+              </a:extLst>
+            </a:blip>
+            <a:srcRect/>
+            <a:stretch>
+              <a:fillRect/>
+            </a:stretch>
+          </p:blipFill>
+          <p:spPr bwMode="auto">
+            <a:xfrm>
+              <a:off x="3795731" y="2050509"/>
+              <a:ext cx="265099" cy="265099"/>
+            </a:xfrm>
+            <a:prstGeom prst="rect">
+              <a:avLst/>
+            </a:prstGeom>
+            <a:noFill/>
+            <a:extLst>
+              <a:ext uri="{909E8E84-426E-40DD-AFC4-6F175D3DCCD1}">
+                <a14:hiddenFill xmlns:a14="http://schemas.microsoft.com/office/drawing/2010/main">
+                  <a:solidFill>
+                    <a:srgbClr val="FFFFFF"/>
+                  </a:solidFill>
+                </a14:hiddenFill>
+              </a:ext>
+            </a:extLst>
+          </p:spPr>
+        </p:pic>
+        <p:sp>
+          <p:nvSpPr>
+            <p:cNvPr id="109" name="TextBox 108">
+              <a:extLst>
+                <a:ext uri="{FF2B5EF4-FFF2-40B4-BE49-F238E27FC236}">
+                  <a16:creationId xmlns:a16="http://schemas.microsoft.com/office/drawing/2014/main" id="{DD320B39-569A-D947-DE9A-C3C5A15C92F4}"/>
+                </a:ext>
+              </a:extLst>
+            </p:cNvPr>
+            <p:cNvSpPr txBox="1"/>
+            <p:nvPr/>
+          </p:nvSpPr>
+          <p:spPr>
+            <a:xfrm>
+              <a:off x="3820471" y="3596600"/>
+              <a:ext cx="1825947" cy="261610"/>
+            </a:xfrm>
+            <a:prstGeom prst="rect">
+              <a:avLst/>
+            </a:prstGeom>
+            <a:noFill/>
+          </p:spPr>
+          <p:txBody>
+            <a:bodyPr wrap="square" rtlCol="0">
+              <a:spAutoFit/>
+            </a:bodyPr>
+            <a:lstStyle/>
+            <a:p>
+              <a:pPr algn="ctr"/>
+              <a:r>
+                <a:rPr lang="ko-KR" altLang="en-US" sz="1100" b="1" dirty="0">
+                  <a:solidFill>
+                    <a:schemeClr val="bg2">
+                      <a:lumMod val="75000"/>
+                    </a:schemeClr>
+                  </a:solidFill>
+                </a:rPr>
+                <a:t>부화시킬 알이 없습니다</a:t>
+              </a:r>
+              <a:r>
+                <a:rPr lang="en-US" altLang="ko-KR" sz="1100" b="1" dirty="0">
+                  <a:solidFill>
+                    <a:schemeClr val="bg2">
+                      <a:lumMod val="75000"/>
+                    </a:schemeClr>
+                  </a:solidFill>
+                </a:rPr>
+                <a:t>.</a:t>
+              </a:r>
+              <a:endParaRPr lang="ko-KR" altLang="en-US" sz="1100" b="1" dirty="0">
+                <a:solidFill>
+                  <a:schemeClr val="bg2">
+                    <a:lumMod val="75000"/>
+                  </a:schemeClr>
+                </a:solidFill>
+              </a:endParaRPr>
+            </a:p>
+          </p:txBody>
+        </p:sp>
+      </p:grpSp>
+    </p:spTree>
+    <p:extLst>
+      <p:ext uri="{BB962C8B-B14F-4D97-AF65-F5344CB8AC3E}">
+        <p14:creationId xmlns:p14="http://schemas.microsoft.com/office/powerpoint/2010/main" val="2767378292"/>
+      </p:ext>
+    </p:extLst>
+  </p:cSld>
+  <p:clrMapOvr>
+    <a:masterClrMapping/>
+  </p:clrMapOvr>
+</p:sld>
+</file>
+
+<file path=ppt/slides/slide6.xml><?xml version="1.0" encoding="utf-8"?>
+<p:sld xmlns:a="http://schemas.openxmlformats.org/drawingml/2006/main" xmlns:r="http://schemas.openxmlformats.org/officeDocument/2006/relationships" xmlns:p="http://schemas.openxmlformats.org/presentationml/2006/main">
+  <p:cSld>
+    <p:spTree>
+      <p:nvGrpSpPr>
+        <p:cNvPr id="1" name=""/>
+        <p:cNvGrpSpPr/>
+        <p:nvPr/>
+      </p:nvGrpSpPr>
+      <p:grpSpPr>
+        <a:xfrm>
+          <a:off x="0" y="0"/>
+          <a:ext cx="0" cy="0"/>
+          <a:chOff x="0" y="0"/>
+          <a:chExt cx="0" cy="0"/>
+        </a:xfrm>
+      </p:grpSpPr>
+      <p:sp>
+        <p:nvSpPr>
+          <p:cNvPr id="4" name="사각형: 둥근 모서리 3">
+            <a:extLst>
+              <a:ext uri="{FF2B5EF4-FFF2-40B4-BE49-F238E27FC236}">
+                <a16:creationId xmlns:a16="http://schemas.microsoft.com/office/drawing/2014/main" id="{BAE818E2-E728-560A-6E13-B83C0AAD297F}"/>
+              </a:ext>
+            </a:extLst>
+          </p:cNvPr>
+          <p:cNvSpPr/>
+          <p:nvPr/>
+        </p:nvSpPr>
+        <p:spPr>
+          <a:xfrm>
+            <a:off x="1435003" y="2345197"/>
+            <a:ext cx="2200521" cy="2794000"/>
+          </a:xfrm>
+          <a:prstGeom prst="roundRect">
+            <a:avLst>
+              <a:gd name="adj" fmla="val 2239"/>
+            </a:avLst>
+          </a:prstGeom>
+          <a:solidFill>
+            <a:schemeClr val="bg2">
+              <a:lumMod val="90000"/>
+            </a:schemeClr>
+          </a:solidFill>
+        </p:spPr>
+        <p:style>
+          <a:lnRef idx="2">
+            <a:schemeClr val="accent1">
+              <a:shade val="50000"/>
+            </a:schemeClr>
+          </a:lnRef>
+          <a:fillRef idx="1">
+            <a:schemeClr val="accent1"/>
+          </a:fillRef>
+          <a:effectRef idx="0">
+            <a:schemeClr val="accent1"/>
+          </a:effectRef>
+          <a:fontRef idx="minor">
+            <a:schemeClr val="lt1"/>
+          </a:fontRef>
+        </p:style>
+        <p:txBody>
+          <a:bodyPr rtlCol="0" anchor="ctr"/>
+          <a:lstStyle/>
+          <a:p>
+            <a:pPr algn="ctr"/>
+            <a:endParaRPr lang="ko-KR" altLang="en-US"/>
+          </a:p>
+        </p:txBody>
+      </p:sp>
+      <p:sp>
+        <p:nvSpPr>
+          <p:cNvPr id="5" name="사각형: 둥근 모서리 4">
+            <a:extLst>
+              <a:ext uri="{FF2B5EF4-FFF2-40B4-BE49-F238E27FC236}">
+                <a16:creationId xmlns:a16="http://schemas.microsoft.com/office/drawing/2014/main" id="{591E7472-EA50-2437-1AFE-DDF7554B467B}"/>
+              </a:ext>
+            </a:extLst>
+          </p:cNvPr>
+          <p:cNvSpPr/>
+          <p:nvPr/>
+        </p:nvSpPr>
+        <p:spPr>
+          <a:xfrm>
+            <a:off x="2009278" y="2034047"/>
+            <a:ext cx="358775" cy="311150"/>
+          </a:xfrm>
+          <a:prstGeom prst="roundRect">
+            <a:avLst>
+              <a:gd name="adj" fmla="val 2239"/>
+            </a:avLst>
+          </a:prstGeom>
+          <a:solidFill>
+            <a:schemeClr val="accent2">
+              <a:lumMod val="60000"/>
+              <a:lumOff val="40000"/>
+            </a:schemeClr>
+          </a:solidFill>
+        </p:spPr>
+        <p:style>
+          <a:lnRef idx="2">
+            <a:schemeClr val="accent1">
+              <a:shade val="50000"/>
+            </a:schemeClr>
+          </a:lnRef>
+          <a:fillRef idx="1">
+            <a:schemeClr val="accent1"/>
+          </a:fillRef>
+          <a:effectRef idx="0">
+            <a:schemeClr val="accent1"/>
+          </a:effectRef>
+          <a:fontRef idx="minor">
+            <a:schemeClr val="lt1"/>
+          </a:fontRef>
+        </p:style>
+        <p:txBody>
+          <a:bodyPr rtlCol="0" anchor="ctr"/>
+          <a:lstStyle/>
+          <a:p>
+            <a:pPr algn="ctr"/>
+            <a:endParaRPr lang="ko-KR" altLang="en-US"/>
+          </a:p>
+        </p:txBody>
+      </p:sp>
+      <p:sp>
+        <p:nvSpPr>
+          <p:cNvPr id="6" name="사각형: 둥근 모서리 5">
+            <a:extLst>
+              <a:ext uri="{FF2B5EF4-FFF2-40B4-BE49-F238E27FC236}">
+                <a16:creationId xmlns:a16="http://schemas.microsoft.com/office/drawing/2014/main" id="{E1130A85-94B9-7CA8-76C3-54F29D842C6E}"/>
+              </a:ext>
+            </a:extLst>
+          </p:cNvPr>
+          <p:cNvSpPr/>
+          <p:nvPr/>
+        </p:nvSpPr>
+        <p:spPr>
+          <a:xfrm>
+            <a:off x="1580696" y="2030612"/>
+            <a:ext cx="358775" cy="311150"/>
+          </a:xfrm>
+          <a:prstGeom prst="roundRect">
+            <a:avLst>
+              <a:gd name="adj" fmla="val 2239"/>
+            </a:avLst>
+          </a:prstGeom>
+          <a:solidFill>
+            <a:schemeClr val="accent2">
+              <a:lumMod val="60000"/>
+              <a:lumOff val="40000"/>
+            </a:schemeClr>
+          </a:solidFill>
+        </p:spPr>
+        <p:style>
+          <a:lnRef idx="2">
+            <a:schemeClr val="accent1">
+              <a:shade val="50000"/>
+            </a:schemeClr>
+          </a:lnRef>
+          <a:fillRef idx="1">
+            <a:schemeClr val="accent1"/>
+          </a:fillRef>
+          <a:effectRef idx="0">
+            <a:schemeClr val="accent1"/>
+          </a:effectRef>
+          <a:fontRef idx="minor">
+            <a:schemeClr val="lt1"/>
+          </a:fontRef>
+        </p:style>
+        <p:txBody>
+          <a:bodyPr rtlCol="0" anchor="ctr"/>
+          <a:lstStyle/>
+          <a:p>
+            <a:pPr algn="ctr"/>
+            <a:endParaRPr lang="ko-KR" altLang="en-US"/>
+          </a:p>
+        </p:txBody>
+      </p:sp>
+      <p:sp>
+        <p:nvSpPr>
+          <p:cNvPr id="7" name="사각형: 둥근 모서리 6">
+            <a:extLst>
+              <a:ext uri="{FF2B5EF4-FFF2-40B4-BE49-F238E27FC236}">
+                <a16:creationId xmlns:a16="http://schemas.microsoft.com/office/drawing/2014/main" id="{0E4BE47F-1FCC-DEC3-E166-37E2116887AB}"/>
+              </a:ext>
+            </a:extLst>
+          </p:cNvPr>
+          <p:cNvSpPr/>
+          <p:nvPr/>
+        </p:nvSpPr>
+        <p:spPr>
+          <a:xfrm>
+            <a:off x="2454882" y="2034047"/>
+            <a:ext cx="358775" cy="311150"/>
+          </a:xfrm>
+          <a:prstGeom prst="roundRect">
+            <a:avLst>
+              <a:gd name="adj" fmla="val 2239"/>
+            </a:avLst>
+          </a:prstGeom>
+          <a:solidFill>
+            <a:schemeClr val="accent4">
+              <a:lumMod val="40000"/>
+              <a:lumOff val="60000"/>
+            </a:schemeClr>
+          </a:solidFill>
+        </p:spPr>
+        <p:style>
+          <a:lnRef idx="2">
+            <a:schemeClr val="accent1">
+              <a:shade val="50000"/>
+            </a:schemeClr>
+          </a:lnRef>
+          <a:fillRef idx="1">
+            <a:schemeClr val="accent1"/>
+          </a:fillRef>
+          <a:effectRef idx="0">
+            <a:schemeClr val="accent1"/>
+          </a:effectRef>
+          <a:fontRef idx="minor">
+            <a:schemeClr val="lt1"/>
+          </a:fontRef>
+        </p:style>
+        <p:txBody>
+          <a:bodyPr rtlCol="0" anchor="ctr"/>
+          <a:lstStyle/>
+          <a:p>
+            <a:pPr algn="ctr"/>
+            <a:endParaRPr lang="ko-KR" altLang="en-US"/>
+          </a:p>
+        </p:txBody>
+      </p:sp>
+      <p:pic>
+        <p:nvPicPr>
+          <p:cNvPr id="8" name="Picture 2" descr="잎 - 무료 자연개 아이콘">
+            <a:extLst>
+              <a:ext uri="{FF2B5EF4-FFF2-40B4-BE49-F238E27FC236}">
+                <a16:creationId xmlns:a16="http://schemas.microsoft.com/office/drawing/2014/main" id="{8AA4FEDE-326D-13B3-0EFD-F11C9D27E9D1}"/>
+              </a:ext>
+            </a:extLst>
+          </p:cNvPr>
+          <p:cNvPicPr>
+            <a:picLocks noChangeAspect="1" noChangeArrowheads="1"/>
+          </p:cNvPicPr>
+          <p:nvPr/>
+        </p:nvPicPr>
+        <p:blipFill>
+          <a:blip r:embed="rId2">
+            <a:extLst>
+              <a:ext uri="{28A0092B-C50C-407E-A947-70E740481C1C}">
+                <a14:useLocalDpi xmlns:a14="http://schemas.microsoft.com/office/drawing/2010/main" val="0"/>
+              </a:ext>
+            </a:extLst>
+          </a:blip>
+          <a:srcRect/>
+          <a:stretch>
+            <a:fillRect/>
+          </a:stretch>
+        </p:blipFill>
+        <p:spPr bwMode="auto">
+          <a:xfrm>
+            <a:off x="2063048" y="2062919"/>
+            <a:ext cx="251234" cy="251234"/>
+          </a:xfrm>
+          <a:prstGeom prst="rect">
+            <a:avLst/>
+          </a:prstGeom>
+          <a:noFill/>
+          <a:extLst>
+            <a:ext uri="{909E8E84-426E-40DD-AFC4-6F175D3DCCD1}">
+              <a14:hiddenFill xmlns:a14="http://schemas.microsoft.com/office/drawing/2010/main">
+                <a:solidFill>
+                  <a:srgbClr val="FFFFFF"/>
+                </a:solidFill>
+              </a14:hiddenFill>
+            </a:ext>
+          </a:extLst>
+        </p:spPr>
+      </p:pic>
+      <p:pic>
+        <p:nvPicPr>
+          <p:cNvPr id="9" name="Picture 2" descr="Material 디자인 스타일의 달팽이 아이콘">
+            <a:extLst>
+              <a:ext uri="{FF2B5EF4-FFF2-40B4-BE49-F238E27FC236}">
+                <a16:creationId xmlns:a16="http://schemas.microsoft.com/office/drawing/2014/main" id="{75B69D92-8FBE-BB04-022C-B85A123D5A53}"/>
+              </a:ext>
+            </a:extLst>
+          </p:cNvPr>
+          <p:cNvPicPr>
+            <a:picLocks noChangeAspect="1" noChangeArrowheads="1"/>
+          </p:cNvPicPr>
+          <p:nvPr/>
+        </p:nvPicPr>
+        <p:blipFill>
+          <a:blip r:embed="rId3">
+            <a:extLst>
+              <a:ext uri="{BEBA8EAE-BF5A-486C-A8C5-ECC9F3942E4B}">
+                <a14:imgProps xmlns:a14="http://schemas.microsoft.com/office/drawing/2010/main">
+                  <a14:imgLayer r:embed="rId4">
+                    <a14:imgEffect>
+                      <a14:backgroundRemoval t="10000" b="90000" l="8750" r="91250">
+                        <a14:foregroundMark x1="90833" y1="41250" x2="90833" y2="41250"/>
+                        <a14:foregroundMark x1="91250" y1="16167" x2="91250" y2="16167"/>
+                        <a14:foregroundMark x1="8750" y1="46000" x2="8750" y2="46000"/>
+                      </a14:backgroundRemoval>
+                    </a14:imgEffect>
+                  </a14:imgLayer>
+                </a14:imgProps>
+              </a:ext>
+              <a:ext uri="{28A0092B-C50C-407E-A947-70E740481C1C}">
+                <a14:useLocalDpi xmlns:a14="http://schemas.microsoft.com/office/drawing/2010/main" val="0"/>
+              </a:ext>
+            </a:extLst>
+          </a:blip>
+          <a:srcRect/>
+          <a:stretch>
+            <a:fillRect/>
+          </a:stretch>
+        </p:blipFill>
+        <p:spPr bwMode="auto">
+          <a:xfrm>
+            <a:off x="1611505" y="2037482"/>
+            <a:ext cx="297156" cy="297156"/>
+          </a:xfrm>
+          <a:prstGeom prst="rect">
+            <a:avLst/>
+          </a:prstGeom>
+          <a:noFill/>
+          <a:extLst>
+            <a:ext uri="{909E8E84-426E-40DD-AFC4-6F175D3DCCD1}">
+              <a14:hiddenFill xmlns:a14="http://schemas.microsoft.com/office/drawing/2010/main">
+                <a:solidFill>
+                  <a:srgbClr val="FFFFFF"/>
+                </a:solidFill>
+              </a14:hiddenFill>
+            </a:ext>
+          </a:extLst>
+        </p:spPr>
+      </p:pic>
+      <p:pic>
+        <p:nvPicPr>
+          <p:cNvPr id="10" name="Picture 4" descr="상점 아이콘 구매 기호입니다 장바구니 아이콘재고에 대 한 가방에 대한 스톡 벡터 아트 및 기타 이미지 - 가방, 고객, 구매 -  iStock">
+            <a:extLst>
+              <a:ext uri="{FF2B5EF4-FFF2-40B4-BE49-F238E27FC236}">
+                <a16:creationId xmlns:a16="http://schemas.microsoft.com/office/drawing/2014/main" id="{0FD399F2-1F5A-47B6-2F76-1ACF29AFEE89}"/>
+              </a:ext>
+            </a:extLst>
+          </p:cNvPr>
+          <p:cNvPicPr>
+            <a:picLocks noChangeAspect="1" noChangeArrowheads="1"/>
+          </p:cNvPicPr>
+          <p:nvPr/>
+        </p:nvPicPr>
+        <p:blipFill>
+          <a:blip r:embed="rId5">
+            <a:extLst>
+              <a:ext uri="{BEBA8EAE-BF5A-486C-A8C5-ECC9F3942E4B}">
+                <a14:imgProps xmlns:a14="http://schemas.microsoft.com/office/drawing/2010/main">
+                  <a14:imgLayer r:embed="rId6">
+                    <a14:imgEffect>
+                      <a14:backgroundRemoval t="10000" b="90000" l="10000" r="90000">
+                        <a14:foregroundMark x1="46154" y1="42067" x2="53846" y2="41106"/>
+                        <a14:foregroundMark x1="63462" y1="32452" x2="63462" y2="32452"/>
+                        <a14:foregroundMark x1="41587" y1="29087" x2="40144" y2="29567"/>
+                      </a14:backgroundRemoval>
+                    </a14:imgEffect>
+                  </a14:imgLayer>
+                </a14:imgProps>
+              </a:ext>
+              <a:ext uri="{28A0092B-C50C-407E-A947-70E740481C1C}">
+                <a14:useLocalDpi xmlns:a14="http://schemas.microsoft.com/office/drawing/2010/main" val="0"/>
+              </a:ext>
+            </a:extLst>
+          </a:blip>
+          <a:srcRect/>
+          <a:stretch>
+            <a:fillRect/>
+          </a:stretch>
+        </p:blipFill>
+        <p:spPr bwMode="auto">
+          <a:xfrm>
+            <a:off x="2443937" y="1998303"/>
+            <a:ext cx="385763" cy="385763"/>
+          </a:xfrm>
+          <a:prstGeom prst="rect">
+            <a:avLst/>
+          </a:prstGeom>
+          <a:noFill/>
+          <a:extLst>
+            <a:ext uri="{909E8E84-426E-40DD-AFC4-6F175D3DCCD1}">
+              <a14:hiddenFill xmlns:a14="http://schemas.microsoft.com/office/drawing/2010/main">
+                <a:solidFill>
+                  <a:srgbClr val="FFFFFF"/>
+                </a:solidFill>
+              </a14:hiddenFill>
+            </a:ext>
+          </a:extLst>
+        </p:spPr>
+      </p:pic>
+      <p:sp>
+        <p:nvSpPr>
+          <p:cNvPr id="11" name="사각형: 둥근 모서리 10">
+            <a:extLst>
+              <a:ext uri="{FF2B5EF4-FFF2-40B4-BE49-F238E27FC236}">
+                <a16:creationId xmlns:a16="http://schemas.microsoft.com/office/drawing/2014/main" id="{35D9E223-7C2D-CD36-2C13-D4454C947823}"/>
+              </a:ext>
+            </a:extLst>
+          </p:cNvPr>
+          <p:cNvSpPr/>
+          <p:nvPr/>
+        </p:nvSpPr>
+        <p:spPr>
+          <a:xfrm>
+            <a:off x="3635524" y="2338073"/>
+            <a:ext cx="2200521" cy="2794000"/>
+          </a:xfrm>
+          <a:prstGeom prst="roundRect">
+            <a:avLst>
+              <a:gd name="adj" fmla="val 2239"/>
+            </a:avLst>
+          </a:prstGeom>
+          <a:solidFill>
+            <a:schemeClr val="bg2">
+              <a:lumMod val="90000"/>
+            </a:schemeClr>
+          </a:solidFill>
+        </p:spPr>
+        <p:style>
+          <a:lnRef idx="2">
+            <a:schemeClr val="accent1">
+              <a:shade val="50000"/>
+            </a:schemeClr>
+          </a:lnRef>
+          <a:fillRef idx="1">
+            <a:schemeClr val="accent1"/>
+          </a:fillRef>
+          <a:effectRef idx="0">
+            <a:schemeClr val="accent1"/>
+          </a:effectRef>
+          <a:fontRef idx="minor">
+            <a:schemeClr val="lt1"/>
+          </a:fontRef>
+        </p:style>
+        <p:txBody>
+          <a:bodyPr rtlCol="0" anchor="ctr"/>
+          <a:lstStyle/>
+          <a:p>
+            <a:pPr algn="ctr"/>
+            <a:endParaRPr lang="ko-KR" altLang="en-US"/>
+          </a:p>
+        </p:txBody>
+      </p:sp>
+      <p:sp>
+        <p:nvSpPr>
+          <p:cNvPr id="12" name="사각형: 둥근 모서리 11">
+            <a:extLst>
+              <a:ext uri="{FF2B5EF4-FFF2-40B4-BE49-F238E27FC236}">
+                <a16:creationId xmlns:a16="http://schemas.microsoft.com/office/drawing/2014/main" id="{B1A745BD-49BD-1E61-E5AE-E4CF0EF32D3A}"/>
+              </a:ext>
+            </a:extLst>
+          </p:cNvPr>
+          <p:cNvSpPr/>
+          <p:nvPr/>
+        </p:nvSpPr>
+        <p:spPr>
+          <a:xfrm>
+            <a:off x="5583238" y="2242823"/>
+            <a:ext cx="323850" cy="323850"/>
+          </a:xfrm>
+          <a:prstGeom prst="roundRect">
+            <a:avLst/>
+          </a:prstGeom>
+          <a:solidFill>
+            <a:schemeClr val="bg2">
+              <a:lumMod val="90000"/>
+            </a:schemeClr>
+          </a:solidFill>
+        </p:spPr>
+        <p:style>
+          <a:lnRef idx="2">
+            <a:schemeClr val="accent1">
+              <a:shade val="50000"/>
+            </a:schemeClr>
+          </a:lnRef>
+          <a:fillRef idx="1">
+            <a:schemeClr val="accent1"/>
+          </a:fillRef>
+          <a:effectRef idx="0">
+            <a:schemeClr val="accent1"/>
+          </a:effectRef>
+          <a:fontRef idx="minor">
+            <a:schemeClr val="lt1"/>
+          </a:fontRef>
+        </p:style>
+        <p:txBody>
+          <a:bodyPr rtlCol="0" anchor="ctr"/>
+          <a:lstStyle/>
+          <a:p>
+            <a:pPr algn="ctr"/>
+            <a:endParaRPr lang="ko-KR" altLang="en-US"/>
+          </a:p>
+        </p:txBody>
+      </p:sp>
+      <p:sp>
+        <p:nvSpPr>
+          <p:cNvPr id="13" name="사각형: 둥근 모서리 12">
+            <a:extLst>
+              <a:ext uri="{FF2B5EF4-FFF2-40B4-BE49-F238E27FC236}">
+                <a16:creationId xmlns:a16="http://schemas.microsoft.com/office/drawing/2014/main" id="{1D84F38E-E0AA-A7C9-E951-6415337A7F6E}"/>
+              </a:ext>
+            </a:extLst>
+          </p:cNvPr>
+          <p:cNvSpPr/>
+          <p:nvPr/>
+        </p:nvSpPr>
+        <p:spPr>
+          <a:xfrm>
+            <a:off x="4330003" y="4351957"/>
+            <a:ext cx="863348" cy="158667"/>
+          </a:xfrm>
+          <a:prstGeom prst="roundRect">
+            <a:avLst>
+              <a:gd name="adj" fmla="val 50000"/>
+            </a:avLst>
+          </a:prstGeom>
+          <a:solidFill>
+            <a:schemeClr val="bg2">
+              <a:lumMod val="75000"/>
+            </a:schemeClr>
+          </a:solidFill>
+          <a:ln>
+            <a:noFill/>
+          </a:ln>
+        </p:spPr>
+        <p:style>
+          <a:lnRef idx="2">
+            <a:schemeClr val="accent1">
+              <a:shade val="50000"/>
+            </a:schemeClr>
+          </a:lnRef>
+          <a:fillRef idx="1">
+            <a:schemeClr val="accent1"/>
+          </a:fillRef>
+          <a:effectRef idx="0">
+            <a:schemeClr val="accent1"/>
+          </a:effectRef>
+          <a:fontRef idx="minor">
+            <a:schemeClr val="lt1"/>
+          </a:fontRef>
+        </p:style>
+        <p:txBody>
+          <a:bodyPr rtlCol="0" anchor="ctr"/>
+          <a:lstStyle/>
+          <a:p>
+            <a:pPr algn="ctr"/>
+            <a:endParaRPr lang="ko-KR" altLang="en-US"/>
+          </a:p>
+        </p:txBody>
+      </p:sp>
+      <p:sp>
+        <p:nvSpPr>
+          <p:cNvPr id="14" name="곱하기 기호 13">
+            <a:extLst>
+              <a:ext uri="{FF2B5EF4-FFF2-40B4-BE49-F238E27FC236}">
+                <a16:creationId xmlns:a16="http://schemas.microsoft.com/office/drawing/2014/main" id="{90792D48-18CE-9F29-61DE-865308494A16}"/>
+              </a:ext>
+            </a:extLst>
+          </p:cNvPr>
+          <p:cNvSpPr/>
+          <p:nvPr/>
+        </p:nvSpPr>
+        <p:spPr>
+          <a:xfrm>
+            <a:off x="5566101" y="2225572"/>
+            <a:ext cx="358775" cy="358775"/>
+          </a:xfrm>
+          <a:prstGeom prst="mathMultiply">
+            <a:avLst>
+              <a:gd name="adj1" fmla="val 16941"/>
+            </a:avLst>
+          </a:prstGeom>
+        </p:spPr>
+        <p:style>
+          <a:lnRef idx="2">
+            <a:schemeClr val="accent1">
+              <a:shade val="50000"/>
+            </a:schemeClr>
+          </a:lnRef>
+          <a:fillRef idx="1">
+            <a:schemeClr val="accent1"/>
+          </a:fillRef>
+          <a:effectRef idx="0">
+            <a:schemeClr val="accent1"/>
+          </a:effectRef>
+          <a:fontRef idx="minor">
+            <a:schemeClr val="lt1"/>
+          </a:fontRef>
+        </p:style>
+        <p:txBody>
+          <a:bodyPr rtlCol="0" anchor="ctr"/>
+          <a:lstStyle/>
+          <a:p>
+            <a:pPr algn="ctr"/>
+            <a:endParaRPr lang="ko-KR" altLang="en-US"/>
+          </a:p>
+        </p:txBody>
+      </p:sp>
+      <p:sp>
+        <p:nvSpPr>
+          <p:cNvPr id="15" name="TextBox 14">
+            <a:extLst>
+              <a:ext uri="{FF2B5EF4-FFF2-40B4-BE49-F238E27FC236}">
+                <a16:creationId xmlns:a16="http://schemas.microsoft.com/office/drawing/2014/main" id="{D0607C51-EEFF-5977-CFA6-E91B235870C8}"/>
+              </a:ext>
+            </a:extLst>
+          </p:cNvPr>
+          <p:cNvSpPr txBox="1"/>
+          <p:nvPr/>
+        </p:nvSpPr>
+        <p:spPr>
+          <a:xfrm>
+            <a:off x="1928915" y="2397535"/>
+            <a:ext cx="1244600" cy="261610"/>
+          </a:xfrm>
+          <a:prstGeom prst="rect">
+            <a:avLst/>
+          </a:prstGeom>
+          <a:noFill/>
+        </p:spPr>
+        <p:txBody>
+          <a:bodyPr wrap="square" rtlCol="0">
+            <a:spAutoFit/>
+          </a:bodyPr>
+          <a:lstStyle/>
+          <a:p>
+            <a:pPr algn="ctr"/>
+            <a:r>
+              <a:rPr lang="ko-KR" altLang="en-US" sz="1100" b="1"/>
+              <a:t>상점</a:t>
+            </a:r>
+          </a:p>
+        </p:txBody>
+      </p:sp>
+      <p:sp>
+        <p:nvSpPr>
+          <p:cNvPr id="16" name="사각형: 둥근 모서리 15">
+            <a:extLst>
+              <a:ext uri="{FF2B5EF4-FFF2-40B4-BE49-F238E27FC236}">
+                <a16:creationId xmlns:a16="http://schemas.microsoft.com/office/drawing/2014/main" id="{21F4938D-7EB7-B145-657D-FA3B9CEA1F64}"/>
+              </a:ext>
+            </a:extLst>
+          </p:cNvPr>
+          <p:cNvSpPr/>
+          <p:nvPr/>
+        </p:nvSpPr>
+        <p:spPr>
+          <a:xfrm>
+            <a:off x="1565689" y="2689816"/>
+            <a:ext cx="1971237" cy="508000"/>
+          </a:xfrm>
+          <a:prstGeom prst="roundRect">
+            <a:avLst/>
+          </a:prstGeom>
+          <a:solidFill>
+            <a:schemeClr val="bg2">
+              <a:lumMod val="75000"/>
+            </a:schemeClr>
+          </a:solidFill>
+          <a:ln>
+            <a:noFill/>
+          </a:ln>
+        </p:spPr>
+        <p:style>
+          <a:lnRef idx="2">
+            <a:schemeClr val="accent1">
+              <a:shade val="50000"/>
+            </a:schemeClr>
+          </a:lnRef>
+          <a:fillRef idx="1">
+            <a:schemeClr val="accent1"/>
+          </a:fillRef>
+          <a:effectRef idx="0">
+            <a:schemeClr val="accent1"/>
+          </a:effectRef>
+          <a:fontRef idx="minor">
+            <a:schemeClr val="lt1"/>
+          </a:fontRef>
+        </p:style>
+        <p:txBody>
+          <a:bodyPr rtlCol="0" anchor="ctr"/>
+          <a:lstStyle/>
+          <a:p>
+            <a:pPr algn="ctr"/>
+            <a:endParaRPr lang="ko-KR" altLang="en-US"/>
+          </a:p>
+        </p:txBody>
+      </p:sp>
+      <p:grpSp>
+        <p:nvGrpSpPr>
+          <p:cNvPr id="17" name="그룹 16">
+            <a:extLst>
+              <a:ext uri="{FF2B5EF4-FFF2-40B4-BE49-F238E27FC236}">
+                <a16:creationId xmlns:a16="http://schemas.microsoft.com/office/drawing/2014/main" id="{4CB069C2-0D1C-B6B4-288D-AF91958A8669}"/>
+              </a:ext>
+            </a:extLst>
+          </p:cNvPr>
+          <p:cNvGrpSpPr/>
+          <p:nvPr/>
+        </p:nvGrpSpPr>
+        <p:grpSpPr>
+          <a:xfrm>
+            <a:off x="4261390" y="1958405"/>
+            <a:ext cx="1141042" cy="442051"/>
+            <a:chOff x="6711477" y="1465221"/>
+            <a:chExt cx="1416357" cy="548711"/>
+          </a:xfrm>
+        </p:grpSpPr>
+        <p:sp>
+          <p:nvSpPr>
+            <p:cNvPr id="18" name="사각형: 둥근 모서리 17">
+              <a:extLst>
+                <a:ext uri="{FF2B5EF4-FFF2-40B4-BE49-F238E27FC236}">
+                  <a16:creationId xmlns:a16="http://schemas.microsoft.com/office/drawing/2014/main" id="{12E37BC0-2D1D-B131-533A-77419D2CE840}"/>
+                </a:ext>
+              </a:extLst>
+            </p:cNvPr>
+            <p:cNvSpPr/>
+            <p:nvPr/>
+          </p:nvSpPr>
+          <p:spPr>
+            <a:xfrm>
+              <a:off x="6839352" y="1586038"/>
+              <a:ext cx="955998" cy="274512"/>
+            </a:xfrm>
+            <a:prstGeom prst="roundRect">
+              <a:avLst>
+                <a:gd name="adj" fmla="val 50000"/>
+              </a:avLst>
+            </a:prstGeom>
+            <a:solidFill>
+              <a:schemeClr val="bg2">
+                <a:lumMod val="90000"/>
+              </a:schemeClr>
+            </a:solidFill>
+            <a:ln>
+              <a:noFill/>
+            </a:ln>
+          </p:spPr>
+          <p:style>
+            <a:lnRef idx="2">
+              <a:schemeClr val="accent1">
+                <a:shade val="50000"/>
+              </a:schemeClr>
+            </a:lnRef>
+            <a:fillRef idx="1">
+              <a:schemeClr val="accent1"/>
+            </a:fillRef>
+            <a:effectRef idx="0">
+              <a:schemeClr val="accent1"/>
+            </a:effectRef>
+            <a:fontRef idx="minor">
+              <a:schemeClr val="lt1"/>
+            </a:fontRef>
+          </p:style>
+          <p:txBody>
+            <a:bodyPr rtlCol="0" anchor="ctr"/>
+            <a:lstStyle/>
+            <a:p>
+              <a:pPr algn="ctr"/>
+              <a:endParaRPr lang="ko-KR" altLang="en-US"/>
+            </a:p>
+          </p:txBody>
+        </p:sp>
+        <p:pic>
+          <p:nvPicPr>
+            <p:cNvPr id="19" name="그림 18">
+              <a:extLst>
+                <a:ext uri="{FF2B5EF4-FFF2-40B4-BE49-F238E27FC236}">
+                  <a16:creationId xmlns:a16="http://schemas.microsoft.com/office/drawing/2014/main" id="{B00921EF-677B-B0EB-05EF-D38E2BFBF963}"/>
+                </a:ext>
+              </a:extLst>
+            </p:cNvPr>
+            <p:cNvPicPr>
+              <a:picLocks noChangeAspect="1"/>
+            </p:cNvPicPr>
+            <p:nvPr/>
+          </p:nvPicPr>
+          <p:blipFill>
+            <a:blip r:embed="rId7">
+              <a:extLst>
+                <a:ext uri="{28A0092B-C50C-407E-A947-70E740481C1C}">
+                  <a14:useLocalDpi xmlns:a14="http://schemas.microsoft.com/office/drawing/2010/main" val="0"/>
+                </a:ext>
+              </a:extLst>
+            </a:blip>
+            <a:stretch>
+              <a:fillRect/>
+            </a:stretch>
+          </p:blipFill>
+          <p:spPr>
+            <a:xfrm>
+              <a:off x="6711477" y="1465221"/>
+              <a:ext cx="548711" cy="548711"/>
+            </a:xfrm>
+            <a:prstGeom prst="rect">
+              <a:avLst/>
+            </a:prstGeom>
+          </p:spPr>
+        </p:pic>
+        <p:sp>
+          <p:nvSpPr>
+            <p:cNvPr id="20" name="TextBox 19">
+              <a:extLst>
+                <a:ext uri="{FF2B5EF4-FFF2-40B4-BE49-F238E27FC236}">
+                  <a16:creationId xmlns:a16="http://schemas.microsoft.com/office/drawing/2014/main" id="{C467CB5F-28AB-8EE9-2326-CFB1DB1ED004}"/>
+                </a:ext>
+              </a:extLst>
+            </p:cNvPr>
+            <p:cNvSpPr txBox="1"/>
+            <p:nvPr/>
+          </p:nvSpPr>
+          <p:spPr>
+            <a:xfrm>
+              <a:off x="6883235" y="1560569"/>
+              <a:ext cx="1244599" cy="315182"/>
+            </a:xfrm>
+            <a:prstGeom prst="rect">
+              <a:avLst/>
+            </a:prstGeom>
+            <a:noFill/>
+          </p:spPr>
+          <p:txBody>
+            <a:bodyPr wrap="square" rtlCol="0">
+              <a:spAutoFit/>
+            </a:bodyPr>
+            <a:lstStyle/>
+            <a:p>
+              <a:pPr algn="ctr"/>
+              <a:r>
+                <a:rPr lang="en-US" altLang="ko-KR" sz="1050" b="1"/>
+                <a:t>5,000</a:t>
+              </a:r>
+              <a:endParaRPr lang="ko-KR" altLang="en-US" sz="1050" b="1"/>
+            </a:p>
+          </p:txBody>
+        </p:sp>
+      </p:grpSp>
+      <p:sp>
+        <p:nvSpPr>
+          <p:cNvPr id="21" name="사각형: 둥근 모서리 20">
+            <a:extLst>
+              <a:ext uri="{FF2B5EF4-FFF2-40B4-BE49-F238E27FC236}">
+                <a16:creationId xmlns:a16="http://schemas.microsoft.com/office/drawing/2014/main" id="{4A3D39D9-085B-7980-FF82-AE254D201397}"/>
+              </a:ext>
+            </a:extLst>
+          </p:cNvPr>
+          <p:cNvSpPr/>
+          <p:nvPr/>
+        </p:nvSpPr>
+        <p:spPr>
+          <a:xfrm>
+            <a:off x="1565595" y="3274176"/>
+            <a:ext cx="1971237" cy="508000"/>
+          </a:xfrm>
+          <a:prstGeom prst="roundRect">
+            <a:avLst/>
+          </a:prstGeom>
+          <a:solidFill>
+            <a:schemeClr val="bg2">
+              <a:lumMod val="75000"/>
+            </a:schemeClr>
+          </a:solidFill>
+          <a:ln>
+            <a:noFill/>
+          </a:ln>
+        </p:spPr>
+        <p:style>
+          <a:lnRef idx="2">
+            <a:schemeClr val="accent1">
+              <a:shade val="50000"/>
+            </a:schemeClr>
+          </a:lnRef>
+          <a:fillRef idx="1">
+            <a:schemeClr val="accent1"/>
+          </a:fillRef>
+          <a:effectRef idx="0">
+            <a:schemeClr val="accent1"/>
+          </a:effectRef>
+          <a:fontRef idx="minor">
+            <a:schemeClr val="lt1"/>
+          </a:fontRef>
+        </p:style>
+        <p:txBody>
+          <a:bodyPr rtlCol="0" anchor="ctr"/>
+          <a:lstStyle/>
+          <a:p>
+            <a:pPr algn="ctr"/>
+            <a:endParaRPr lang="ko-KR" altLang="en-US"/>
+          </a:p>
+        </p:txBody>
+      </p:sp>
+      <p:sp>
+        <p:nvSpPr>
+          <p:cNvPr id="22" name="사각형: 둥근 모서리 21">
+            <a:extLst>
+              <a:ext uri="{FF2B5EF4-FFF2-40B4-BE49-F238E27FC236}">
+                <a16:creationId xmlns:a16="http://schemas.microsoft.com/office/drawing/2014/main" id="{4B12D1F2-C002-D22C-FFAB-93F9107D90DC}"/>
+              </a:ext>
+            </a:extLst>
+          </p:cNvPr>
+          <p:cNvSpPr/>
+          <p:nvPr/>
+        </p:nvSpPr>
+        <p:spPr>
+          <a:xfrm>
+            <a:off x="1565358" y="3864981"/>
+            <a:ext cx="1971237" cy="508000"/>
+          </a:xfrm>
+          <a:prstGeom prst="roundRect">
+            <a:avLst/>
+          </a:prstGeom>
+          <a:solidFill>
+            <a:schemeClr val="bg2">
+              <a:lumMod val="75000"/>
+            </a:schemeClr>
+          </a:solidFill>
+          <a:ln>
+            <a:noFill/>
+          </a:ln>
+        </p:spPr>
+        <p:style>
+          <a:lnRef idx="2">
+            <a:schemeClr val="accent1">
+              <a:shade val="50000"/>
+            </a:schemeClr>
+          </a:lnRef>
+          <a:fillRef idx="1">
+            <a:schemeClr val="accent1"/>
+          </a:fillRef>
+          <a:effectRef idx="0">
+            <a:schemeClr val="accent1"/>
+          </a:effectRef>
+          <a:fontRef idx="minor">
+            <a:schemeClr val="lt1"/>
+          </a:fontRef>
+        </p:style>
+        <p:txBody>
+          <a:bodyPr rtlCol="0" anchor="ctr"/>
+          <a:lstStyle/>
+          <a:p>
+            <a:pPr algn="ctr"/>
+            <a:endParaRPr lang="ko-KR" altLang="en-US"/>
+          </a:p>
+        </p:txBody>
+      </p:sp>
+      <p:sp>
+        <p:nvSpPr>
+          <p:cNvPr id="23" name="사각형: 둥근 모서리 22">
+            <a:extLst>
+              <a:ext uri="{FF2B5EF4-FFF2-40B4-BE49-F238E27FC236}">
+                <a16:creationId xmlns:a16="http://schemas.microsoft.com/office/drawing/2014/main" id="{84AFC0A1-7DAB-69DA-2156-0E8A29AF9596}"/>
+              </a:ext>
+            </a:extLst>
+          </p:cNvPr>
+          <p:cNvSpPr/>
+          <p:nvPr/>
+        </p:nvSpPr>
+        <p:spPr>
+          <a:xfrm>
+            <a:off x="1565264" y="4449341"/>
+            <a:ext cx="1971237" cy="508000"/>
+          </a:xfrm>
+          <a:prstGeom prst="roundRect">
+            <a:avLst/>
+          </a:prstGeom>
+          <a:solidFill>
+            <a:schemeClr val="bg2">
+              <a:lumMod val="75000"/>
+            </a:schemeClr>
+          </a:solidFill>
+          <a:ln>
+            <a:noFill/>
+          </a:ln>
+        </p:spPr>
+        <p:style>
+          <a:lnRef idx="2">
+            <a:schemeClr val="accent1">
+              <a:shade val="50000"/>
+            </a:schemeClr>
+          </a:lnRef>
+          <a:fillRef idx="1">
+            <a:schemeClr val="accent1"/>
+          </a:fillRef>
+          <a:effectRef idx="0">
+            <a:schemeClr val="accent1"/>
+          </a:effectRef>
+          <a:fontRef idx="minor">
+            <a:schemeClr val="lt1"/>
+          </a:fontRef>
+        </p:style>
+        <p:txBody>
+          <a:bodyPr rtlCol="0" anchor="ctr"/>
+          <a:lstStyle/>
+          <a:p>
+            <a:pPr algn="ctr"/>
+            <a:endParaRPr lang="ko-KR" altLang="en-US"/>
+          </a:p>
+        </p:txBody>
+      </p:sp>
+      <p:sp>
+        <p:nvSpPr>
+          <p:cNvPr id="24" name="TextBox 23">
+            <a:extLst>
+              <a:ext uri="{FF2B5EF4-FFF2-40B4-BE49-F238E27FC236}">
+                <a16:creationId xmlns:a16="http://schemas.microsoft.com/office/drawing/2014/main" id="{A9B96F29-E1B1-2A05-8DD7-A32F4DC740CF}"/>
+              </a:ext>
+            </a:extLst>
+          </p:cNvPr>
+          <p:cNvSpPr txBox="1"/>
+          <p:nvPr/>
+        </p:nvSpPr>
+        <p:spPr>
+          <a:xfrm>
+            <a:off x="1638857" y="2815789"/>
+            <a:ext cx="1244600" cy="261610"/>
+          </a:xfrm>
+          <a:prstGeom prst="rect">
+            <a:avLst/>
+          </a:prstGeom>
+          <a:noFill/>
+        </p:spPr>
+        <p:txBody>
+          <a:bodyPr wrap="square" rtlCol="0">
+            <a:spAutoFit/>
+          </a:bodyPr>
+          <a:lstStyle/>
+          <a:p>
+            <a:r>
+              <a:rPr lang="ko-KR" altLang="en-US" sz="1100" b="1"/>
+              <a:t>음식</a:t>
+            </a:r>
+          </a:p>
+        </p:txBody>
+      </p:sp>
+      <p:sp>
+        <p:nvSpPr>
+          <p:cNvPr id="25" name="TextBox 24">
+            <a:extLst>
+              <a:ext uri="{FF2B5EF4-FFF2-40B4-BE49-F238E27FC236}">
+                <a16:creationId xmlns:a16="http://schemas.microsoft.com/office/drawing/2014/main" id="{E6B16105-7F5E-5684-4FC2-3B23A1F4F107}"/>
+              </a:ext>
+            </a:extLst>
+          </p:cNvPr>
+          <p:cNvSpPr txBox="1"/>
+          <p:nvPr/>
+        </p:nvSpPr>
+        <p:spPr>
+          <a:xfrm>
+            <a:off x="1631552" y="3406798"/>
+            <a:ext cx="1244600" cy="261610"/>
+          </a:xfrm>
+          <a:prstGeom prst="rect">
+            <a:avLst/>
+          </a:prstGeom>
+          <a:noFill/>
+        </p:spPr>
+        <p:txBody>
+          <a:bodyPr wrap="square" rtlCol="0">
+            <a:spAutoFit/>
+          </a:bodyPr>
+          <a:lstStyle/>
+          <a:p>
+            <a:r>
+              <a:rPr lang="ko-KR" altLang="en-US" sz="1100" b="1"/>
+              <a:t>달팽이 알</a:t>
+            </a:r>
+          </a:p>
+        </p:txBody>
+      </p:sp>
+      <p:sp>
+        <p:nvSpPr>
+          <p:cNvPr id="26" name="TextBox 25">
+            <a:extLst>
+              <a:ext uri="{FF2B5EF4-FFF2-40B4-BE49-F238E27FC236}">
+                <a16:creationId xmlns:a16="http://schemas.microsoft.com/office/drawing/2014/main" id="{E1F6A8EB-DFC9-3D73-D789-3E570A69BFF7}"/>
+              </a:ext>
+            </a:extLst>
+          </p:cNvPr>
+          <p:cNvSpPr txBox="1"/>
+          <p:nvPr/>
+        </p:nvSpPr>
+        <p:spPr>
+          <a:xfrm>
+            <a:off x="1625871" y="3979016"/>
+            <a:ext cx="1244600" cy="261610"/>
+          </a:xfrm>
+          <a:prstGeom prst="rect">
+            <a:avLst/>
+          </a:prstGeom>
+          <a:noFill/>
+        </p:spPr>
+        <p:txBody>
+          <a:bodyPr wrap="square" rtlCol="0">
+            <a:spAutoFit/>
+          </a:bodyPr>
+          <a:lstStyle/>
+          <a:p>
+            <a:r>
+              <a:rPr lang="ko-KR" altLang="en-US" sz="1100" b="1"/>
+              <a:t>악세서리</a:t>
+            </a:r>
+          </a:p>
+        </p:txBody>
+      </p:sp>
+      <p:sp>
+        <p:nvSpPr>
+          <p:cNvPr id="27" name="TextBox 26">
+            <a:extLst>
+              <a:ext uri="{FF2B5EF4-FFF2-40B4-BE49-F238E27FC236}">
+                <a16:creationId xmlns:a16="http://schemas.microsoft.com/office/drawing/2014/main" id="{3CFCCD5E-A155-00B8-C13B-AFFBADFD2BAA}"/>
+              </a:ext>
+            </a:extLst>
+          </p:cNvPr>
+          <p:cNvSpPr txBox="1"/>
+          <p:nvPr/>
+        </p:nvSpPr>
+        <p:spPr>
+          <a:xfrm>
+            <a:off x="1618566" y="4570025"/>
+            <a:ext cx="1244600" cy="261610"/>
+          </a:xfrm>
+          <a:prstGeom prst="rect">
+            <a:avLst/>
+          </a:prstGeom>
+          <a:noFill/>
+        </p:spPr>
+        <p:txBody>
+          <a:bodyPr wrap="square" rtlCol="0">
+            <a:spAutoFit/>
+          </a:bodyPr>
+          <a:lstStyle/>
+          <a:p>
+            <a:r>
+              <a:rPr lang="ko-KR" altLang="en-US" sz="1100" b="1"/>
+              <a:t>자유시장</a:t>
+            </a:r>
+          </a:p>
+        </p:txBody>
+      </p:sp>
+      <p:sp>
+        <p:nvSpPr>
+          <p:cNvPr id="28" name="TextBox 27">
+            <a:extLst>
+              <a:ext uri="{FF2B5EF4-FFF2-40B4-BE49-F238E27FC236}">
+                <a16:creationId xmlns:a16="http://schemas.microsoft.com/office/drawing/2014/main" id="{1FC2B4F1-8AEA-0451-97DE-AD07F590C82A}"/>
+              </a:ext>
+            </a:extLst>
+          </p:cNvPr>
+          <p:cNvSpPr txBox="1"/>
+          <p:nvPr/>
+        </p:nvSpPr>
+        <p:spPr>
+          <a:xfrm>
+            <a:off x="4144998" y="2397605"/>
+            <a:ext cx="1244600" cy="261610"/>
+          </a:xfrm>
+          <a:prstGeom prst="rect">
+            <a:avLst/>
+          </a:prstGeom>
+          <a:noFill/>
+        </p:spPr>
+        <p:txBody>
+          <a:bodyPr wrap="square" rtlCol="0">
+            <a:spAutoFit/>
+          </a:bodyPr>
+          <a:lstStyle/>
+          <a:p>
+            <a:pPr algn="ctr"/>
+            <a:r>
+              <a:rPr lang="ko-KR" altLang="en-US" sz="1100" b="1"/>
+              <a:t>오늘의 할인</a:t>
+            </a:r>
+            <a:r>
+              <a:rPr lang="en-US" altLang="ko-KR" sz="1100" b="1"/>
+              <a:t>!</a:t>
+            </a:r>
+            <a:endParaRPr lang="ko-KR" altLang="en-US" sz="1100" b="1"/>
+          </a:p>
+        </p:txBody>
+      </p:sp>
+      <p:sp>
+        <p:nvSpPr>
+          <p:cNvPr id="29" name="사각형: 둥근 모서리 28">
+            <a:extLst>
+              <a:ext uri="{FF2B5EF4-FFF2-40B4-BE49-F238E27FC236}">
+                <a16:creationId xmlns:a16="http://schemas.microsoft.com/office/drawing/2014/main" id="{3E1461F4-67D8-4C83-DD97-1C673E7C0DB0}"/>
+              </a:ext>
+            </a:extLst>
+          </p:cNvPr>
+          <p:cNvSpPr/>
+          <p:nvPr/>
+        </p:nvSpPr>
+        <p:spPr>
+          <a:xfrm>
+            <a:off x="4241936" y="3042558"/>
+            <a:ext cx="987695" cy="897313"/>
+          </a:xfrm>
+          <a:prstGeom prst="roundRect">
+            <a:avLst/>
+          </a:prstGeom>
+          <a:solidFill>
+            <a:schemeClr val="bg2">
+              <a:lumMod val="75000"/>
+            </a:schemeClr>
+          </a:solidFill>
+          <a:ln>
+            <a:noFill/>
+          </a:ln>
+        </p:spPr>
+        <p:style>
+          <a:lnRef idx="2">
+            <a:schemeClr val="accent1">
+              <a:shade val="50000"/>
+            </a:schemeClr>
+          </a:lnRef>
+          <a:fillRef idx="1">
+            <a:schemeClr val="accent1"/>
+          </a:fillRef>
+          <a:effectRef idx="0">
+            <a:schemeClr val="accent1"/>
+          </a:effectRef>
+          <a:fontRef idx="minor">
+            <a:schemeClr val="lt1"/>
+          </a:fontRef>
+        </p:style>
+        <p:txBody>
+          <a:bodyPr rtlCol="0" anchor="ctr"/>
+          <a:lstStyle/>
+          <a:p>
+            <a:pPr algn="ctr"/>
+            <a:endParaRPr lang="ko-KR" altLang="en-US"/>
+          </a:p>
+        </p:txBody>
+      </p:sp>
+      <p:sp>
+        <p:nvSpPr>
+          <p:cNvPr id="30" name="TextBox 29">
+            <a:extLst>
+              <a:ext uri="{FF2B5EF4-FFF2-40B4-BE49-F238E27FC236}">
+                <a16:creationId xmlns:a16="http://schemas.microsoft.com/office/drawing/2014/main" id="{B1CDF9EB-A4E4-910F-9B6B-B7E9889339BF}"/>
+              </a:ext>
+            </a:extLst>
+          </p:cNvPr>
+          <p:cNvSpPr txBox="1"/>
+          <p:nvPr/>
+        </p:nvSpPr>
+        <p:spPr>
+          <a:xfrm>
+            <a:off x="4090297" y="3957962"/>
+            <a:ext cx="1244600" cy="261610"/>
+          </a:xfrm>
+          <a:prstGeom prst="rect">
+            <a:avLst/>
+          </a:prstGeom>
+          <a:noFill/>
+        </p:spPr>
+        <p:txBody>
+          <a:bodyPr wrap="square" rtlCol="0">
+            <a:spAutoFit/>
+          </a:bodyPr>
+          <a:lstStyle/>
+          <a:p>
+            <a:pPr algn="ctr"/>
+            <a:r>
+              <a:rPr lang="ko-KR" altLang="en-US" sz="1100" b="1"/>
+              <a:t>물건 이름</a:t>
+            </a:r>
+          </a:p>
+        </p:txBody>
+      </p:sp>
+      <p:grpSp>
+        <p:nvGrpSpPr>
+          <p:cNvPr id="31" name="그룹 30">
+            <a:extLst>
+              <a:ext uri="{FF2B5EF4-FFF2-40B4-BE49-F238E27FC236}">
+                <a16:creationId xmlns:a16="http://schemas.microsoft.com/office/drawing/2014/main" id="{C36FF836-BF2A-1D04-35ED-ED63F2532A4B}"/>
+              </a:ext>
+            </a:extLst>
+          </p:cNvPr>
+          <p:cNvGrpSpPr/>
+          <p:nvPr/>
+        </p:nvGrpSpPr>
+        <p:grpSpPr>
+          <a:xfrm>
+            <a:off x="4512406" y="2880715"/>
+            <a:ext cx="1256151" cy="230832"/>
+            <a:chOff x="3879753" y="2753249"/>
+            <a:chExt cx="1256151" cy="230832"/>
+          </a:xfrm>
+        </p:grpSpPr>
+        <p:sp>
+          <p:nvSpPr>
+            <p:cNvPr id="32" name="사각형: 둥근 모서리 31">
+              <a:extLst>
+                <a:ext uri="{FF2B5EF4-FFF2-40B4-BE49-F238E27FC236}">
+                  <a16:creationId xmlns:a16="http://schemas.microsoft.com/office/drawing/2014/main" id="{0F5B2904-7506-C1FE-9DED-F9AD2BDD8B56}"/>
+                </a:ext>
+              </a:extLst>
+            </p:cNvPr>
+            <p:cNvSpPr/>
+            <p:nvPr/>
+          </p:nvSpPr>
+          <p:spPr>
+            <a:xfrm>
+              <a:off x="3879753" y="2779858"/>
+              <a:ext cx="448264" cy="158667"/>
+            </a:xfrm>
+            <a:prstGeom prst="roundRect">
+              <a:avLst>
+                <a:gd name="adj" fmla="val 50000"/>
+              </a:avLst>
+            </a:prstGeom>
+            <a:solidFill>
+              <a:schemeClr val="bg2">
+                <a:lumMod val="50000"/>
+              </a:schemeClr>
+            </a:solidFill>
+            <a:ln>
+              <a:noFill/>
+            </a:ln>
+          </p:spPr>
+          <p:style>
+            <a:lnRef idx="2">
+              <a:schemeClr val="accent1">
+                <a:shade val="50000"/>
+              </a:schemeClr>
+            </a:lnRef>
+            <a:fillRef idx="1">
+              <a:schemeClr val="accent1"/>
+            </a:fillRef>
+            <a:effectRef idx="0">
+              <a:schemeClr val="accent1"/>
+            </a:effectRef>
+            <a:fontRef idx="minor">
+              <a:schemeClr val="lt1"/>
+            </a:fontRef>
+          </p:style>
+          <p:txBody>
+            <a:bodyPr rtlCol="0" anchor="ctr"/>
+            <a:lstStyle/>
+            <a:p>
+              <a:pPr algn="ctr"/>
+              <a:endParaRPr lang="ko-KR" altLang="en-US"/>
+            </a:p>
+          </p:txBody>
+        </p:sp>
+        <p:sp>
+          <p:nvSpPr>
+            <p:cNvPr id="33" name="TextBox 32">
+              <a:extLst>
+                <a:ext uri="{FF2B5EF4-FFF2-40B4-BE49-F238E27FC236}">
+                  <a16:creationId xmlns:a16="http://schemas.microsoft.com/office/drawing/2014/main" id="{F242CBD0-53CF-6500-33DA-58C931258FF8}"/>
+                </a:ext>
+              </a:extLst>
+            </p:cNvPr>
+            <p:cNvSpPr txBox="1"/>
+            <p:nvPr/>
+          </p:nvSpPr>
+          <p:spPr>
+            <a:xfrm>
+              <a:off x="3891304" y="2753249"/>
+              <a:ext cx="1244600" cy="230832"/>
+            </a:xfrm>
+            <a:prstGeom prst="rect">
+              <a:avLst/>
+            </a:prstGeom>
+            <a:noFill/>
+          </p:spPr>
+          <p:txBody>
+            <a:bodyPr wrap="square" rtlCol="0">
+              <a:spAutoFit/>
+            </a:bodyPr>
+            <a:lstStyle/>
+            <a:p>
+              <a:r>
+                <a:rPr lang="ko-KR" altLang="en-US" sz="900" b="1">
+                  <a:solidFill>
+                    <a:schemeClr val="bg1"/>
+                  </a:solidFill>
+                </a:rPr>
+                <a:t>에픽</a:t>
+              </a:r>
+            </a:p>
+          </p:txBody>
+        </p:sp>
+      </p:grpSp>
+      <p:sp>
+        <p:nvSpPr>
+          <p:cNvPr id="34" name="사각형: 둥근 모서리 33">
+            <a:extLst>
+              <a:ext uri="{FF2B5EF4-FFF2-40B4-BE49-F238E27FC236}">
+                <a16:creationId xmlns:a16="http://schemas.microsoft.com/office/drawing/2014/main" id="{FC14C5F0-D713-7486-0A57-9CD0974FA8A9}"/>
+              </a:ext>
+            </a:extLst>
+          </p:cNvPr>
+          <p:cNvSpPr/>
+          <p:nvPr/>
+        </p:nvSpPr>
+        <p:spPr>
+          <a:xfrm>
+            <a:off x="4313129" y="4718317"/>
+            <a:ext cx="797735" cy="276559"/>
+          </a:xfrm>
+          <a:prstGeom prst="roundRect">
+            <a:avLst/>
+          </a:prstGeom>
+          <a:solidFill>
+            <a:schemeClr val="bg2">
+              <a:lumMod val="75000"/>
+            </a:schemeClr>
+          </a:solidFill>
+          <a:ln>
+            <a:solidFill>
+              <a:schemeClr val="bg2">
+                <a:lumMod val="75000"/>
+              </a:schemeClr>
+            </a:solidFill>
+          </a:ln>
+        </p:spPr>
+        <p:style>
+          <a:lnRef idx="2">
+            <a:schemeClr val="accent1">
+              <a:shade val="50000"/>
+            </a:schemeClr>
+          </a:lnRef>
+          <a:fillRef idx="1">
+            <a:schemeClr val="accent1"/>
+          </a:fillRef>
+          <a:effectRef idx="0">
+            <a:schemeClr val="accent1"/>
+          </a:effectRef>
+          <a:fontRef idx="minor">
+            <a:schemeClr val="lt1"/>
+          </a:fontRef>
+        </p:style>
+        <p:txBody>
+          <a:bodyPr rtlCol="0" anchor="ctr"/>
+          <a:lstStyle/>
+          <a:p>
+            <a:pPr algn="ctr"/>
+            <a:endParaRPr lang="ko-KR" altLang="en-US"/>
+          </a:p>
+        </p:txBody>
+      </p:sp>
+      <p:sp>
+        <p:nvSpPr>
+          <p:cNvPr id="35" name="TextBox 34">
+            <a:extLst>
+              <a:ext uri="{FF2B5EF4-FFF2-40B4-BE49-F238E27FC236}">
+                <a16:creationId xmlns:a16="http://schemas.microsoft.com/office/drawing/2014/main" id="{611533BD-A43F-5A72-3146-879077DBB429}"/>
+              </a:ext>
+            </a:extLst>
+          </p:cNvPr>
+          <p:cNvSpPr txBox="1"/>
+          <p:nvPr/>
+        </p:nvSpPr>
+        <p:spPr>
+          <a:xfrm>
+            <a:off x="4410696" y="4747072"/>
+            <a:ext cx="782655" cy="230832"/>
+          </a:xfrm>
+          <a:prstGeom prst="rect">
+            <a:avLst/>
+          </a:prstGeom>
+          <a:noFill/>
+        </p:spPr>
+        <p:txBody>
+          <a:bodyPr wrap="square" rtlCol="0">
+            <a:spAutoFit/>
+          </a:bodyPr>
+          <a:lstStyle/>
+          <a:p>
+            <a:r>
+              <a:rPr lang="ko-KR" altLang="en-US" sz="900" b="1"/>
+              <a:t>구매하기</a:t>
+            </a:r>
+          </a:p>
+        </p:txBody>
+      </p:sp>
+      <p:pic>
+        <p:nvPicPr>
+          <p:cNvPr id="36" name="그림 35">
+            <a:extLst>
+              <a:ext uri="{FF2B5EF4-FFF2-40B4-BE49-F238E27FC236}">
+                <a16:creationId xmlns:a16="http://schemas.microsoft.com/office/drawing/2014/main" id="{CA4F09BB-606A-C1BE-22C7-5E17870A3732}"/>
+              </a:ext>
+            </a:extLst>
+          </p:cNvPr>
+          <p:cNvPicPr>
+            <a:picLocks noChangeAspect="1"/>
+          </p:cNvPicPr>
+          <p:nvPr/>
+        </p:nvPicPr>
+        <p:blipFill>
+          <a:blip r:embed="rId7">
+            <a:extLst>
+              <a:ext uri="{28A0092B-C50C-407E-A947-70E740481C1C}">
+                <a14:useLocalDpi xmlns:a14="http://schemas.microsoft.com/office/drawing/2010/main" val="0"/>
+              </a:ext>
+            </a:extLst>
+          </a:blip>
+          <a:stretch>
+            <a:fillRect/>
+          </a:stretch>
+        </p:blipFill>
+        <p:spPr>
+          <a:xfrm>
+            <a:off x="4092512" y="4210381"/>
+            <a:ext cx="442051" cy="442051"/>
+          </a:xfrm>
+          <a:prstGeom prst="rect">
+            <a:avLst/>
+          </a:prstGeom>
+        </p:spPr>
+      </p:pic>
+      <p:sp>
+        <p:nvSpPr>
+          <p:cNvPr id="37" name="TextBox 36">
+            <a:extLst>
+              <a:ext uri="{FF2B5EF4-FFF2-40B4-BE49-F238E27FC236}">
+                <a16:creationId xmlns:a16="http://schemas.microsoft.com/office/drawing/2014/main" id="{5AD1ED7C-7E5A-47C5-D71A-699BF2FCE8E9}"/>
+              </a:ext>
+            </a:extLst>
+          </p:cNvPr>
+          <p:cNvSpPr txBox="1"/>
+          <p:nvPr/>
+        </p:nvSpPr>
+        <p:spPr>
+          <a:xfrm>
+            <a:off x="4294482" y="4293060"/>
+            <a:ext cx="1002671" cy="253916"/>
+          </a:xfrm>
+          <a:prstGeom prst="rect">
+            <a:avLst/>
+          </a:prstGeom>
+          <a:noFill/>
+        </p:spPr>
+        <p:txBody>
+          <a:bodyPr wrap="square" rtlCol="0">
+            <a:spAutoFit/>
+          </a:bodyPr>
+          <a:lstStyle/>
+          <a:p>
+            <a:pPr algn="ctr"/>
+            <a:r>
+              <a:rPr lang="en-US" altLang="ko-KR" sz="1050" b="1"/>
+              <a:t>5,000  </a:t>
+            </a:r>
+            <a:r>
+              <a:rPr lang="en-US" altLang="ko-KR" sz="1050" b="1">
+                <a:solidFill>
+                  <a:srgbClr val="FF0000"/>
+                </a:solidFill>
+              </a:rPr>
+              <a:t>3,500</a:t>
+            </a:r>
+            <a:endParaRPr lang="ko-KR" altLang="en-US" sz="1050" b="1">
+              <a:solidFill>
+                <a:srgbClr val="FF0000"/>
+              </a:solidFill>
+            </a:endParaRPr>
+          </a:p>
+        </p:txBody>
+      </p:sp>
+      <p:cxnSp>
+        <p:nvCxnSpPr>
+          <p:cNvPr id="38" name="직선 연결선 37">
+            <a:extLst>
+              <a:ext uri="{FF2B5EF4-FFF2-40B4-BE49-F238E27FC236}">
+                <a16:creationId xmlns:a16="http://schemas.microsoft.com/office/drawing/2014/main" id="{602E4512-2DCF-2016-F7AC-C93FF371E08D}"/>
+              </a:ext>
+            </a:extLst>
+          </p:cNvPr>
+          <p:cNvCxnSpPr/>
+          <p:nvPr/>
+        </p:nvCxnSpPr>
+        <p:spPr>
+          <a:xfrm>
+            <a:off x="4449605" y="4416807"/>
+            <a:ext cx="333512" cy="0"/>
+          </a:xfrm>
+          <a:prstGeom prst="line">
+            <a:avLst/>
+          </a:prstGeom>
+          <a:ln w="19050">
+            <a:solidFill>
+              <a:schemeClr val="tx1"/>
+            </a:solidFill>
+          </a:ln>
+        </p:spPr>
+        <p:style>
+          <a:lnRef idx="1">
+            <a:schemeClr val="accent1"/>
+          </a:lnRef>
+          <a:fillRef idx="0">
+            <a:schemeClr val="accent1"/>
+          </a:fillRef>
+          <a:effectRef idx="0">
+            <a:schemeClr val="accent1"/>
+          </a:effectRef>
+          <a:fontRef idx="minor">
+            <a:schemeClr val="tx1"/>
+          </a:fontRef>
+        </p:style>
+      </p:cxnSp>
+      <p:sp>
+        <p:nvSpPr>
+          <p:cNvPr id="39" name="사각형: 둥근 모서리 38">
+            <a:extLst>
+              <a:ext uri="{FF2B5EF4-FFF2-40B4-BE49-F238E27FC236}">
+                <a16:creationId xmlns:a16="http://schemas.microsoft.com/office/drawing/2014/main" id="{86F664F9-87B3-4482-1E68-997376EB5EB0}"/>
+              </a:ext>
+            </a:extLst>
+          </p:cNvPr>
+          <p:cNvSpPr/>
+          <p:nvPr/>
+        </p:nvSpPr>
+        <p:spPr>
+          <a:xfrm>
+            <a:off x="2454882" y="2034047"/>
+            <a:ext cx="358775" cy="311150"/>
+          </a:xfrm>
+          <a:prstGeom prst="roundRect">
+            <a:avLst>
+              <a:gd name="adj" fmla="val 2239"/>
+            </a:avLst>
+          </a:prstGeom>
+          <a:solidFill>
+            <a:schemeClr val="accent2">
+              <a:lumMod val="60000"/>
+              <a:lumOff val="40000"/>
+            </a:schemeClr>
+          </a:solidFill>
+        </p:spPr>
+        <p:style>
+          <a:lnRef idx="2">
+            <a:schemeClr val="accent1">
+              <a:shade val="50000"/>
+            </a:schemeClr>
+          </a:lnRef>
+          <a:fillRef idx="1">
+            <a:schemeClr val="accent1"/>
+          </a:fillRef>
+          <a:effectRef idx="0">
+            <a:schemeClr val="accent1"/>
+          </a:effectRef>
+          <a:fontRef idx="minor">
+            <a:schemeClr val="lt1"/>
+          </a:fontRef>
+        </p:style>
+        <p:txBody>
+          <a:bodyPr rtlCol="0" anchor="ctr"/>
+          <a:lstStyle/>
+          <a:p>
+            <a:pPr algn="ctr"/>
+            <a:endParaRPr lang="ko-KR" altLang="en-US"/>
+          </a:p>
+        </p:txBody>
+      </p:sp>
+      <p:sp>
+        <p:nvSpPr>
+          <p:cNvPr id="40" name="사각형: 둥근 모서리 39">
+            <a:extLst>
+              <a:ext uri="{FF2B5EF4-FFF2-40B4-BE49-F238E27FC236}">
+                <a16:creationId xmlns:a16="http://schemas.microsoft.com/office/drawing/2014/main" id="{1C18FFFA-3EC0-001E-D734-0698F8825A4B}"/>
+              </a:ext>
+            </a:extLst>
+          </p:cNvPr>
+          <p:cNvSpPr/>
+          <p:nvPr/>
+        </p:nvSpPr>
+        <p:spPr>
+          <a:xfrm>
+            <a:off x="2905584" y="2033487"/>
+            <a:ext cx="358775" cy="311150"/>
+          </a:xfrm>
+          <a:prstGeom prst="roundRect">
+            <a:avLst>
+              <a:gd name="adj" fmla="val 2239"/>
+            </a:avLst>
+          </a:prstGeom>
+          <a:solidFill>
+            <a:schemeClr val="accent4">
+              <a:lumMod val="40000"/>
+              <a:lumOff val="60000"/>
+            </a:schemeClr>
+          </a:solidFill>
+        </p:spPr>
+        <p:style>
+          <a:lnRef idx="2">
+            <a:schemeClr val="accent1">
+              <a:shade val="50000"/>
+            </a:schemeClr>
+          </a:lnRef>
+          <a:fillRef idx="1">
+            <a:schemeClr val="accent1"/>
+          </a:fillRef>
+          <a:effectRef idx="0">
+            <a:schemeClr val="accent1"/>
+          </a:effectRef>
+          <a:fontRef idx="minor">
+            <a:schemeClr val="lt1"/>
+          </a:fontRef>
+        </p:style>
+        <p:txBody>
+          <a:bodyPr rtlCol="0" anchor="ctr"/>
+          <a:lstStyle/>
+          <a:p>
+            <a:pPr algn="ctr"/>
+            <a:endParaRPr lang="ko-KR" altLang="en-US"/>
+          </a:p>
+        </p:txBody>
+      </p:sp>
+      <p:pic>
+        <p:nvPicPr>
+          <p:cNvPr id="41" name="Picture 4" descr="상점 아이콘 구매 기호입니다 장바구니 아이콘재고에 대 한 가방에 대한 스톡 벡터 아트 및 기타 이미지 - 가방, 고객, 구매 -  iStock">
+            <a:extLst>
+              <a:ext uri="{FF2B5EF4-FFF2-40B4-BE49-F238E27FC236}">
+                <a16:creationId xmlns:a16="http://schemas.microsoft.com/office/drawing/2014/main" id="{C2B9911D-0C75-C8A9-1E86-476C6AB4A26C}"/>
+              </a:ext>
+            </a:extLst>
+          </p:cNvPr>
+          <p:cNvPicPr>
+            <a:picLocks noChangeAspect="1" noChangeArrowheads="1"/>
+          </p:cNvPicPr>
+          <p:nvPr/>
+        </p:nvPicPr>
+        <p:blipFill>
+          <a:blip r:embed="rId5">
+            <a:extLst>
+              <a:ext uri="{BEBA8EAE-BF5A-486C-A8C5-ECC9F3942E4B}">
+                <a14:imgProps xmlns:a14="http://schemas.microsoft.com/office/drawing/2010/main">
+                  <a14:imgLayer r:embed="rId6">
+                    <a14:imgEffect>
+                      <a14:backgroundRemoval t="10000" b="90000" l="10000" r="90000">
+                        <a14:foregroundMark x1="46154" y1="42067" x2="53846" y2="41106"/>
+                        <a14:foregroundMark x1="63462" y1="32452" x2="63462" y2="32452"/>
+                        <a14:foregroundMark x1="41587" y1="29087" x2="40144" y2="29567"/>
+                      </a14:backgroundRemoval>
+                    </a14:imgEffect>
+                  </a14:imgLayer>
+                </a14:imgProps>
+              </a:ext>
+              <a:ext uri="{28A0092B-C50C-407E-A947-70E740481C1C}">
+                <a14:useLocalDpi xmlns:a14="http://schemas.microsoft.com/office/drawing/2010/main" val="0"/>
+              </a:ext>
+            </a:extLst>
+          </a:blip>
+          <a:srcRect/>
+          <a:stretch>
+            <a:fillRect/>
+          </a:stretch>
+        </p:blipFill>
+        <p:spPr bwMode="auto">
+          <a:xfrm>
+            <a:off x="2894639" y="1999690"/>
+            <a:ext cx="385763" cy="385763"/>
+          </a:xfrm>
+          <a:prstGeom prst="rect">
+            <a:avLst/>
+          </a:prstGeom>
+          <a:noFill/>
+          <a:extLst>
+            <a:ext uri="{909E8E84-426E-40DD-AFC4-6F175D3DCCD1}">
+              <a14:hiddenFill xmlns:a14="http://schemas.microsoft.com/office/drawing/2010/main">
+                <a:solidFill>
+                  <a:srgbClr val="FFFFFF"/>
+                </a:solidFill>
+              </a14:hiddenFill>
+            </a:ext>
+          </a:extLst>
+        </p:spPr>
+      </p:pic>
+      <p:pic>
+        <p:nvPicPr>
+          <p:cNvPr id="42" name="Picture 8" descr="Eggs - Free food icons">
+            <a:extLst>
+              <a:ext uri="{FF2B5EF4-FFF2-40B4-BE49-F238E27FC236}">
+                <a16:creationId xmlns:a16="http://schemas.microsoft.com/office/drawing/2014/main" id="{E3E6E92B-BEBF-8C95-C365-C096129B17A2}"/>
+              </a:ext>
+            </a:extLst>
+          </p:cNvPr>
+          <p:cNvPicPr>
+            <a:picLocks noChangeAspect="1" noChangeArrowheads="1"/>
+          </p:cNvPicPr>
+          <p:nvPr/>
+        </p:nvPicPr>
+        <p:blipFill>
+          <a:blip r:embed="rId8">
+            <a:extLst>
+              <a:ext uri="{28A0092B-C50C-407E-A947-70E740481C1C}">
+                <a14:useLocalDpi xmlns:a14="http://schemas.microsoft.com/office/drawing/2010/main" val="0"/>
+              </a:ext>
+            </a:extLst>
+          </a:blip>
+          <a:srcRect/>
+          <a:stretch>
+            <a:fillRect/>
+          </a:stretch>
+        </p:blipFill>
+        <p:spPr bwMode="auto">
+          <a:xfrm>
+            <a:off x="2513327" y="2064855"/>
+            <a:ext cx="241884" cy="241884"/>
+          </a:xfrm>
+          <a:prstGeom prst="rect">
+            <a:avLst/>
+          </a:prstGeom>
+          <a:noFill/>
+          <a:extLst>
+            <a:ext uri="{909E8E84-426E-40DD-AFC4-6F175D3DCCD1}">
+              <a14:hiddenFill xmlns:a14="http://schemas.microsoft.com/office/drawing/2010/main">
+                <a:solidFill>
+                  <a:srgbClr val="FFFFFF"/>
+                </a:solidFill>
+              </a14:hiddenFill>
+            </a:ext>
+          </a:extLst>
+        </p:spPr>
+      </p:pic>
+      <p:sp>
+        <p:nvSpPr>
+          <p:cNvPr id="43" name="사각형: 둥근 모서리 42">
+            <a:extLst>
+              <a:ext uri="{FF2B5EF4-FFF2-40B4-BE49-F238E27FC236}">
+                <a16:creationId xmlns:a16="http://schemas.microsoft.com/office/drawing/2014/main" id="{9D81E8BE-C861-D4F2-2919-3BE5E57C972F}"/>
+              </a:ext>
+            </a:extLst>
+          </p:cNvPr>
+          <p:cNvSpPr/>
+          <p:nvPr/>
+        </p:nvSpPr>
+        <p:spPr>
+          <a:xfrm>
+            <a:off x="3743566" y="2028494"/>
+            <a:ext cx="358775" cy="311150"/>
+          </a:xfrm>
+          <a:prstGeom prst="roundRect">
+            <a:avLst>
+              <a:gd name="adj" fmla="val 2239"/>
+            </a:avLst>
+          </a:prstGeom>
+          <a:solidFill>
+            <a:schemeClr val="accent2">
+              <a:lumMod val="60000"/>
+              <a:lumOff val="40000"/>
+            </a:schemeClr>
+          </a:solidFill>
+        </p:spPr>
+        <p:style>
+          <a:lnRef idx="2">
+            <a:schemeClr val="accent1">
+              <a:shade val="50000"/>
+            </a:schemeClr>
+          </a:lnRef>
+          <a:fillRef idx="1">
+            <a:schemeClr val="accent1"/>
+          </a:fillRef>
+          <a:effectRef idx="0">
+            <a:schemeClr val="accent1"/>
+          </a:effectRef>
+          <a:fontRef idx="minor">
+            <a:schemeClr val="lt1"/>
+          </a:fontRef>
+        </p:style>
+        <p:txBody>
+          <a:bodyPr rtlCol="0" anchor="ctr"/>
+          <a:lstStyle/>
+          <a:p>
+            <a:pPr algn="ctr"/>
+            <a:endParaRPr lang="ko-KR" altLang="en-US"/>
+          </a:p>
+        </p:txBody>
+      </p:sp>
+      <p:pic>
+        <p:nvPicPr>
+          <p:cNvPr id="44" name="Picture 2" descr="설정 - 무료 ui개 아이콘">
+            <a:extLst>
+              <a:ext uri="{FF2B5EF4-FFF2-40B4-BE49-F238E27FC236}">
+                <a16:creationId xmlns:a16="http://schemas.microsoft.com/office/drawing/2014/main" id="{6C80D1AB-077B-624D-7ED6-ECCE1C30E35B}"/>
+              </a:ext>
+            </a:extLst>
+          </p:cNvPr>
+          <p:cNvPicPr>
+            <a:picLocks noChangeAspect="1" noChangeArrowheads="1"/>
+          </p:cNvPicPr>
+          <p:nvPr/>
+        </p:nvPicPr>
+        <p:blipFill>
+          <a:blip r:embed="rId9">
+            <a:extLst>
+              <a:ext uri="{28A0092B-C50C-407E-A947-70E740481C1C}">
+                <a14:useLocalDpi xmlns:a14="http://schemas.microsoft.com/office/drawing/2010/main" val="0"/>
+              </a:ext>
+            </a:extLst>
+          </a:blip>
+          <a:srcRect/>
+          <a:stretch>
+            <a:fillRect/>
+          </a:stretch>
+        </p:blipFill>
+        <p:spPr bwMode="auto">
+          <a:xfrm>
+            <a:off x="3795731" y="2050509"/>
+            <a:ext cx="265099" cy="265099"/>
+          </a:xfrm>
+          <a:prstGeom prst="rect">
+            <a:avLst/>
+          </a:prstGeom>
+          <a:noFill/>
+          <a:extLst>
+            <a:ext uri="{909E8E84-426E-40DD-AFC4-6F175D3DCCD1}">
+              <a14:hiddenFill xmlns:a14="http://schemas.microsoft.com/office/drawing/2010/main">
+                <a:solidFill>
+                  <a:srgbClr val="FFFFFF"/>
+                </a:solidFill>
+              </a14:hiddenFill>
+            </a:ext>
+          </a:extLst>
+        </p:spPr>
+      </p:pic>
+      <p:sp>
+        <p:nvSpPr>
+          <p:cNvPr id="45" name="TextBox 44">
+            <a:extLst>
+              <a:ext uri="{FF2B5EF4-FFF2-40B4-BE49-F238E27FC236}">
+                <a16:creationId xmlns:a16="http://schemas.microsoft.com/office/drawing/2014/main" id="{676A91EC-3712-7FAC-3FA6-4CC92AC3B14A}"/>
+              </a:ext>
+            </a:extLst>
+          </p:cNvPr>
+          <p:cNvSpPr txBox="1"/>
+          <p:nvPr/>
+        </p:nvSpPr>
+        <p:spPr>
+          <a:xfrm>
+            <a:off x="280509" y="153899"/>
+            <a:ext cx="1670921" cy="276999"/>
+          </a:xfrm>
+          <a:prstGeom prst="rect">
+            <a:avLst/>
+          </a:prstGeom>
+          <a:solidFill>
+            <a:schemeClr val="tx1"/>
+          </a:solidFill>
+        </p:spPr>
+        <p:txBody>
+          <a:bodyPr wrap="square" rtlCol="0">
+            <a:spAutoFit/>
+          </a:bodyPr>
+          <a:lstStyle/>
+          <a:p>
+            <a:pPr algn="ctr"/>
+            <a:r>
+              <a:rPr lang="ko-KR" altLang="en-US" sz="1200" dirty="0">
+                <a:solidFill>
+                  <a:schemeClr val="bg1"/>
+                </a:solidFill>
+              </a:rPr>
+              <a:t>상점 카테고리</a:t>
+            </a:r>
+            <a:endParaRPr lang="en-US" altLang="ko-KR" sz="1200" dirty="0">
+              <a:solidFill>
+                <a:schemeClr val="bg1"/>
+              </a:solidFill>
+            </a:endParaRPr>
+          </a:p>
+        </p:txBody>
+      </p:sp>
+      <p:sp>
+        <p:nvSpPr>
+          <p:cNvPr id="46" name="사각형: 둥근 모서리 45">
+            <a:extLst>
+              <a:ext uri="{FF2B5EF4-FFF2-40B4-BE49-F238E27FC236}">
+                <a16:creationId xmlns:a16="http://schemas.microsoft.com/office/drawing/2014/main" id="{DCB834CF-FF18-6A5D-188B-8E6708B80E28}"/>
+              </a:ext>
+            </a:extLst>
+          </p:cNvPr>
+          <p:cNvSpPr/>
+          <p:nvPr/>
+        </p:nvSpPr>
+        <p:spPr>
+          <a:xfrm>
+            <a:off x="6491007" y="2341762"/>
+            <a:ext cx="2200521" cy="2794000"/>
+          </a:xfrm>
+          <a:prstGeom prst="roundRect">
+            <a:avLst>
+              <a:gd name="adj" fmla="val 2239"/>
+            </a:avLst>
+          </a:prstGeom>
+          <a:solidFill>
+            <a:schemeClr val="bg2">
+              <a:lumMod val="90000"/>
+            </a:schemeClr>
+          </a:solidFill>
+        </p:spPr>
+        <p:style>
+          <a:lnRef idx="2">
+            <a:schemeClr val="accent1">
+              <a:shade val="50000"/>
+            </a:schemeClr>
+          </a:lnRef>
+          <a:fillRef idx="1">
+            <a:schemeClr val="accent1"/>
+          </a:fillRef>
+          <a:effectRef idx="0">
+            <a:schemeClr val="accent1"/>
+          </a:effectRef>
+          <a:fontRef idx="minor">
+            <a:schemeClr val="lt1"/>
+          </a:fontRef>
+        </p:style>
+        <p:txBody>
+          <a:bodyPr rtlCol="0" anchor="ctr"/>
+          <a:lstStyle/>
+          <a:p>
+            <a:pPr algn="ctr"/>
+            <a:endParaRPr lang="ko-KR" altLang="en-US"/>
+          </a:p>
+        </p:txBody>
+      </p:sp>
+      <p:sp>
+        <p:nvSpPr>
+          <p:cNvPr id="47" name="사각형: 둥근 모서리 46">
+            <a:extLst>
+              <a:ext uri="{FF2B5EF4-FFF2-40B4-BE49-F238E27FC236}">
+                <a16:creationId xmlns:a16="http://schemas.microsoft.com/office/drawing/2014/main" id="{E7E6CEED-EE50-46EE-D581-22B5BA75299A}"/>
+              </a:ext>
+            </a:extLst>
+          </p:cNvPr>
+          <p:cNvSpPr/>
+          <p:nvPr/>
+        </p:nvSpPr>
+        <p:spPr>
+          <a:xfrm>
+            <a:off x="7065282" y="2030612"/>
+            <a:ext cx="358775" cy="311150"/>
+          </a:xfrm>
+          <a:prstGeom prst="roundRect">
+            <a:avLst>
+              <a:gd name="adj" fmla="val 2239"/>
+            </a:avLst>
+          </a:prstGeom>
+          <a:solidFill>
+            <a:schemeClr val="accent2">
+              <a:lumMod val="60000"/>
+              <a:lumOff val="40000"/>
+            </a:schemeClr>
+          </a:solidFill>
+        </p:spPr>
+        <p:style>
+          <a:lnRef idx="2">
+            <a:schemeClr val="accent1">
+              <a:shade val="50000"/>
+            </a:schemeClr>
+          </a:lnRef>
+          <a:fillRef idx="1">
+            <a:schemeClr val="accent1"/>
+          </a:fillRef>
+          <a:effectRef idx="0">
+            <a:schemeClr val="accent1"/>
+          </a:effectRef>
+          <a:fontRef idx="minor">
+            <a:schemeClr val="lt1"/>
+          </a:fontRef>
+        </p:style>
+        <p:txBody>
+          <a:bodyPr rtlCol="0" anchor="ctr"/>
+          <a:lstStyle/>
+          <a:p>
+            <a:pPr algn="ctr"/>
+            <a:endParaRPr lang="ko-KR" altLang="en-US"/>
+          </a:p>
+        </p:txBody>
+      </p:sp>
+      <p:sp>
+        <p:nvSpPr>
+          <p:cNvPr id="48" name="사각형: 둥근 모서리 47">
+            <a:extLst>
+              <a:ext uri="{FF2B5EF4-FFF2-40B4-BE49-F238E27FC236}">
+                <a16:creationId xmlns:a16="http://schemas.microsoft.com/office/drawing/2014/main" id="{6D55476F-BB35-1095-5F3E-57AAD3CC8617}"/>
+              </a:ext>
+            </a:extLst>
+          </p:cNvPr>
+          <p:cNvSpPr/>
+          <p:nvPr/>
+        </p:nvSpPr>
+        <p:spPr>
+          <a:xfrm>
+            <a:off x="6636700" y="2027177"/>
+            <a:ext cx="358775" cy="311150"/>
+          </a:xfrm>
+          <a:prstGeom prst="roundRect">
+            <a:avLst>
+              <a:gd name="adj" fmla="val 2239"/>
+            </a:avLst>
+          </a:prstGeom>
+          <a:solidFill>
+            <a:schemeClr val="accent2">
+              <a:lumMod val="60000"/>
+              <a:lumOff val="40000"/>
+            </a:schemeClr>
+          </a:solidFill>
+        </p:spPr>
+        <p:style>
+          <a:lnRef idx="2">
+            <a:schemeClr val="accent1">
+              <a:shade val="50000"/>
+            </a:schemeClr>
+          </a:lnRef>
+          <a:fillRef idx="1">
+            <a:schemeClr val="accent1"/>
+          </a:fillRef>
+          <a:effectRef idx="0">
+            <a:schemeClr val="accent1"/>
+          </a:effectRef>
+          <a:fontRef idx="minor">
+            <a:schemeClr val="lt1"/>
+          </a:fontRef>
+        </p:style>
+        <p:txBody>
+          <a:bodyPr rtlCol="0" anchor="ctr"/>
+          <a:lstStyle/>
+          <a:p>
+            <a:pPr algn="ctr"/>
+            <a:endParaRPr lang="ko-KR" altLang="en-US"/>
+          </a:p>
+        </p:txBody>
+      </p:sp>
+      <p:sp>
+        <p:nvSpPr>
+          <p:cNvPr id="49" name="사각형: 둥근 모서리 48">
+            <a:extLst>
+              <a:ext uri="{FF2B5EF4-FFF2-40B4-BE49-F238E27FC236}">
+                <a16:creationId xmlns:a16="http://schemas.microsoft.com/office/drawing/2014/main" id="{11FBC368-8280-F290-423B-959AE9F9344F}"/>
+              </a:ext>
+            </a:extLst>
+          </p:cNvPr>
+          <p:cNvSpPr/>
+          <p:nvPr/>
+        </p:nvSpPr>
+        <p:spPr>
+          <a:xfrm>
+            <a:off x="7510886" y="2030612"/>
+            <a:ext cx="358775" cy="311150"/>
+          </a:xfrm>
+          <a:prstGeom prst="roundRect">
+            <a:avLst>
+              <a:gd name="adj" fmla="val 2239"/>
+            </a:avLst>
+          </a:prstGeom>
+          <a:solidFill>
+            <a:schemeClr val="accent4">
+              <a:lumMod val="40000"/>
+              <a:lumOff val="60000"/>
+            </a:schemeClr>
+          </a:solidFill>
+        </p:spPr>
+        <p:style>
+          <a:lnRef idx="2">
+            <a:schemeClr val="accent1">
+              <a:shade val="50000"/>
+            </a:schemeClr>
+          </a:lnRef>
+          <a:fillRef idx="1">
+            <a:schemeClr val="accent1"/>
+          </a:fillRef>
+          <a:effectRef idx="0">
+            <a:schemeClr val="accent1"/>
+          </a:effectRef>
+          <a:fontRef idx="minor">
+            <a:schemeClr val="lt1"/>
+          </a:fontRef>
+        </p:style>
+        <p:txBody>
+          <a:bodyPr rtlCol="0" anchor="ctr"/>
+          <a:lstStyle/>
+          <a:p>
+            <a:pPr algn="ctr"/>
+            <a:endParaRPr lang="ko-KR" altLang="en-US"/>
+          </a:p>
+        </p:txBody>
+      </p:sp>
+      <p:pic>
+        <p:nvPicPr>
+          <p:cNvPr id="50" name="Picture 2" descr="잎 - 무료 자연개 아이콘">
+            <a:extLst>
+              <a:ext uri="{FF2B5EF4-FFF2-40B4-BE49-F238E27FC236}">
+                <a16:creationId xmlns:a16="http://schemas.microsoft.com/office/drawing/2014/main" id="{6807B38C-EF8E-1C7B-E474-ABE823B21A4B}"/>
+              </a:ext>
+            </a:extLst>
+          </p:cNvPr>
+          <p:cNvPicPr>
+            <a:picLocks noChangeAspect="1" noChangeArrowheads="1"/>
+          </p:cNvPicPr>
+          <p:nvPr/>
+        </p:nvPicPr>
+        <p:blipFill>
+          <a:blip r:embed="rId2">
+            <a:extLst>
+              <a:ext uri="{28A0092B-C50C-407E-A947-70E740481C1C}">
+                <a14:useLocalDpi xmlns:a14="http://schemas.microsoft.com/office/drawing/2010/main" val="0"/>
+              </a:ext>
+            </a:extLst>
+          </a:blip>
+          <a:srcRect/>
+          <a:stretch>
+            <a:fillRect/>
+          </a:stretch>
+        </p:blipFill>
+        <p:spPr bwMode="auto">
+          <a:xfrm>
+            <a:off x="7119052" y="2059484"/>
+            <a:ext cx="251234" cy="251234"/>
+          </a:xfrm>
+          <a:prstGeom prst="rect">
+            <a:avLst/>
+          </a:prstGeom>
+          <a:noFill/>
+          <a:extLst>
+            <a:ext uri="{909E8E84-426E-40DD-AFC4-6F175D3DCCD1}">
+              <a14:hiddenFill xmlns:a14="http://schemas.microsoft.com/office/drawing/2010/main">
+                <a:solidFill>
+                  <a:srgbClr val="FFFFFF"/>
+                </a:solidFill>
+              </a14:hiddenFill>
+            </a:ext>
+          </a:extLst>
+        </p:spPr>
+      </p:pic>
+      <p:pic>
+        <p:nvPicPr>
+          <p:cNvPr id="51" name="Picture 2" descr="Material 디자인 스타일의 달팽이 아이콘">
+            <a:extLst>
+              <a:ext uri="{FF2B5EF4-FFF2-40B4-BE49-F238E27FC236}">
+                <a16:creationId xmlns:a16="http://schemas.microsoft.com/office/drawing/2014/main" id="{1EACE802-7656-D6DA-C041-3F69BF078F2B}"/>
+              </a:ext>
+            </a:extLst>
+          </p:cNvPr>
+          <p:cNvPicPr>
+            <a:picLocks noChangeAspect="1" noChangeArrowheads="1"/>
+          </p:cNvPicPr>
+          <p:nvPr/>
+        </p:nvPicPr>
+        <p:blipFill>
+          <a:blip r:embed="rId3">
+            <a:extLst>
+              <a:ext uri="{BEBA8EAE-BF5A-486C-A8C5-ECC9F3942E4B}">
+                <a14:imgProps xmlns:a14="http://schemas.microsoft.com/office/drawing/2010/main">
+                  <a14:imgLayer r:embed="rId4">
+                    <a14:imgEffect>
+                      <a14:backgroundRemoval t="10000" b="90000" l="8750" r="91250">
+                        <a14:foregroundMark x1="90833" y1="41250" x2="90833" y2="41250"/>
+                        <a14:foregroundMark x1="91250" y1="16167" x2="91250" y2="16167"/>
+                        <a14:foregroundMark x1="8750" y1="46000" x2="8750" y2="46000"/>
+                      </a14:backgroundRemoval>
+                    </a14:imgEffect>
+                  </a14:imgLayer>
+                </a14:imgProps>
+              </a:ext>
+              <a:ext uri="{28A0092B-C50C-407E-A947-70E740481C1C}">
+                <a14:useLocalDpi xmlns:a14="http://schemas.microsoft.com/office/drawing/2010/main" val="0"/>
+              </a:ext>
+            </a:extLst>
+          </a:blip>
+          <a:srcRect/>
+          <a:stretch>
+            <a:fillRect/>
+          </a:stretch>
+        </p:blipFill>
+        <p:spPr bwMode="auto">
+          <a:xfrm>
+            <a:off x="6667509" y="2034047"/>
+            <a:ext cx="297156" cy="297156"/>
+          </a:xfrm>
+          <a:prstGeom prst="rect">
+            <a:avLst/>
+          </a:prstGeom>
+          <a:noFill/>
+          <a:extLst>
+            <a:ext uri="{909E8E84-426E-40DD-AFC4-6F175D3DCCD1}">
+              <a14:hiddenFill xmlns:a14="http://schemas.microsoft.com/office/drawing/2010/main">
+                <a:solidFill>
+                  <a:srgbClr val="FFFFFF"/>
+                </a:solidFill>
+              </a14:hiddenFill>
+            </a:ext>
+          </a:extLst>
+        </p:spPr>
+      </p:pic>
+      <p:pic>
+        <p:nvPicPr>
+          <p:cNvPr id="52" name="Picture 4" descr="상점 아이콘 구매 기호입니다 장바구니 아이콘재고에 대 한 가방에 대한 스톡 벡터 아트 및 기타 이미지 - 가방, 고객, 구매 -  iStock">
+            <a:extLst>
+              <a:ext uri="{FF2B5EF4-FFF2-40B4-BE49-F238E27FC236}">
+                <a16:creationId xmlns:a16="http://schemas.microsoft.com/office/drawing/2014/main" id="{0D3EF455-70F0-2CD5-B0A2-4F06216EC229}"/>
+              </a:ext>
+            </a:extLst>
+          </p:cNvPr>
+          <p:cNvPicPr>
+            <a:picLocks noChangeAspect="1" noChangeArrowheads="1"/>
+          </p:cNvPicPr>
+          <p:nvPr/>
+        </p:nvPicPr>
+        <p:blipFill>
+          <a:blip r:embed="rId5">
+            <a:extLst>
+              <a:ext uri="{BEBA8EAE-BF5A-486C-A8C5-ECC9F3942E4B}">
+                <a14:imgProps xmlns:a14="http://schemas.microsoft.com/office/drawing/2010/main">
+                  <a14:imgLayer r:embed="rId6">
+                    <a14:imgEffect>
+                      <a14:backgroundRemoval t="10000" b="90000" l="10000" r="90000">
+                        <a14:foregroundMark x1="46154" y1="42067" x2="53846" y2="41106"/>
+                        <a14:foregroundMark x1="63462" y1="32452" x2="63462" y2="32452"/>
+                        <a14:foregroundMark x1="41587" y1="29087" x2="40144" y2="29567"/>
+                      </a14:backgroundRemoval>
+                    </a14:imgEffect>
+                  </a14:imgLayer>
+                </a14:imgProps>
+              </a:ext>
+              <a:ext uri="{28A0092B-C50C-407E-A947-70E740481C1C}">
+                <a14:useLocalDpi xmlns:a14="http://schemas.microsoft.com/office/drawing/2010/main" val="0"/>
+              </a:ext>
+            </a:extLst>
+          </a:blip>
+          <a:srcRect/>
+          <a:stretch>
+            <a:fillRect/>
+          </a:stretch>
+        </p:blipFill>
+        <p:spPr bwMode="auto">
+          <a:xfrm>
+            <a:off x="7499941" y="1994868"/>
+            <a:ext cx="385763" cy="385763"/>
+          </a:xfrm>
+          <a:prstGeom prst="rect">
+            <a:avLst/>
+          </a:prstGeom>
+          <a:noFill/>
+          <a:extLst>
+            <a:ext uri="{909E8E84-426E-40DD-AFC4-6F175D3DCCD1}">
+              <a14:hiddenFill xmlns:a14="http://schemas.microsoft.com/office/drawing/2010/main">
+                <a:solidFill>
+                  <a:srgbClr val="FFFFFF"/>
+                </a:solidFill>
+              </a14:hiddenFill>
+            </a:ext>
+          </a:extLst>
+        </p:spPr>
+      </p:pic>
+      <p:sp>
+        <p:nvSpPr>
+          <p:cNvPr id="53" name="사각형: 둥근 모서리 52">
+            <a:extLst>
+              <a:ext uri="{FF2B5EF4-FFF2-40B4-BE49-F238E27FC236}">
+                <a16:creationId xmlns:a16="http://schemas.microsoft.com/office/drawing/2014/main" id="{C00D34FD-30CB-06AC-8240-B2D492DBEE44}"/>
+              </a:ext>
+            </a:extLst>
+          </p:cNvPr>
+          <p:cNvSpPr/>
+          <p:nvPr/>
+        </p:nvSpPr>
+        <p:spPr>
+          <a:xfrm>
+            <a:off x="8691528" y="2334638"/>
+            <a:ext cx="2200521" cy="2794000"/>
+          </a:xfrm>
+          <a:prstGeom prst="roundRect">
+            <a:avLst>
+              <a:gd name="adj" fmla="val 2239"/>
+            </a:avLst>
+          </a:prstGeom>
+          <a:solidFill>
+            <a:schemeClr val="bg2">
+              <a:lumMod val="90000"/>
+            </a:schemeClr>
+          </a:solidFill>
+        </p:spPr>
+        <p:style>
+          <a:lnRef idx="2">
+            <a:schemeClr val="accent1">
+              <a:shade val="50000"/>
+            </a:schemeClr>
+          </a:lnRef>
+          <a:fillRef idx="1">
+            <a:schemeClr val="accent1"/>
+          </a:fillRef>
+          <a:effectRef idx="0">
+            <a:schemeClr val="accent1"/>
+          </a:effectRef>
+          <a:fontRef idx="minor">
+            <a:schemeClr val="lt1"/>
+          </a:fontRef>
+        </p:style>
+        <p:txBody>
+          <a:bodyPr rtlCol="0" anchor="ctr"/>
+          <a:lstStyle/>
+          <a:p>
+            <a:pPr algn="ctr"/>
+            <a:endParaRPr lang="ko-KR" altLang="en-US"/>
+          </a:p>
+        </p:txBody>
+      </p:sp>
+      <p:sp>
+        <p:nvSpPr>
+          <p:cNvPr id="54" name="사각형: 둥근 모서리 53">
+            <a:extLst>
+              <a:ext uri="{FF2B5EF4-FFF2-40B4-BE49-F238E27FC236}">
+                <a16:creationId xmlns:a16="http://schemas.microsoft.com/office/drawing/2014/main" id="{C8059E62-6151-B849-DC8A-590DB4319E00}"/>
+              </a:ext>
+            </a:extLst>
+          </p:cNvPr>
+          <p:cNvSpPr/>
+          <p:nvPr/>
+        </p:nvSpPr>
+        <p:spPr>
+          <a:xfrm>
+            <a:off x="10639242" y="2239388"/>
+            <a:ext cx="323850" cy="323850"/>
+          </a:xfrm>
+          <a:prstGeom prst="roundRect">
+            <a:avLst/>
+          </a:prstGeom>
+          <a:solidFill>
+            <a:schemeClr val="bg2">
+              <a:lumMod val="90000"/>
+            </a:schemeClr>
+          </a:solidFill>
+        </p:spPr>
+        <p:style>
+          <a:lnRef idx="2">
+            <a:schemeClr val="accent1">
+              <a:shade val="50000"/>
+            </a:schemeClr>
+          </a:lnRef>
+          <a:fillRef idx="1">
+            <a:schemeClr val="accent1"/>
+          </a:fillRef>
+          <a:effectRef idx="0">
+            <a:schemeClr val="accent1"/>
+          </a:effectRef>
+          <a:fontRef idx="minor">
+            <a:schemeClr val="lt1"/>
+          </a:fontRef>
+        </p:style>
+        <p:txBody>
+          <a:bodyPr rtlCol="0" anchor="ctr"/>
+          <a:lstStyle/>
+          <a:p>
+            <a:pPr algn="ctr"/>
+            <a:endParaRPr lang="ko-KR" altLang="en-US"/>
+          </a:p>
+        </p:txBody>
+      </p:sp>
+      <p:grpSp>
+        <p:nvGrpSpPr>
+          <p:cNvPr id="55" name="그룹 54">
+            <a:extLst>
+              <a:ext uri="{FF2B5EF4-FFF2-40B4-BE49-F238E27FC236}">
+                <a16:creationId xmlns:a16="http://schemas.microsoft.com/office/drawing/2014/main" id="{97A33885-EBEE-944F-F836-016A168AE307}"/>
+              </a:ext>
+            </a:extLst>
+          </p:cNvPr>
+          <p:cNvGrpSpPr/>
+          <p:nvPr/>
+        </p:nvGrpSpPr>
+        <p:grpSpPr>
+          <a:xfrm>
+            <a:off x="9317394" y="1954970"/>
+            <a:ext cx="1141042" cy="442051"/>
+            <a:chOff x="6711477" y="1465221"/>
+            <a:chExt cx="1416357" cy="548711"/>
+          </a:xfrm>
+        </p:grpSpPr>
+        <p:sp>
+          <p:nvSpPr>
+            <p:cNvPr id="56" name="사각형: 둥근 모서리 55">
+              <a:extLst>
+                <a:ext uri="{FF2B5EF4-FFF2-40B4-BE49-F238E27FC236}">
+                  <a16:creationId xmlns:a16="http://schemas.microsoft.com/office/drawing/2014/main" id="{27083CD4-AFFB-448A-C400-5F0B217AD579}"/>
+                </a:ext>
+              </a:extLst>
+            </p:cNvPr>
+            <p:cNvSpPr/>
+            <p:nvPr/>
+          </p:nvSpPr>
+          <p:spPr>
+            <a:xfrm>
+              <a:off x="6839352" y="1586038"/>
+              <a:ext cx="955998" cy="274512"/>
+            </a:xfrm>
+            <a:prstGeom prst="roundRect">
+              <a:avLst>
+                <a:gd name="adj" fmla="val 50000"/>
+              </a:avLst>
+            </a:prstGeom>
+            <a:solidFill>
+              <a:schemeClr val="bg2">
+                <a:lumMod val="90000"/>
+              </a:schemeClr>
+            </a:solidFill>
+            <a:ln>
+              <a:noFill/>
+            </a:ln>
+          </p:spPr>
+          <p:style>
+            <a:lnRef idx="2">
+              <a:schemeClr val="accent1">
+                <a:shade val="50000"/>
+              </a:schemeClr>
+            </a:lnRef>
+            <a:fillRef idx="1">
+              <a:schemeClr val="accent1"/>
+            </a:fillRef>
+            <a:effectRef idx="0">
+              <a:schemeClr val="accent1"/>
+            </a:effectRef>
+            <a:fontRef idx="minor">
+              <a:schemeClr val="lt1"/>
+            </a:fontRef>
+          </p:style>
+          <p:txBody>
+            <a:bodyPr rtlCol="0" anchor="ctr"/>
+            <a:lstStyle/>
+            <a:p>
+              <a:pPr algn="ctr"/>
+              <a:endParaRPr lang="ko-KR" altLang="en-US"/>
+            </a:p>
+          </p:txBody>
+        </p:sp>
+        <p:pic>
+          <p:nvPicPr>
+            <p:cNvPr id="57" name="그림 56">
+              <a:extLst>
+                <a:ext uri="{FF2B5EF4-FFF2-40B4-BE49-F238E27FC236}">
+                  <a16:creationId xmlns:a16="http://schemas.microsoft.com/office/drawing/2014/main" id="{3F2251A6-0A1D-FE1A-E91D-7111B8C1173D}"/>
+                </a:ext>
+              </a:extLst>
+            </p:cNvPr>
+            <p:cNvPicPr>
+              <a:picLocks noChangeAspect="1"/>
+            </p:cNvPicPr>
+            <p:nvPr/>
+          </p:nvPicPr>
+          <p:blipFill>
+            <a:blip r:embed="rId7">
+              <a:extLst>
+                <a:ext uri="{28A0092B-C50C-407E-A947-70E740481C1C}">
+                  <a14:useLocalDpi xmlns:a14="http://schemas.microsoft.com/office/drawing/2010/main" val="0"/>
+                </a:ext>
+              </a:extLst>
+            </a:blip>
+            <a:stretch>
+              <a:fillRect/>
+            </a:stretch>
+          </p:blipFill>
+          <p:spPr>
+            <a:xfrm>
+              <a:off x="6711477" y="1465221"/>
+              <a:ext cx="548711" cy="548711"/>
+            </a:xfrm>
+            <a:prstGeom prst="rect">
+              <a:avLst/>
+            </a:prstGeom>
+          </p:spPr>
+        </p:pic>
+        <p:sp>
+          <p:nvSpPr>
+            <p:cNvPr id="58" name="TextBox 57">
+              <a:extLst>
+                <a:ext uri="{FF2B5EF4-FFF2-40B4-BE49-F238E27FC236}">
+                  <a16:creationId xmlns:a16="http://schemas.microsoft.com/office/drawing/2014/main" id="{8C6D2113-CC77-A56C-0F75-FF2EAF377E93}"/>
+                </a:ext>
+              </a:extLst>
+            </p:cNvPr>
+            <p:cNvSpPr txBox="1"/>
+            <p:nvPr/>
+          </p:nvSpPr>
+          <p:spPr>
+            <a:xfrm>
+              <a:off x="6883235" y="1560569"/>
+              <a:ext cx="1244599" cy="315182"/>
+            </a:xfrm>
+            <a:prstGeom prst="rect">
+              <a:avLst/>
+            </a:prstGeom>
+            <a:noFill/>
+          </p:spPr>
+          <p:txBody>
+            <a:bodyPr wrap="square" rtlCol="0">
+              <a:spAutoFit/>
+            </a:bodyPr>
+            <a:lstStyle/>
+            <a:p>
+              <a:pPr algn="ctr"/>
+              <a:r>
+                <a:rPr lang="en-US" altLang="ko-KR" sz="1050" b="1"/>
+                <a:t>5,000</a:t>
+              </a:r>
+              <a:endParaRPr lang="ko-KR" altLang="en-US" sz="1050" b="1"/>
+            </a:p>
+          </p:txBody>
+        </p:sp>
+      </p:grpSp>
+      <p:sp>
+        <p:nvSpPr>
+          <p:cNvPr id="59" name="화살표: 오른쪽 58">
+            <a:extLst>
+              <a:ext uri="{FF2B5EF4-FFF2-40B4-BE49-F238E27FC236}">
+                <a16:creationId xmlns:a16="http://schemas.microsoft.com/office/drawing/2014/main" id="{AC607639-4BEB-4172-BEB3-C4CB4A514256}"/>
+              </a:ext>
+            </a:extLst>
+          </p:cNvPr>
+          <p:cNvSpPr/>
+          <p:nvPr/>
+        </p:nvSpPr>
+        <p:spPr>
+          <a:xfrm rot="10800000">
+            <a:off x="10693046" y="2306108"/>
+            <a:ext cx="208263" cy="178254"/>
+          </a:xfrm>
+          <a:prstGeom prst="rightArrow">
+            <a:avLst/>
+          </a:prstGeom>
+        </p:spPr>
+        <p:style>
+          <a:lnRef idx="2">
+            <a:schemeClr val="accent1">
+              <a:shade val="50000"/>
+            </a:schemeClr>
+          </a:lnRef>
+          <a:fillRef idx="1">
+            <a:schemeClr val="accent1"/>
+          </a:fillRef>
+          <a:effectRef idx="0">
+            <a:schemeClr val="accent1"/>
+          </a:effectRef>
+          <a:fontRef idx="minor">
+            <a:schemeClr val="lt1"/>
+          </a:fontRef>
+        </p:style>
+        <p:txBody>
+          <a:bodyPr rtlCol="0" anchor="ctr"/>
+          <a:lstStyle/>
+          <a:p>
+            <a:pPr algn="ctr"/>
+            <a:endParaRPr lang="ko-KR" altLang="en-US"/>
+          </a:p>
+        </p:txBody>
+      </p:sp>
+      <p:sp>
+        <p:nvSpPr>
+          <p:cNvPr id="60" name="TextBox 59">
+            <a:extLst>
+              <a:ext uri="{FF2B5EF4-FFF2-40B4-BE49-F238E27FC236}">
+                <a16:creationId xmlns:a16="http://schemas.microsoft.com/office/drawing/2014/main" id="{721A7418-1A7E-70E1-75E1-DBEE2B7DE721}"/>
+              </a:ext>
+            </a:extLst>
+          </p:cNvPr>
+          <p:cNvSpPr txBox="1"/>
+          <p:nvPr/>
+        </p:nvSpPr>
+        <p:spPr>
+          <a:xfrm>
+            <a:off x="6984919" y="2394100"/>
+            <a:ext cx="1244600" cy="261610"/>
+          </a:xfrm>
+          <a:prstGeom prst="rect">
+            <a:avLst/>
+          </a:prstGeom>
+          <a:noFill/>
+        </p:spPr>
+        <p:txBody>
+          <a:bodyPr wrap="square" rtlCol="0">
+            <a:spAutoFit/>
+          </a:bodyPr>
+          <a:lstStyle/>
+          <a:p>
+            <a:pPr algn="ctr"/>
+            <a:r>
+              <a:rPr lang="ko-KR" altLang="en-US" sz="1100" b="1"/>
+              <a:t>음식</a:t>
+            </a:r>
+            <a:endParaRPr lang="en-US" altLang="ko-KR" sz="1100" b="1"/>
+          </a:p>
+        </p:txBody>
+      </p:sp>
+      <p:sp>
+        <p:nvSpPr>
+          <p:cNvPr id="61" name="사각형: 둥근 모서리 60">
+            <a:extLst>
+              <a:ext uri="{FF2B5EF4-FFF2-40B4-BE49-F238E27FC236}">
+                <a16:creationId xmlns:a16="http://schemas.microsoft.com/office/drawing/2014/main" id="{09F63AF8-FB2A-2CAB-9029-B9AEF18C1313}"/>
+              </a:ext>
+            </a:extLst>
+          </p:cNvPr>
+          <p:cNvSpPr/>
+          <p:nvPr/>
+        </p:nvSpPr>
+        <p:spPr>
+          <a:xfrm>
+            <a:off x="6642815" y="2774945"/>
+            <a:ext cx="400050" cy="400050"/>
+          </a:xfrm>
+          <a:prstGeom prst="roundRect">
+            <a:avLst/>
+          </a:prstGeom>
+          <a:ln>
+            <a:solidFill>
+              <a:srgbClr val="FF0000"/>
+            </a:solidFill>
+          </a:ln>
+        </p:spPr>
+        <p:style>
+          <a:lnRef idx="2">
+            <a:schemeClr val="accent1">
+              <a:shade val="50000"/>
+            </a:schemeClr>
+          </a:lnRef>
+          <a:fillRef idx="1">
+            <a:schemeClr val="accent1"/>
+          </a:fillRef>
+          <a:effectRef idx="0">
+            <a:schemeClr val="accent1"/>
+          </a:effectRef>
+          <a:fontRef idx="minor">
+            <a:schemeClr val="lt1"/>
+          </a:fontRef>
+        </p:style>
+        <p:txBody>
+          <a:bodyPr rtlCol="0" anchor="ctr"/>
+          <a:lstStyle/>
+          <a:p>
+            <a:pPr algn="ctr"/>
+            <a:endParaRPr lang="ko-KR" altLang="en-US"/>
+          </a:p>
+        </p:txBody>
+      </p:sp>
+      <p:sp>
+        <p:nvSpPr>
+          <p:cNvPr id="62" name="사각형: 둥근 모서리 61">
+            <a:extLst>
+              <a:ext uri="{FF2B5EF4-FFF2-40B4-BE49-F238E27FC236}">
+                <a16:creationId xmlns:a16="http://schemas.microsoft.com/office/drawing/2014/main" id="{66D8A109-4084-EACD-DB32-5181EA60F9A1}"/>
+              </a:ext>
+            </a:extLst>
+          </p:cNvPr>
+          <p:cNvSpPr/>
+          <p:nvPr/>
+        </p:nvSpPr>
+        <p:spPr>
+          <a:xfrm>
+            <a:off x="7141554" y="2774945"/>
+            <a:ext cx="400050" cy="400050"/>
+          </a:xfrm>
+          <a:prstGeom prst="roundRect">
+            <a:avLst/>
+          </a:prstGeom>
+        </p:spPr>
+        <p:style>
+          <a:lnRef idx="2">
+            <a:schemeClr val="accent1">
+              <a:shade val="50000"/>
+            </a:schemeClr>
+          </a:lnRef>
+          <a:fillRef idx="1">
+            <a:schemeClr val="accent1"/>
+          </a:fillRef>
+          <a:effectRef idx="0">
+            <a:schemeClr val="accent1"/>
+          </a:effectRef>
+          <a:fontRef idx="minor">
+            <a:schemeClr val="lt1"/>
+          </a:fontRef>
+        </p:style>
+        <p:txBody>
+          <a:bodyPr rtlCol="0" anchor="ctr"/>
+          <a:lstStyle/>
+          <a:p>
+            <a:pPr algn="ctr"/>
+            <a:endParaRPr lang="ko-KR" altLang="en-US"/>
+          </a:p>
+        </p:txBody>
+      </p:sp>
+      <p:sp>
+        <p:nvSpPr>
+          <p:cNvPr id="63" name="사각형: 둥근 모서리 62">
+            <a:extLst>
+              <a:ext uri="{FF2B5EF4-FFF2-40B4-BE49-F238E27FC236}">
+                <a16:creationId xmlns:a16="http://schemas.microsoft.com/office/drawing/2014/main" id="{F1F368B6-10AF-BDF5-6536-FD7365AAE68F}"/>
+              </a:ext>
+            </a:extLst>
+          </p:cNvPr>
+          <p:cNvSpPr/>
+          <p:nvPr/>
+        </p:nvSpPr>
+        <p:spPr>
+          <a:xfrm>
+            <a:off x="7639146" y="2774945"/>
+            <a:ext cx="400050" cy="400050"/>
+          </a:xfrm>
+          <a:prstGeom prst="roundRect">
+            <a:avLst/>
+          </a:prstGeom>
+        </p:spPr>
+        <p:style>
+          <a:lnRef idx="2">
+            <a:schemeClr val="accent1">
+              <a:shade val="50000"/>
+            </a:schemeClr>
+          </a:lnRef>
+          <a:fillRef idx="1">
+            <a:schemeClr val="accent1"/>
+          </a:fillRef>
+          <a:effectRef idx="0">
+            <a:schemeClr val="accent1"/>
+          </a:effectRef>
+          <a:fontRef idx="minor">
+            <a:schemeClr val="lt1"/>
+          </a:fontRef>
+        </p:style>
+        <p:txBody>
+          <a:bodyPr rtlCol="0" anchor="ctr"/>
+          <a:lstStyle/>
+          <a:p>
+            <a:pPr algn="ctr"/>
+            <a:endParaRPr lang="ko-KR" altLang="en-US"/>
+          </a:p>
+        </p:txBody>
+      </p:sp>
+      <p:sp>
+        <p:nvSpPr>
+          <p:cNvPr id="64" name="사각형: 둥근 모서리 63">
+            <a:extLst>
+              <a:ext uri="{FF2B5EF4-FFF2-40B4-BE49-F238E27FC236}">
+                <a16:creationId xmlns:a16="http://schemas.microsoft.com/office/drawing/2014/main" id="{D2E209D3-B7EC-F1E9-BA8C-FAA585FF3B21}"/>
+              </a:ext>
+            </a:extLst>
+          </p:cNvPr>
+          <p:cNvSpPr/>
+          <p:nvPr/>
+        </p:nvSpPr>
+        <p:spPr>
+          <a:xfrm>
+            <a:off x="8136738" y="2774945"/>
+            <a:ext cx="400050" cy="400050"/>
+          </a:xfrm>
+          <a:prstGeom prst="roundRect">
+            <a:avLst/>
+          </a:prstGeom>
+        </p:spPr>
+        <p:style>
+          <a:lnRef idx="2">
+            <a:schemeClr val="accent1">
+              <a:shade val="50000"/>
+            </a:schemeClr>
+          </a:lnRef>
+          <a:fillRef idx="1">
+            <a:schemeClr val="accent1"/>
+          </a:fillRef>
+          <a:effectRef idx="0">
+            <a:schemeClr val="accent1"/>
+          </a:effectRef>
+          <a:fontRef idx="minor">
+            <a:schemeClr val="lt1"/>
+          </a:fontRef>
+        </p:style>
+        <p:txBody>
+          <a:bodyPr rtlCol="0" anchor="ctr"/>
+          <a:lstStyle/>
+          <a:p>
+            <a:pPr algn="ctr"/>
+            <a:endParaRPr lang="ko-KR" altLang="en-US"/>
+          </a:p>
+        </p:txBody>
+      </p:sp>
+      <p:sp>
+        <p:nvSpPr>
+          <p:cNvPr id="65" name="사각형: 둥근 모서리 64">
+            <a:extLst>
+              <a:ext uri="{FF2B5EF4-FFF2-40B4-BE49-F238E27FC236}">
+                <a16:creationId xmlns:a16="http://schemas.microsoft.com/office/drawing/2014/main" id="{40965CDB-0B77-9531-2F3B-C2986770CDAA}"/>
+              </a:ext>
+            </a:extLst>
+          </p:cNvPr>
+          <p:cNvSpPr/>
+          <p:nvPr/>
+        </p:nvSpPr>
+        <p:spPr>
+          <a:xfrm>
+            <a:off x="6642815" y="3282945"/>
+            <a:ext cx="400050" cy="400050"/>
+          </a:xfrm>
+          <a:prstGeom prst="roundRect">
+            <a:avLst/>
+          </a:prstGeom>
+        </p:spPr>
+        <p:style>
+          <a:lnRef idx="2">
+            <a:schemeClr val="accent1">
+              <a:shade val="50000"/>
+            </a:schemeClr>
+          </a:lnRef>
+          <a:fillRef idx="1">
+            <a:schemeClr val="accent1"/>
+          </a:fillRef>
+          <a:effectRef idx="0">
+            <a:schemeClr val="accent1"/>
+          </a:effectRef>
+          <a:fontRef idx="minor">
+            <a:schemeClr val="lt1"/>
+          </a:fontRef>
+        </p:style>
+        <p:txBody>
+          <a:bodyPr rtlCol="0" anchor="ctr"/>
+          <a:lstStyle/>
+          <a:p>
+            <a:pPr algn="ctr"/>
+            <a:endParaRPr lang="ko-KR" altLang="en-US"/>
+          </a:p>
+        </p:txBody>
+      </p:sp>
+      <p:sp>
+        <p:nvSpPr>
+          <p:cNvPr id="66" name="사각형: 둥근 모서리 65">
+            <a:extLst>
+              <a:ext uri="{FF2B5EF4-FFF2-40B4-BE49-F238E27FC236}">
+                <a16:creationId xmlns:a16="http://schemas.microsoft.com/office/drawing/2014/main" id="{CFD3F0CB-FF8D-B0F9-C3DB-415E6B7E972A}"/>
+              </a:ext>
+            </a:extLst>
+          </p:cNvPr>
+          <p:cNvSpPr/>
+          <p:nvPr/>
+        </p:nvSpPr>
+        <p:spPr>
+          <a:xfrm>
+            <a:off x="7141554" y="3282945"/>
+            <a:ext cx="400050" cy="400050"/>
+          </a:xfrm>
+          <a:prstGeom prst="roundRect">
+            <a:avLst/>
+          </a:prstGeom>
+        </p:spPr>
+        <p:style>
+          <a:lnRef idx="2">
+            <a:schemeClr val="accent1">
+              <a:shade val="50000"/>
+            </a:schemeClr>
+          </a:lnRef>
+          <a:fillRef idx="1">
+            <a:schemeClr val="accent1"/>
+          </a:fillRef>
+          <a:effectRef idx="0">
+            <a:schemeClr val="accent1"/>
+          </a:effectRef>
+          <a:fontRef idx="minor">
+            <a:schemeClr val="lt1"/>
+          </a:fontRef>
+        </p:style>
+        <p:txBody>
+          <a:bodyPr rtlCol="0" anchor="ctr"/>
+          <a:lstStyle/>
+          <a:p>
+            <a:pPr algn="ctr"/>
+            <a:endParaRPr lang="ko-KR" altLang="en-US"/>
+          </a:p>
+        </p:txBody>
+      </p:sp>
+      <p:sp>
+        <p:nvSpPr>
+          <p:cNvPr id="67" name="사각형: 둥근 모서리 66">
+            <a:extLst>
+              <a:ext uri="{FF2B5EF4-FFF2-40B4-BE49-F238E27FC236}">
+                <a16:creationId xmlns:a16="http://schemas.microsoft.com/office/drawing/2014/main" id="{BDDE6E10-15DB-BBBA-5855-A8779F965296}"/>
+              </a:ext>
+            </a:extLst>
+          </p:cNvPr>
+          <p:cNvSpPr/>
+          <p:nvPr/>
+        </p:nvSpPr>
+        <p:spPr>
+          <a:xfrm>
+            <a:off x="7639146" y="3282945"/>
+            <a:ext cx="400050" cy="400050"/>
+          </a:xfrm>
+          <a:prstGeom prst="roundRect">
+            <a:avLst/>
+          </a:prstGeom>
+        </p:spPr>
+        <p:style>
+          <a:lnRef idx="2">
+            <a:schemeClr val="accent1">
+              <a:shade val="50000"/>
+            </a:schemeClr>
+          </a:lnRef>
+          <a:fillRef idx="1">
+            <a:schemeClr val="accent1"/>
+          </a:fillRef>
+          <a:effectRef idx="0">
+            <a:schemeClr val="accent1"/>
+          </a:effectRef>
+          <a:fontRef idx="minor">
+            <a:schemeClr val="lt1"/>
+          </a:fontRef>
+        </p:style>
+        <p:txBody>
+          <a:bodyPr rtlCol="0" anchor="ctr"/>
+          <a:lstStyle/>
+          <a:p>
+            <a:pPr algn="ctr"/>
+            <a:endParaRPr lang="ko-KR" altLang="en-US"/>
+          </a:p>
+        </p:txBody>
+      </p:sp>
+      <p:sp>
+        <p:nvSpPr>
+          <p:cNvPr id="68" name="사각형: 둥근 모서리 67">
+            <a:extLst>
+              <a:ext uri="{FF2B5EF4-FFF2-40B4-BE49-F238E27FC236}">
+                <a16:creationId xmlns:a16="http://schemas.microsoft.com/office/drawing/2014/main" id="{1F19AC14-9441-A96C-DBEF-5BA11E3B7415}"/>
+              </a:ext>
+            </a:extLst>
+          </p:cNvPr>
+          <p:cNvSpPr/>
+          <p:nvPr/>
+        </p:nvSpPr>
+        <p:spPr>
+          <a:xfrm>
+            <a:off x="8136738" y="3282945"/>
+            <a:ext cx="400050" cy="400050"/>
+          </a:xfrm>
+          <a:prstGeom prst="roundRect">
+            <a:avLst/>
+          </a:prstGeom>
+        </p:spPr>
+        <p:style>
+          <a:lnRef idx="2">
+            <a:schemeClr val="accent1">
+              <a:shade val="50000"/>
+            </a:schemeClr>
+          </a:lnRef>
+          <a:fillRef idx="1">
+            <a:schemeClr val="accent1"/>
+          </a:fillRef>
+          <a:effectRef idx="0">
+            <a:schemeClr val="accent1"/>
+          </a:effectRef>
+          <a:fontRef idx="minor">
+            <a:schemeClr val="lt1"/>
+          </a:fontRef>
+        </p:style>
+        <p:txBody>
+          <a:bodyPr rtlCol="0" anchor="ctr"/>
+          <a:lstStyle/>
+          <a:p>
+            <a:pPr algn="ctr"/>
+            <a:endParaRPr lang="ko-KR" altLang="en-US"/>
+          </a:p>
+        </p:txBody>
+      </p:sp>
+      <p:sp>
+        <p:nvSpPr>
+          <p:cNvPr id="69" name="사각형: 둥근 모서리 68">
+            <a:extLst>
+              <a:ext uri="{FF2B5EF4-FFF2-40B4-BE49-F238E27FC236}">
+                <a16:creationId xmlns:a16="http://schemas.microsoft.com/office/drawing/2014/main" id="{F425E824-2D36-C32E-66B4-239302815941}"/>
+              </a:ext>
+            </a:extLst>
+          </p:cNvPr>
+          <p:cNvSpPr/>
+          <p:nvPr/>
+        </p:nvSpPr>
+        <p:spPr>
+          <a:xfrm>
+            <a:off x="6642815" y="3790945"/>
+            <a:ext cx="400050" cy="400050"/>
+          </a:xfrm>
+          <a:prstGeom prst="roundRect">
+            <a:avLst/>
+          </a:prstGeom>
+        </p:spPr>
+        <p:style>
+          <a:lnRef idx="2">
+            <a:schemeClr val="accent1">
+              <a:shade val="50000"/>
+            </a:schemeClr>
+          </a:lnRef>
+          <a:fillRef idx="1">
+            <a:schemeClr val="accent1"/>
+          </a:fillRef>
+          <a:effectRef idx="0">
+            <a:schemeClr val="accent1"/>
+          </a:effectRef>
+          <a:fontRef idx="minor">
+            <a:schemeClr val="lt1"/>
+          </a:fontRef>
+        </p:style>
+        <p:txBody>
+          <a:bodyPr rtlCol="0" anchor="ctr"/>
+          <a:lstStyle/>
+          <a:p>
+            <a:pPr algn="ctr"/>
+            <a:endParaRPr lang="ko-KR" altLang="en-US"/>
+          </a:p>
+        </p:txBody>
+      </p:sp>
+      <p:sp>
+        <p:nvSpPr>
+          <p:cNvPr id="70" name="사각형: 둥근 모서리 69">
+            <a:extLst>
+              <a:ext uri="{FF2B5EF4-FFF2-40B4-BE49-F238E27FC236}">
+                <a16:creationId xmlns:a16="http://schemas.microsoft.com/office/drawing/2014/main" id="{9D26473C-0656-4520-53E3-7C15B48B16B0}"/>
+              </a:ext>
+            </a:extLst>
+          </p:cNvPr>
+          <p:cNvSpPr/>
+          <p:nvPr/>
+        </p:nvSpPr>
+        <p:spPr>
+          <a:xfrm>
+            <a:off x="7141554" y="3790945"/>
+            <a:ext cx="400050" cy="400050"/>
+          </a:xfrm>
+          <a:prstGeom prst="roundRect">
+            <a:avLst/>
+          </a:prstGeom>
+        </p:spPr>
+        <p:style>
+          <a:lnRef idx="2">
+            <a:schemeClr val="accent1">
+              <a:shade val="50000"/>
+            </a:schemeClr>
+          </a:lnRef>
+          <a:fillRef idx="1">
+            <a:schemeClr val="accent1"/>
+          </a:fillRef>
+          <a:effectRef idx="0">
+            <a:schemeClr val="accent1"/>
+          </a:effectRef>
+          <a:fontRef idx="minor">
+            <a:schemeClr val="lt1"/>
+          </a:fontRef>
+        </p:style>
+        <p:txBody>
+          <a:bodyPr rtlCol="0" anchor="ctr"/>
+          <a:lstStyle/>
+          <a:p>
+            <a:pPr algn="ctr"/>
+            <a:endParaRPr lang="ko-KR" altLang="en-US"/>
+          </a:p>
+        </p:txBody>
+      </p:sp>
+      <p:sp>
+        <p:nvSpPr>
+          <p:cNvPr id="71" name="사각형: 둥근 모서리 70">
+            <a:extLst>
+              <a:ext uri="{FF2B5EF4-FFF2-40B4-BE49-F238E27FC236}">
+                <a16:creationId xmlns:a16="http://schemas.microsoft.com/office/drawing/2014/main" id="{1BBB3D28-7C8A-F6A4-B2A3-386EA9E16C63}"/>
+              </a:ext>
+            </a:extLst>
+          </p:cNvPr>
+          <p:cNvSpPr/>
+          <p:nvPr/>
+        </p:nvSpPr>
+        <p:spPr>
+          <a:xfrm>
+            <a:off x="7639146" y="3790945"/>
+            <a:ext cx="400050" cy="400050"/>
+          </a:xfrm>
+          <a:prstGeom prst="roundRect">
+            <a:avLst/>
+          </a:prstGeom>
+        </p:spPr>
+        <p:style>
+          <a:lnRef idx="2">
+            <a:schemeClr val="accent1">
+              <a:shade val="50000"/>
+            </a:schemeClr>
+          </a:lnRef>
+          <a:fillRef idx="1">
+            <a:schemeClr val="accent1"/>
+          </a:fillRef>
+          <a:effectRef idx="0">
+            <a:schemeClr val="accent1"/>
+          </a:effectRef>
+          <a:fontRef idx="minor">
+            <a:schemeClr val="lt1"/>
+          </a:fontRef>
+        </p:style>
+        <p:txBody>
+          <a:bodyPr rtlCol="0" anchor="ctr"/>
+          <a:lstStyle/>
+          <a:p>
+            <a:pPr algn="ctr"/>
+            <a:endParaRPr lang="ko-KR" altLang="en-US"/>
+          </a:p>
+        </p:txBody>
+      </p:sp>
+      <p:sp>
+        <p:nvSpPr>
+          <p:cNvPr id="72" name="사각형: 둥근 모서리 71">
+            <a:extLst>
+              <a:ext uri="{FF2B5EF4-FFF2-40B4-BE49-F238E27FC236}">
+                <a16:creationId xmlns:a16="http://schemas.microsoft.com/office/drawing/2014/main" id="{AF0C6798-6CE2-BBC8-9E1A-D2FE514380D2}"/>
+              </a:ext>
+            </a:extLst>
+          </p:cNvPr>
+          <p:cNvSpPr/>
+          <p:nvPr/>
+        </p:nvSpPr>
+        <p:spPr>
+          <a:xfrm>
+            <a:off x="8136738" y="3790945"/>
+            <a:ext cx="400050" cy="400050"/>
+          </a:xfrm>
+          <a:prstGeom prst="roundRect">
+            <a:avLst/>
+          </a:prstGeom>
+        </p:spPr>
+        <p:style>
+          <a:lnRef idx="2">
+            <a:schemeClr val="accent1">
+              <a:shade val="50000"/>
+            </a:schemeClr>
+          </a:lnRef>
+          <a:fillRef idx="1">
+            <a:schemeClr val="accent1"/>
+          </a:fillRef>
+          <a:effectRef idx="0">
+            <a:schemeClr val="accent1"/>
+          </a:effectRef>
+          <a:fontRef idx="minor">
+            <a:schemeClr val="lt1"/>
+          </a:fontRef>
+        </p:style>
+        <p:txBody>
+          <a:bodyPr rtlCol="0" anchor="ctr"/>
+          <a:lstStyle/>
+          <a:p>
+            <a:pPr algn="ctr"/>
+            <a:endParaRPr lang="ko-KR" altLang="en-US"/>
+          </a:p>
+        </p:txBody>
+      </p:sp>
+      <p:sp>
+        <p:nvSpPr>
+          <p:cNvPr id="73" name="사각형: 둥근 모서리 72">
+            <a:extLst>
+              <a:ext uri="{FF2B5EF4-FFF2-40B4-BE49-F238E27FC236}">
+                <a16:creationId xmlns:a16="http://schemas.microsoft.com/office/drawing/2014/main" id="{16178D0E-1676-C33A-7628-724BB712A29D}"/>
+              </a:ext>
+            </a:extLst>
+          </p:cNvPr>
+          <p:cNvSpPr/>
+          <p:nvPr/>
+        </p:nvSpPr>
+        <p:spPr>
+          <a:xfrm>
+            <a:off x="6642815" y="4298945"/>
+            <a:ext cx="400050" cy="400050"/>
+          </a:xfrm>
+          <a:prstGeom prst="roundRect">
+            <a:avLst/>
+          </a:prstGeom>
+        </p:spPr>
+        <p:style>
+          <a:lnRef idx="2">
+            <a:schemeClr val="accent1">
+              <a:shade val="50000"/>
+            </a:schemeClr>
+          </a:lnRef>
+          <a:fillRef idx="1">
+            <a:schemeClr val="accent1"/>
+          </a:fillRef>
+          <a:effectRef idx="0">
+            <a:schemeClr val="accent1"/>
+          </a:effectRef>
+          <a:fontRef idx="minor">
+            <a:schemeClr val="lt1"/>
+          </a:fontRef>
+        </p:style>
+        <p:txBody>
+          <a:bodyPr rtlCol="0" anchor="ctr"/>
+          <a:lstStyle/>
+          <a:p>
+            <a:pPr algn="ctr"/>
+            <a:endParaRPr lang="ko-KR" altLang="en-US"/>
+          </a:p>
+        </p:txBody>
+      </p:sp>
+      <p:sp>
+        <p:nvSpPr>
+          <p:cNvPr id="74" name="사각형: 둥근 모서리 73">
+            <a:extLst>
+              <a:ext uri="{FF2B5EF4-FFF2-40B4-BE49-F238E27FC236}">
+                <a16:creationId xmlns:a16="http://schemas.microsoft.com/office/drawing/2014/main" id="{86F332B8-292A-C39C-A304-D181C71B67D3}"/>
+              </a:ext>
+            </a:extLst>
+          </p:cNvPr>
+          <p:cNvSpPr/>
+          <p:nvPr/>
+        </p:nvSpPr>
+        <p:spPr>
+          <a:xfrm>
+            <a:off x="7141554" y="4298945"/>
+            <a:ext cx="400050" cy="400050"/>
+          </a:xfrm>
+          <a:prstGeom prst="roundRect">
+            <a:avLst/>
+          </a:prstGeom>
+        </p:spPr>
+        <p:style>
+          <a:lnRef idx="2">
+            <a:schemeClr val="accent1">
+              <a:shade val="50000"/>
+            </a:schemeClr>
+          </a:lnRef>
+          <a:fillRef idx="1">
+            <a:schemeClr val="accent1"/>
+          </a:fillRef>
+          <a:effectRef idx="0">
+            <a:schemeClr val="accent1"/>
+          </a:effectRef>
+          <a:fontRef idx="minor">
+            <a:schemeClr val="lt1"/>
+          </a:fontRef>
+        </p:style>
+        <p:txBody>
+          <a:bodyPr rtlCol="0" anchor="ctr"/>
+          <a:lstStyle/>
+          <a:p>
+            <a:pPr algn="ctr"/>
+            <a:endParaRPr lang="ko-KR" altLang="en-US"/>
+          </a:p>
+        </p:txBody>
+      </p:sp>
+      <p:sp>
+        <p:nvSpPr>
+          <p:cNvPr id="75" name="사각형: 둥근 모서리 74">
+            <a:extLst>
+              <a:ext uri="{FF2B5EF4-FFF2-40B4-BE49-F238E27FC236}">
+                <a16:creationId xmlns:a16="http://schemas.microsoft.com/office/drawing/2014/main" id="{9F97C1C3-D32B-E2AC-7B2C-718DCC0C97BA}"/>
+              </a:ext>
+            </a:extLst>
+          </p:cNvPr>
+          <p:cNvSpPr/>
+          <p:nvPr/>
+        </p:nvSpPr>
+        <p:spPr>
+          <a:xfrm>
+            <a:off x="7639146" y="4298945"/>
+            <a:ext cx="400050" cy="400050"/>
+          </a:xfrm>
+          <a:prstGeom prst="roundRect">
+            <a:avLst/>
+          </a:prstGeom>
+        </p:spPr>
+        <p:style>
+          <a:lnRef idx="2">
+            <a:schemeClr val="accent1">
+              <a:shade val="50000"/>
+            </a:schemeClr>
+          </a:lnRef>
+          <a:fillRef idx="1">
+            <a:schemeClr val="accent1"/>
+          </a:fillRef>
+          <a:effectRef idx="0">
+            <a:schemeClr val="accent1"/>
+          </a:effectRef>
+          <a:fontRef idx="minor">
+            <a:schemeClr val="lt1"/>
+          </a:fontRef>
+        </p:style>
+        <p:txBody>
+          <a:bodyPr rtlCol="0" anchor="ctr"/>
+          <a:lstStyle/>
+          <a:p>
+            <a:pPr algn="ctr"/>
+            <a:endParaRPr lang="ko-KR" altLang="en-US"/>
+          </a:p>
+        </p:txBody>
+      </p:sp>
+      <p:sp>
+        <p:nvSpPr>
+          <p:cNvPr id="76" name="사각형: 둥근 모서리 75">
+            <a:extLst>
+              <a:ext uri="{FF2B5EF4-FFF2-40B4-BE49-F238E27FC236}">
+                <a16:creationId xmlns:a16="http://schemas.microsoft.com/office/drawing/2014/main" id="{C01319B0-9D1F-043A-0EDC-A1A7F6049077}"/>
+              </a:ext>
+            </a:extLst>
+          </p:cNvPr>
+          <p:cNvSpPr/>
+          <p:nvPr/>
+        </p:nvSpPr>
+        <p:spPr>
+          <a:xfrm>
+            <a:off x="8136738" y="4298945"/>
+            <a:ext cx="400050" cy="400050"/>
+          </a:xfrm>
+          <a:prstGeom prst="roundRect">
+            <a:avLst/>
+          </a:prstGeom>
+        </p:spPr>
+        <p:style>
+          <a:lnRef idx="2">
+            <a:schemeClr val="accent1">
+              <a:shade val="50000"/>
+            </a:schemeClr>
+          </a:lnRef>
+          <a:fillRef idx="1">
+            <a:schemeClr val="accent1"/>
+          </a:fillRef>
+          <a:effectRef idx="0">
+            <a:schemeClr val="accent1"/>
+          </a:effectRef>
+          <a:fontRef idx="minor">
+            <a:schemeClr val="lt1"/>
+          </a:fontRef>
+        </p:style>
+        <p:txBody>
+          <a:bodyPr rtlCol="0" anchor="ctr"/>
+          <a:lstStyle/>
+          <a:p>
+            <a:pPr algn="ctr"/>
+            <a:endParaRPr lang="ko-KR" altLang="en-US"/>
+          </a:p>
+        </p:txBody>
+      </p:sp>
+      <p:sp>
+        <p:nvSpPr>
+          <p:cNvPr id="77" name="사각형: 둥근 모서리 76">
+            <a:extLst>
+              <a:ext uri="{FF2B5EF4-FFF2-40B4-BE49-F238E27FC236}">
+                <a16:creationId xmlns:a16="http://schemas.microsoft.com/office/drawing/2014/main" id="{032F82EF-9558-2122-3EB7-CDC5CAF10D8C}"/>
+              </a:ext>
+            </a:extLst>
+          </p:cNvPr>
+          <p:cNvSpPr/>
+          <p:nvPr/>
+        </p:nvSpPr>
+        <p:spPr>
+          <a:xfrm>
+            <a:off x="6641650" y="4823484"/>
+            <a:ext cx="400050" cy="175419"/>
+          </a:xfrm>
+          <a:prstGeom prst="roundRect">
+            <a:avLst/>
+          </a:prstGeom>
+        </p:spPr>
+        <p:style>
+          <a:lnRef idx="2">
+            <a:schemeClr val="accent1">
+              <a:shade val="50000"/>
+            </a:schemeClr>
+          </a:lnRef>
+          <a:fillRef idx="1">
+            <a:schemeClr val="accent1"/>
+          </a:fillRef>
+          <a:effectRef idx="0">
+            <a:schemeClr val="accent1"/>
+          </a:effectRef>
+          <a:fontRef idx="minor">
+            <a:schemeClr val="lt1"/>
+          </a:fontRef>
+        </p:style>
+        <p:txBody>
+          <a:bodyPr rtlCol="0" anchor="ctr"/>
+          <a:lstStyle/>
+          <a:p>
+            <a:pPr algn="ctr"/>
+            <a:endParaRPr lang="ko-KR" altLang="en-US"/>
+          </a:p>
+        </p:txBody>
+      </p:sp>
+      <p:sp>
+        <p:nvSpPr>
+          <p:cNvPr id="78" name="사각형: 둥근 모서리 77">
+            <a:extLst>
+              <a:ext uri="{FF2B5EF4-FFF2-40B4-BE49-F238E27FC236}">
+                <a16:creationId xmlns:a16="http://schemas.microsoft.com/office/drawing/2014/main" id="{F3729E57-B7B3-AE7C-C794-C5619ACDE77A}"/>
+              </a:ext>
+            </a:extLst>
+          </p:cNvPr>
+          <p:cNvSpPr/>
+          <p:nvPr/>
+        </p:nvSpPr>
+        <p:spPr>
+          <a:xfrm>
+            <a:off x="7140389" y="4823484"/>
+            <a:ext cx="400050" cy="175419"/>
+          </a:xfrm>
+          <a:prstGeom prst="roundRect">
+            <a:avLst/>
+          </a:prstGeom>
+        </p:spPr>
+        <p:style>
+          <a:lnRef idx="2">
+            <a:schemeClr val="accent1">
+              <a:shade val="50000"/>
+            </a:schemeClr>
+          </a:lnRef>
+          <a:fillRef idx="1">
+            <a:schemeClr val="accent1"/>
+          </a:fillRef>
+          <a:effectRef idx="0">
+            <a:schemeClr val="accent1"/>
+          </a:effectRef>
+          <a:fontRef idx="minor">
+            <a:schemeClr val="lt1"/>
+          </a:fontRef>
+        </p:style>
+        <p:txBody>
+          <a:bodyPr rtlCol="0" anchor="ctr"/>
+          <a:lstStyle/>
+          <a:p>
+            <a:pPr algn="ctr"/>
+            <a:endParaRPr lang="ko-KR" altLang="en-US"/>
+          </a:p>
+        </p:txBody>
+      </p:sp>
+      <p:sp>
+        <p:nvSpPr>
+          <p:cNvPr id="79" name="사각형: 둥근 모서리 78">
+            <a:extLst>
+              <a:ext uri="{FF2B5EF4-FFF2-40B4-BE49-F238E27FC236}">
+                <a16:creationId xmlns:a16="http://schemas.microsoft.com/office/drawing/2014/main" id="{C46B4D6F-AFF4-1E58-3F4F-2B84312F8DBE}"/>
+              </a:ext>
+            </a:extLst>
+          </p:cNvPr>
+          <p:cNvSpPr/>
+          <p:nvPr/>
+        </p:nvSpPr>
+        <p:spPr>
+          <a:xfrm>
+            <a:off x="7637981" y="4823484"/>
+            <a:ext cx="400050" cy="175419"/>
+          </a:xfrm>
+          <a:prstGeom prst="roundRect">
+            <a:avLst/>
+          </a:prstGeom>
+        </p:spPr>
+        <p:style>
+          <a:lnRef idx="2">
+            <a:schemeClr val="accent1">
+              <a:shade val="50000"/>
+            </a:schemeClr>
+          </a:lnRef>
+          <a:fillRef idx="1">
+            <a:schemeClr val="accent1"/>
+          </a:fillRef>
+          <a:effectRef idx="0">
+            <a:schemeClr val="accent1"/>
+          </a:effectRef>
+          <a:fontRef idx="minor">
+            <a:schemeClr val="lt1"/>
+          </a:fontRef>
+        </p:style>
+        <p:txBody>
+          <a:bodyPr rtlCol="0" anchor="ctr"/>
+          <a:lstStyle/>
+          <a:p>
+            <a:pPr algn="ctr"/>
+            <a:endParaRPr lang="ko-KR" altLang="en-US"/>
+          </a:p>
+        </p:txBody>
+      </p:sp>
+      <p:sp>
+        <p:nvSpPr>
+          <p:cNvPr id="80" name="사각형: 둥근 모서리 79">
+            <a:extLst>
+              <a:ext uri="{FF2B5EF4-FFF2-40B4-BE49-F238E27FC236}">
+                <a16:creationId xmlns:a16="http://schemas.microsoft.com/office/drawing/2014/main" id="{3DFD5AFF-533F-DBE3-895C-242903B22729}"/>
+              </a:ext>
+            </a:extLst>
+          </p:cNvPr>
+          <p:cNvSpPr/>
+          <p:nvPr/>
+        </p:nvSpPr>
+        <p:spPr>
+          <a:xfrm>
+            <a:off x="8135573" y="4823484"/>
+            <a:ext cx="400050" cy="175419"/>
+          </a:xfrm>
+          <a:prstGeom prst="roundRect">
+            <a:avLst/>
+          </a:prstGeom>
+        </p:spPr>
+        <p:style>
+          <a:lnRef idx="2">
+            <a:schemeClr val="accent1">
+              <a:shade val="50000"/>
+            </a:schemeClr>
+          </a:lnRef>
+          <a:fillRef idx="1">
+            <a:schemeClr val="accent1"/>
+          </a:fillRef>
+          <a:effectRef idx="0">
+            <a:schemeClr val="accent1"/>
+          </a:effectRef>
+          <a:fontRef idx="minor">
+            <a:schemeClr val="lt1"/>
+          </a:fontRef>
+        </p:style>
+        <p:txBody>
+          <a:bodyPr rtlCol="0" anchor="ctr"/>
+          <a:lstStyle/>
+          <a:p>
+            <a:pPr algn="ctr"/>
+            <a:endParaRPr lang="ko-KR" altLang="en-US"/>
+          </a:p>
+        </p:txBody>
+      </p:sp>
+      <p:sp>
+        <p:nvSpPr>
+          <p:cNvPr id="81" name="사각형: 둥근 모서리 80">
+            <a:extLst>
+              <a:ext uri="{FF2B5EF4-FFF2-40B4-BE49-F238E27FC236}">
+                <a16:creationId xmlns:a16="http://schemas.microsoft.com/office/drawing/2014/main" id="{0A2BB304-DC16-B638-4191-97F7AB5A10A7}"/>
+              </a:ext>
+            </a:extLst>
+          </p:cNvPr>
+          <p:cNvSpPr/>
+          <p:nvPr/>
+        </p:nvSpPr>
+        <p:spPr>
+          <a:xfrm>
+            <a:off x="9261213" y="3921032"/>
+            <a:ext cx="486318" cy="152129"/>
+          </a:xfrm>
+          <a:prstGeom prst="roundRect">
+            <a:avLst>
+              <a:gd name="adj" fmla="val 50000"/>
+            </a:avLst>
+          </a:prstGeom>
+          <a:solidFill>
+            <a:schemeClr val="bg2">
+              <a:lumMod val="75000"/>
+            </a:schemeClr>
+          </a:solidFill>
+          <a:ln>
+            <a:solidFill>
+              <a:schemeClr val="bg2">
+                <a:lumMod val="75000"/>
+              </a:schemeClr>
+            </a:solidFill>
+          </a:ln>
+        </p:spPr>
+        <p:style>
+          <a:lnRef idx="2">
+            <a:schemeClr val="accent1">
+              <a:shade val="50000"/>
+            </a:schemeClr>
+          </a:lnRef>
+          <a:fillRef idx="1">
+            <a:schemeClr val="accent1"/>
+          </a:fillRef>
+          <a:effectRef idx="0">
+            <a:schemeClr val="accent1"/>
+          </a:effectRef>
+          <a:fontRef idx="minor">
+            <a:schemeClr val="lt1"/>
+          </a:fontRef>
+        </p:style>
+        <p:txBody>
+          <a:bodyPr rtlCol="0" anchor="ctr"/>
+          <a:lstStyle/>
+          <a:p>
+            <a:pPr algn="ctr"/>
+            <a:endParaRPr lang="ko-KR" altLang="en-US"/>
+          </a:p>
+        </p:txBody>
+      </p:sp>
+      <p:sp>
+        <p:nvSpPr>
+          <p:cNvPr id="82" name="사각형: 둥근 모서리 81">
+            <a:extLst>
+              <a:ext uri="{FF2B5EF4-FFF2-40B4-BE49-F238E27FC236}">
+                <a16:creationId xmlns:a16="http://schemas.microsoft.com/office/drawing/2014/main" id="{860238AF-1E8F-8985-1E69-331CFDAE7797}"/>
+              </a:ext>
+            </a:extLst>
+          </p:cNvPr>
+          <p:cNvSpPr/>
+          <p:nvPr/>
+        </p:nvSpPr>
+        <p:spPr>
+          <a:xfrm>
+            <a:off x="9091783" y="3878623"/>
+            <a:ext cx="239965" cy="232964"/>
+          </a:xfrm>
+          <a:prstGeom prst="roundRect">
+            <a:avLst/>
+          </a:prstGeom>
+          <a:solidFill>
+            <a:schemeClr val="bg2">
+              <a:lumMod val="50000"/>
+            </a:schemeClr>
+          </a:solidFill>
+          <a:ln>
+            <a:solidFill>
+              <a:schemeClr val="bg2">
+                <a:lumMod val="75000"/>
+              </a:schemeClr>
+            </a:solidFill>
+          </a:ln>
+        </p:spPr>
+        <p:style>
+          <a:lnRef idx="2">
+            <a:schemeClr val="accent1">
+              <a:shade val="50000"/>
+            </a:schemeClr>
+          </a:lnRef>
+          <a:fillRef idx="1">
+            <a:schemeClr val="accent1"/>
+          </a:fillRef>
+          <a:effectRef idx="0">
+            <a:schemeClr val="accent1"/>
+          </a:effectRef>
+          <a:fontRef idx="minor">
+            <a:schemeClr val="lt1"/>
+          </a:fontRef>
+        </p:style>
+        <p:txBody>
+          <a:bodyPr rtlCol="0" anchor="ctr"/>
+          <a:lstStyle/>
+          <a:p>
+            <a:pPr algn="ctr"/>
+            <a:endParaRPr lang="ko-KR" altLang="en-US"/>
+          </a:p>
+        </p:txBody>
+      </p:sp>
+      <p:pic>
+        <p:nvPicPr>
+          <p:cNvPr id="83" name="Picture 2" descr="잎 - 무료 자연개 아이콘">
+            <a:extLst>
+              <a:ext uri="{FF2B5EF4-FFF2-40B4-BE49-F238E27FC236}">
+                <a16:creationId xmlns:a16="http://schemas.microsoft.com/office/drawing/2014/main" id="{3CC9653C-80F4-C8E0-7F4C-E7AADAAF0213}"/>
+              </a:ext>
+            </a:extLst>
+          </p:cNvPr>
+          <p:cNvPicPr>
+            <a:picLocks noChangeAspect="1" noChangeArrowheads="1"/>
+          </p:cNvPicPr>
+          <p:nvPr/>
+        </p:nvPicPr>
+        <p:blipFill>
+          <a:blip r:embed="rId2">
+            <a:extLst>
+              <a:ext uri="{28A0092B-C50C-407E-A947-70E740481C1C}">
+                <a14:useLocalDpi xmlns:a14="http://schemas.microsoft.com/office/drawing/2010/main" val="0"/>
+              </a:ext>
+            </a:extLst>
+          </a:blip>
+          <a:srcRect/>
+          <a:stretch>
+            <a:fillRect/>
+          </a:stretch>
+        </p:blipFill>
+        <p:spPr bwMode="auto">
+          <a:xfrm>
+            <a:off x="9107946" y="3893193"/>
+            <a:ext cx="197037" cy="197037"/>
+          </a:xfrm>
+          <a:prstGeom prst="rect">
+            <a:avLst/>
+          </a:prstGeom>
+          <a:noFill/>
+          <a:extLst>
+            <a:ext uri="{909E8E84-426E-40DD-AFC4-6F175D3DCCD1}">
+              <a14:hiddenFill xmlns:a14="http://schemas.microsoft.com/office/drawing/2010/main">
+                <a:solidFill>
+                  <a:srgbClr val="FFFFFF"/>
+                </a:solidFill>
+              </a14:hiddenFill>
+            </a:ext>
+          </a:extLst>
+        </p:spPr>
+      </p:pic>
+      <p:sp>
+        <p:nvSpPr>
+          <p:cNvPr id="84" name="사각형: 둥근 모서리 83">
+            <a:extLst>
+              <a:ext uri="{FF2B5EF4-FFF2-40B4-BE49-F238E27FC236}">
+                <a16:creationId xmlns:a16="http://schemas.microsoft.com/office/drawing/2014/main" id="{48096C5E-33C4-EA47-EFAE-E2A3324A88A7}"/>
+              </a:ext>
+            </a:extLst>
+          </p:cNvPr>
+          <p:cNvSpPr/>
+          <p:nvPr/>
+        </p:nvSpPr>
+        <p:spPr>
+          <a:xfrm>
+            <a:off x="9297940" y="2854357"/>
+            <a:ext cx="987695" cy="897313"/>
+          </a:xfrm>
+          <a:prstGeom prst="roundRect">
+            <a:avLst/>
+          </a:prstGeom>
+          <a:solidFill>
+            <a:schemeClr val="bg2">
+              <a:lumMod val="75000"/>
+            </a:schemeClr>
+          </a:solidFill>
+          <a:ln>
+            <a:noFill/>
+          </a:ln>
+        </p:spPr>
+        <p:style>
+          <a:lnRef idx="2">
+            <a:schemeClr val="accent1">
+              <a:shade val="50000"/>
+            </a:schemeClr>
+          </a:lnRef>
+          <a:fillRef idx="1">
+            <a:schemeClr val="accent1"/>
+          </a:fillRef>
+          <a:effectRef idx="0">
+            <a:schemeClr val="accent1"/>
+          </a:effectRef>
+          <a:fontRef idx="minor">
+            <a:schemeClr val="lt1"/>
+          </a:fontRef>
+        </p:style>
+        <p:txBody>
+          <a:bodyPr rtlCol="0" anchor="ctr"/>
+          <a:lstStyle/>
+          <a:p>
+            <a:pPr algn="ctr"/>
+            <a:endParaRPr lang="ko-KR" altLang="en-US"/>
+          </a:p>
+        </p:txBody>
+      </p:sp>
+      <p:sp>
+        <p:nvSpPr>
+          <p:cNvPr id="85" name="TextBox 84">
+            <a:extLst>
+              <a:ext uri="{FF2B5EF4-FFF2-40B4-BE49-F238E27FC236}">
+                <a16:creationId xmlns:a16="http://schemas.microsoft.com/office/drawing/2014/main" id="{F6FAE567-4036-6286-E74E-C36D03B93185}"/>
+              </a:ext>
+            </a:extLst>
+          </p:cNvPr>
+          <p:cNvSpPr txBox="1"/>
+          <p:nvPr/>
+        </p:nvSpPr>
+        <p:spPr>
+          <a:xfrm>
+            <a:off x="9169488" y="2388907"/>
+            <a:ext cx="1244600" cy="261610"/>
+          </a:xfrm>
+          <a:prstGeom prst="rect">
+            <a:avLst/>
+          </a:prstGeom>
+          <a:noFill/>
+        </p:spPr>
+        <p:txBody>
+          <a:bodyPr wrap="square" rtlCol="0">
+            <a:spAutoFit/>
+          </a:bodyPr>
+          <a:lstStyle/>
+          <a:p>
+            <a:pPr algn="ctr"/>
+            <a:r>
+              <a:rPr lang="ko-KR" altLang="en-US" sz="1100" b="1"/>
+              <a:t>음식 이름</a:t>
+            </a:r>
+          </a:p>
+        </p:txBody>
+      </p:sp>
+      <p:grpSp>
+        <p:nvGrpSpPr>
+          <p:cNvPr id="86" name="그룹 85">
+            <a:extLst>
+              <a:ext uri="{FF2B5EF4-FFF2-40B4-BE49-F238E27FC236}">
+                <a16:creationId xmlns:a16="http://schemas.microsoft.com/office/drawing/2014/main" id="{0DCA2E82-F5F8-4127-C6CE-DBF89B93A016}"/>
+              </a:ext>
+            </a:extLst>
+          </p:cNvPr>
+          <p:cNvGrpSpPr/>
+          <p:nvPr/>
+        </p:nvGrpSpPr>
+        <p:grpSpPr>
+          <a:xfrm>
+            <a:off x="9568410" y="2692514"/>
+            <a:ext cx="1256151" cy="230832"/>
+            <a:chOff x="3879753" y="2753249"/>
+            <a:chExt cx="1256151" cy="230832"/>
+          </a:xfrm>
+        </p:grpSpPr>
+        <p:sp>
+          <p:nvSpPr>
+            <p:cNvPr id="87" name="사각형: 둥근 모서리 86">
+              <a:extLst>
+                <a:ext uri="{FF2B5EF4-FFF2-40B4-BE49-F238E27FC236}">
+                  <a16:creationId xmlns:a16="http://schemas.microsoft.com/office/drawing/2014/main" id="{280F77FC-4327-585E-7E6A-F99CCF895D6F}"/>
+                </a:ext>
+              </a:extLst>
+            </p:cNvPr>
+            <p:cNvSpPr/>
+            <p:nvPr/>
+          </p:nvSpPr>
+          <p:spPr>
+            <a:xfrm>
+              <a:off x="3879753" y="2779858"/>
+              <a:ext cx="448264" cy="158667"/>
+            </a:xfrm>
+            <a:prstGeom prst="roundRect">
+              <a:avLst>
+                <a:gd name="adj" fmla="val 50000"/>
+              </a:avLst>
+            </a:prstGeom>
+            <a:solidFill>
+              <a:schemeClr val="bg2">
+                <a:lumMod val="50000"/>
+              </a:schemeClr>
+            </a:solidFill>
+            <a:ln>
+              <a:noFill/>
+            </a:ln>
+          </p:spPr>
+          <p:style>
+            <a:lnRef idx="2">
+              <a:schemeClr val="accent1">
+                <a:shade val="50000"/>
+              </a:schemeClr>
+            </a:lnRef>
+            <a:fillRef idx="1">
+              <a:schemeClr val="accent1"/>
+            </a:fillRef>
+            <a:effectRef idx="0">
+              <a:schemeClr val="accent1"/>
+            </a:effectRef>
+            <a:fontRef idx="minor">
+              <a:schemeClr val="lt1"/>
+            </a:fontRef>
+          </p:style>
+          <p:txBody>
+            <a:bodyPr rtlCol="0" anchor="ctr"/>
+            <a:lstStyle/>
+            <a:p>
+              <a:pPr algn="ctr"/>
+              <a:endParaRPr lang="ko-KR" altLang="en-US"/>
+            </a:p>
+          </p:txBody>
+        </p:sp>
+        <p:sp>
+          <p:nvSpPr>
+            <p:cNvPr id="88" name="TextBox 87">
+              <a:extLst>
+                <a:ext uri="{FF2B5EF4-FFF2-40B4-BE49-F238E27FC236}">
+                  <a16:creationId xmlns:a16="http://schemas.microsoft.com/office/drawing/2014/main" id="{3AE129D4-29D2-5D5E-4EBF-759D93881B8F}"/>
+                </a:ext>
+              </a:extLst>
+            </p:cNvPr>
+            <p:cNvSpPr txBox="1"/>
+            <p:nvPr/>
+          </p:nvSpPr>
+          <p:spPr>
+            <a:xfrm>
+              <a:off x="3891304" y="2753249"/>
+              <a:ext cx="1244600" cy="230832"/>
+            </a:xfrm>
+            <a:prstGeom prst="rect">
+              <a:avLst/>
+            </a:prstGeom>
+            <a:noFill/>
+          </p:spPr>
+          <p:txBody>
+            <a:bodyPr wrap="square" rtlCol="0">
+              <a:spAutoFit/>
+            </a:bodyPr>
+            <a:lstStyle/>
+            <a:p>
+              <a:r>
+                <a:rPr lang="ko-KR" altLang="en-US" sz="900" b="1">
+                  <a:solidFill>
+                    <a:schemeClr val="bg1"/>
+                  </a:solidFill>
+                </a:rPr>
+                <a:t>에픽</a:t>
+              </a:r>
+            </a:p>
+          </p:txBody>
+        </p:sp>
+      </p:grpSp>
+      <p:sp>
+        <p:nvSpPr>
+          <p:cNvPr id="89" name="사각형: 둥근 모서리 88">
+            <a:extLst>
+              <a:ext uri="{FF2B5EF4-FFF2-40B4-BE49-F238E27FC236}">
+                <a16:creationId xmlns:a16="http://schemas.microsoft.com/office/drawing/2014/main" id="{CBF0C5CE-7B62-985F-81D7-05CCD9B2A0DA}"/>
+              </a:ext>
+            </a:extLst>
+          </p:cNvPr>
+          <p:cNvSpPr/>
+          <p:nvPr/>
+        </p:nvSpPr>
+        <p:spPr>
+          <a:xfrm>
+            <a:off x="9984011" y="3921032"/>
+            <a:ext cx="486318" cy="152129"/>
+          </a:xfrm>
+          <a:prstGeom prst="roundRect">
+            <a:avLst>
+              <a:gd name="adj" fmla="val 50000"/>
+            </a:avLst>
+          </a:prstGeom>
+          <a:solidFill>
+            <a:schemeClr val="bg2">
+              <a:lumMod val="75000"/>
+            </a:schemeClr>
+          </a:solidFill>
+          <a:ln>
+            <a:solidFill>
+              <a:schemeClr val="bg2">
+                <a:lumMod val="75000"/>
+              </a:schemeClr>
+            </a:solidFill>
+          </a:ln>
+        </p:spPr>
+        <p:style>
+          <a:lnRef idx="2">
+            <a:schemeClr val="accent1">
+              <a:shade val="50000"/>
+            </a:schemeClr>
+          </a:lnRef>
+          <a:fillRef idx="1">
+            <a:schemeClr val="accent1"/>
+          </a:fillRef>
+          <a:effectRef idx="0">
+            <a:schemeClr val="accent1"/>
+          </a:effectRef>
+          <a:fontRef idx="minor">
+            <a:schemeClr val="lt1"/>
+          </a:fontRef>
+        </p:style>
+        <p:txBody>
+          <a:bodyPr rtlCol="0" anchor="ctr"/>
+          <a:lstStyle/>
+          <a:p>
+            <a:pPr algn="ctr"/>
+            <a:endParaRPr lang="ko-KR" altLang="en-US"/>
+          </a:p>
+        </p:txBody>
+      </p:sp>
+      <p:sp>
+        <p:nvSpPr>
+          <p:cNvPr id="90" name="사각형: 둥근 모서리 89">
+            <a:extLst>
+              <a:ext uri="{FF2B5EF4-FFF2-40B4-BE49-F238E27FC236}">
+                <a16:creationId xmlns:a16="http://schemas.microsoft.com/office/drawing/2014/main" id="{3E6AEFFC-73D3-23F2-022E-968DD39CB9AF}"/>
+              </a:ext>
+            </a:extLst>
+          </p:cNvPr>
+          <p:cNvSpPr/>
+          <p:nvPr/>
+        </p:nvSpPr>
+        <p:spPr>
+          <a:xfrm>
+            <a:off x="9791471" y="3882230"/>
+            <a:ext cx="239965" cy="232964"/>
+          </a:xfrm>
+          <a:prstGeom prst="roundRect">
+            <a:avLst/>
+          </a:prstGeom>
+          <a:solidFill>
+            <a:schemeClr val="bg2">
+              <a:lumMod val="50000"/>
+            </a:schemeClr>
+          </a:solidFill>
+          <a:ln>
+            <a:solidFill>
+              <a:schemeClr val="bg2">
+                <a:lumMod val="75000"/>
+              </a:schemeClr>
+            </a:solidFill>
+          </a:ln>
+        </p:spPr>
+        <p:style>
+          <a:lnRef idx="2">
+            <a:schemeClr val="accent1">
+              <a:shade val="50000"/>
+            </a:schemeClr>
+          </a:lnRef>
+          <a:fillRef idx="1">
+            <a:schemeClr val="accent1"/>
+          </a:fillRef>
+          <a:effectRef idx="0">
+            <a:schemeClr val="accent1"/>
+          </a:effectRef>
+          <a:fontRef idx="minor">
+            <a:schemeClr val="lt1"/>
+          </a:fontRef>
+        </p:style>
+        <p:txBody>
+          <a:bodyPr rtlCol="0" anchor="ctr"/>
+          <a:lstStyle/>
+          <a:p>
+            <a:pPr algn="ctr"/>
+            <a:endParaRPr lang="ko-KR" altLang="en-US"/>
+          </a:p>
+        </p:txBody>
+      </p:sp>
+      <p:pic>
+        <p:nvPicPr>
+          <p:cNvPr id="91" name="Picture 8" descr="Black heart icon | Free SVG">
+            <a:extLst>
+              <a:ext uri="{FF2B5EF4-FFF2-40B4-BE49-F238E27FC236}">
+                <a16:creationId xmlns:a16="http://schemas.microsoft.com/office/drawing/2014/main" id="{11F96CBB-435B-466C-BDC4-3F7071072B22}"/>
+              </a:ext>
+            </a:extLst>
+          </p:cNvPr>
+          <p:cNvPicPr>
+            <a:picLocks noChangeAspect="1" noChangeArrowheads="1"/>
+          </p:cNvPicPr>
+          <p:nvPr/>
+        </p:nvPicPr>
+        <p:blipFill>
+          <a:blip r:embed="rId10">
+            <a:extLst>
+              <a:ext uri="{28A0092B-C50C-407E-A947-70E740481C1C}">
+                <a14:useLocalDpi xmlns:a14="http://schemas.microsoft.com/office/drawing/2010/main" val="0"/>
+              </a:ext>
+            </a:extLst>
+          </a:blip>
+          <a:srcRect/>
+          <a:stretch>
+            <a:fillRect/>
+          </a:stretch>
+        </p:blipFill>
+        <p:spPr bwMode="auto">
+          <a:xfrm>
+            <a:off x="9816539" y="3909510"/>
+            <a:ext cx="180492" cy="180492"/>
+          </a:xfrm>
+          <a:prstGeom prst="rect">
+            <a:avLst/>
+          </a:prstGeom>
+          <a:noFill/>
+          <a:extLst>
+            <a:ext uri="{909E8E84-426E-40DD-AFC4-6F175D3DCCD1}">
+              <a14:hiddenFill xmlns:a14="http://schemas.microsoft.com/office/drawing/2010/main">
+                <a:solidFill>
+                  <a:srgbClr val="FFFFFF"/>
+                </a:solidFill>
+              </a14:hiddenFill>
+            </a:ext>
+          </a:extLst>
+        </p:spPr>
+      </p:pic>
+      <p:sp>
+        <p:nvSpPr>
+          <p:cNvPr id="92" name="TextBox 91">
+            <a:extLst>
+              <a:ext uri="{FF2B5EF4-FFF2-40B4-BE49-F238E27FC236}">
+                <a16:creationId xmlns:a16="http://schemas.microsoft.com/office/drawing/2014/main" id="{9B0D510D-E95F-979F-35D2-5D5956C6F7A2}"/>
+              </a:ext>
+            </a:extLst>
+          </p:cNvPr>
+          <p:cNvSpPr txBox="1"/>
+          <p:nvPr/>
+        </p:nvSpPr>
+        <p:spPr>
+          <a:xfrm>
+            <a:off x="9504249" y="3875554"/>
+            <a:ext cx="1244600" cy="230832"/>
+          </a:xfrm>
+          <a:prstGeom prst="rect">
+            <a:avLst/>
+          </a:prstGeom>
+          <a:noFill/>
+        </p:spPr>
+        <p:txBody>
+          <a:bodyPr wrap="square" rtlCol="0">
+            <a:spAutoFit/>
+          </a:bodyPr>
+          <a:lstStyle/>
+          <a:p>
+            <a:r>
+              <a:rPr lang="en-US" altLang="ko-KR" sz="900" b="1"/>
+              <a:t>5</a:t>
+            </a:r>
+            <a:endParaRPr lang="ko-KR" altLang="en-US" sz="900" b="1"/>
+          </a:p>
+        </p:txBody>
+      </p:sp>
+      <p:sp>
+        <p:nvSpPr>
+          <p:cNvPr id="93" name="사각형: 둥근 모서리 92">
+            <a:extLst>
+              <a:ext uri="{FF2B5EF4-FFF2-40B4-BE49-F238E27FC236}">
+                <a16:creationId xmlns:a16="http://schemas.microsoft.com/office/drawing/2014/main" id="{E8D5F117-B88F-E7DE-329F-61012111F37E}"/>
+              </a:ext>
+            </a:extLst>
+          </p:cNvPr>
+          <p:cNvSpPr/>
+          <p:nvPr/>
+        </p:nvSpPr>
+        <p:spPr>
+          <a:xfrm>
+            <a:off x="8941821" y="4218792"/>
+            <a:ext cx="1740332" cy="451716"/>
+          </a:xfrm>
+          <a:prstGeom prst="roundRect">
+            <a:avLst>
+              <a:gd name="adj" fmla="val 8403"/>
+            </a:avLst>
+          </a:prstGeom>
+          <a:solidFill>
+            <a:schemeClr val="bg2"/>
+          </a:solidFill>
+          <a:ln>
+            <a:noFill/>
+          </a:ln>
+        </p:spPr>
+        <p:style>
+          <a:lnRef idx="2">
+            <a:schemeClr val="accent1">
+              <a:shade val="50000"/>
+            </a:schemeClr>
+          </a:lnRef>
+          <a:fillRef idx="1">
+            <a:schemeClr val="accent1"/>
+          </a:fillRef>
+          <a:effectRef idx="0">
+            <a:schemeClr val="accent1"/>
+          </a:effectRef>
+          <a:fontRef idx="minor">
+            <a:schemeClr val="lt1"/>
+          </a:fontRef>
+        </p:style>
+        <p:txBody>
+          <a:bodyPr rtlCol="0" anchor="ctr"/>
+          <a:lstStyle/>
+          <a:p>
+            <a:pPr algn="ctr"/>
+            <a:endParaRPr lang="ko-KR" altLang="en-US"/>
+          </a:p>
+        </p:txBody>
+      </p:sp>
+      <p:sp>
+        <p:nvSpPr>
+          <p:cNvPr id="94" name="TextBox 93">
+            <a:extLst>
+              <a:ext uri="{FF2B5EF4-FFF2-40B4-BE49-F238E27FC236}">
+                <a16:creationId xmlns:a16="http://schemas.microsoft.com/office/drawing/2014/main" id="{407C44B8-EA8A-BB9F-98BF-9B2968669D87}"/>
+              </a:ext>
+            </a:extLst>
+          </p:cNvPr>
+          <p:cNvSpPr txBox="1"/>
+          <p:nvPr/>
+        </p:nvSpPr>
+        <p:spPr>
+          <a:xfrm>
+            <a:off x="8941821" y="4280949"/>
+            <a:ext cx="1829442" cy="338554"/>
+          </a:xfrm>
+          <a:prstGeom prst="rect">
+            <a:avLst/>
+          </a:prstGeom>
+          <a:noFill/>
+        </p:spPr>
+        <p:txBody>
+          <a:bodyPr wrap="square" rtlCol="0">
+            <a:spAutoFit/>
+          </a:bodyPr>
+          <a:lstStyle/>
+          <a:p>
+            <a:r>
+              <a:rPr lang="ko-KR" altLang="en-US" sz="800" b="1"/>
+              <a:t>어쩌구 저쩌구 음식에 대한 설명</a:t>
+            </a:r>
+            <a:endParaRPr lang="en-US" altLang="ko-KR" sz="800" b="1"/>
+          </a:p>
+          <a:p>
+            <a:r>
+              <a:rPr lang="ko-KR" altLang="en-US" sz="800" b="1"/>
+              <a:t>어쩌구 저쩌구 음식에 대한 설명</a:t>
+            </a:r>
+          </a:p>
+        </p:txBody>
+      </p:sp>
+      <p:sp>
+        <p:nvSpPr>
+          <p:cNvPr id="95" name="사각형: 둥근 모서리 94">
+            <a:extLst>
+              <a:ext uri="{FF2B5EF4-FFF2-40B4-BE49-F238E27FC236}">
+                <a16:creationId xmlns:a16="http://schemas.microsoft.com/office/drawing/2014/main" id="{55FA68CA-F314-EAA8-75B6-A6C2C02B0A48}"/>
+              </a:ext>
+            </a:extLst>
+          </p:cNvPr>
+          <p:cNvSpPr/>
+          <p:nvPr/>
+        </p:nvSpPr>
+        <p:spPr>
+          <a:xfrm>
+            <a:off x="9081249" y="4749087"/>
+            <a:ext cx="1392359" cy="276559"/>
+          </a:xfrm>
+          <a:prstGeom prst="roundRect">
+            <a:avLst/>
+          </a:prstGeom>
+          <a:solidFill>
+            <a:schemeClr val="bg2">
+              <a:lumMod val="75000"/>
+            </a:schemeClr>
+          </a:solidFill>
+          <a:ln>
+            <a:solidFill>
+              <a:schemeClr val="bg2">
+                <a:lumMod val="75000"/>
+              </a:schemeClr>
+            </a:solidFill>
+          </a:ln>
+        </p:spPr>
+        <p:style>
+          <a:lnRef idx="2">
+            <a:schemeClr val="accent1">
+              <a:shade val="50000"/>
+            </a:schemeClr>
+          </a:lnRef>
+          <a:fillRef idx="1">
+            <a:schemeClr val="accent1"/>
+          </a:fillRef>
+          <a:effectRef idx="0">
+            <a:schemeClr val="accent1"/>
+          </a:effectRef>
+          <a:fontRef idx="minor">
+            <a:schemeClr val="lt1"/>
+          </a:fontRef>
+        </p:style>
+        <p:txBody>
+          <a:bodyPr rtlCol="0" anchor="ctr"/>
+          <a:lstStyle/>
+          <a:p>
+            <a:pPr algn="ctr"/>
+            <a:endParaRPr lang="ko-KR" altLang="en-US"/>
+          </a:p>
+        </p:txBody>
+      </p:sp>
+      <p:sp>
+        <p:nvSpPr>
+          <p:cNvPr id="96" name="TextBox 95">
+            <a:extLst>
+              <a:ext uri="{FF2B5EF4-FFF2-40B4-BE49-F238E27FC236}">
+                <a16:creationId xmlns:a16="http://schemas.microsoft.com/office/drawing/2014/main" id="{8E16EDB0-7083-6319-C929-F3A54CAE5147}"/>
+              </a:ext>
+            </a:extLst>
+          </p:cNvPr>
+          <p:cNvSpPr txBox="1"/>
+          <p:nvPr/>
+        </p:nvSpPr>
+        <p:spPr>
+          <a:xfrm>
+            <a:off x="9102375" y="4777842"/>
+            <a:ext cx="782655" cy="230832"/>
+          </a:xfrm>
+          <a:prstGeom prst="rect">
+            <a:avLst/>
+          </a:prstGeom>
+          <a:noFill/>
+        </p:spPr>
+        <p:txBody>
+          <a:bodyPr wrap="square" rtlCol="0">
+            <a:spAutoFit/>
+          </a:bodyPr>
+          <a:lstStyle/>
+          <a:p>
+            <a:r>
+              <a:rPr lang="ko-KR" altLang="en-US" sz="900" b="1"/>
+              <a:t>구매하기</a:t>
+            </a:r>
+          </a:p>
+        </p:txBody>
+      </p:sp>
+      <p:pic>
+        <p:nvPicPr>
+          <p:cNvPr id="97" name="그림 96">
+            <a:extLst>
+              <a:ext uri="{FF2B5EF4-FFF2-40B4-BE49-F238E27FC236}">
+                <a16:creationId xmlns:a16="http://schemas.microsoft.com/office/drawing/2014/main" id="{E0B03120-96F6-8269-5EF6-089EF5CB13D4}"/>
+              </a:ext>
+            </a:extLst>
+          </p:cNvPr>
+          <p:cNvPicPr>
+            <a:picLocks noChangeAspect="1"/>
+          </p:cNvPicPr>
+          <p:nvPr/>
+        </p:nvPicPr>
+        <p:blipFill>
+          <a:blip r:embed="rId7">
+            <a:extLst>
+              <a:ext uri="{28A0092B-C50C-407E-A947-70E740481C1C}">
+                <a14:useLocalDpi xmlns:a14="http://schemas.microsoft.com/office/drawing/2010/main" val="0"/>
+              </a:ext>
+            </a:extLst>
+          </a:blip>
+          <a:stretch>
+            <a:fillRect/>
+          </a:stretch>
+        </p:blipFill>
+        <p:spPr>
+          <a:xfrm>
+            <a:off x="9650788" y="4687523"/>
+            <a:ext cx="442051" cy="442051"/>
+          </a:xfrm>
+          <a:prstGeom prst="rect">
+            <a:avLst/>
+          </a:prstGeom>
+        </p:spPr>
+      </p:pic>
+      <p:sp>
+        <p:nvSpPr>
+          <p:cNvPr id="98" name="TextBox 97">
+            <a:extLst>
+              <a:ext uri="{FF2B5EF4-FFF2-40B4-BE49-F238E27FC236}">
+                <a16:creationId xmlns:a16="http://schemas.microsoft.com/office/drawing/2014/main" id="{BB37107F-9D92-0307-C963-5F69B48917BA}"/>
+              </a:ext>
+            </a:extLst>
+          </p:cNvPr>
+          <p:cNvSpPr txBox="1"/>
+          <p:nvPr/>
+        </p:nvSpPr>
+        <p:spPr>
+          <a:xfrm>
+            <a:off x="9741006" y="4764198"/>
+            <a:ext cx="1002671" cy="253916"/>
+          </a:xfrm>
+          <a:prstGeom prst="rect">
+            <a:avLst/>
+          </a:prstGeom>
+          <a:noFill/>
+        </p:spPr>
+        <p:txBody>
+          <a:bodyPr wrap="square" rtlCol="0">
+            <a:spAutoFit/>
+          </a:bodyPr>
+          <a:lstStyle/>
+          <a:p>
+            <a:pPr algn="ctr"/>
+            <a:r>
+              <a:rPr lang="en-US" altLang="ko-KR" sz="1050" b="1"/>
+              <a:t>5,000</a:t>
+            </a:r>
+            <a:endParaRPr lang="ko-KR" altLang="en-US" sz="1050" b="1">
+              <a:solidFill>
+                <a:srgbClr val="FF0000"/>
+              </a:solidFill>
+            </a:endParaRPr>
+          </a:p>
+        </p:txBody>
+      </p:sp>
+      <p:sp>
+        <p:nvSpPr>
+          <p:cNvPr id="99" name="사각형: 둥근 모서리 98">
+            <a:extLst>
+              <a:ext uri="{FF2B5EF4-FFF2-40B4-BE49-F238E27FC236}">
+                <a16:creationId xmlns:a16="http://schemas.microsoft.com/office/drawing/2014/main" id="{063F471D-2F78-6401-4319-8B4C8184FDDC}"/>
+              </a:ext>
+            </a:extLst>
+          </p:cNvPr>
+          <p:cNvSpPr/>
+          <p:nvPr/>
+        </p:nvSpPr>
+        <p:spPr>
+          <a:xfrm>
+            <a:off x="7065282" y="2030612"/>
+            <a:ext cx="358775" cy="311150"/>
+          </a:xfrm>
+          <a:prstGeom prst="roundRect">
+            <a:avLst>
+              <a:gd name="adj" fmla="val 2239"/>
+            </a:avLst>
+          </a:prstGeom>
+          <a:solidFill>
+            <a:schemeClr val="accent2">
+              <a:lumMod val="60000"/>
+              <a:lumOff val="40000"/>
+            </a:schemeClr>
+          </a:solidFill>
+        </p:spPr>
+        <p:style>
+          <a:lnRef idx="2">
+            <a:schemeClr val="accent1">
+              <a:shade val="50000"/>
+            </a:schemeClr>
+          </a:lnRef>
+          <a:fillRef idx="1">
+            <a:schemeClr val="accent1"/>
+          </a:fillRef>
+          <a:effectRef idx="0">
+            <a:schemeClr val="accent1"/>
+          </a:effectRef>
+          <a:fontRef idx="minor">
+            <a:schemeClr val="lt1"/>
+          </a:fontRef>
+        </p:style>
+        <p:txBody>
+          <a:bodyPr rtlCol="0" anchor="ctr"/>
+          <a:lstStyle/>
+          <a:p>
+            <a:pPr algn="ctr"/>
+            <a:endParaRPr lang="ko-KR" altLang="en-US"/>
+          </a:p>
+        </p:txBody>
+      </p:sp>
+      <p:sp>
+        <p:nvSpPr>
+          <p:cNvPr id="100" name="사각형: 둥근 모서리 99">
+            <a:extLst>
+              <a:ext uri="{FF2B5EF4-FFF2-40B4-BE49-F238E27FC236}">
+                <a16:creationId xmlns:a16="http://schemas.microsoft.com/office/drawing/2014/main" id="{02F15D55-96B4-CFDB-A3E5-D898DB14D1B1}"/>
+              </a:ext>
+            </a:extLst>
+          </p:cNvPr>
+          <p:cNvSpPr/>
+          <p:nvPr/>
+        </p:nvSpPr>
+        <p:spPr>
+          <a:xfrm>
+            <a:off x="6636700" y="2027177"/>
+            <a:ext cx="358775" cy="311150"/>
+          </a:xfrm>
+          <a:prstGeom prst="roundRect">
+            <a:avLst>
+              <a:gd name="adj" fmla="val 2239"/>
+            </a:avLst>
+          </a:prstGeom>
+          <a:solidFill>
+            <a:schemeClr val="accent2">
+              <a:lumMod val="60000"/>
+              <a:lumOff val="40000"/>
+            </a:schemeClr>
+          </a:solidFill>
+        </p:spPr>
+        <p:style>
+          <a:lnRef idx="2">
+            <a:schemeClr val="accent1">
+              <a:shade val="50000"/>
+            </a:schemeClr>
+          </a:lnRef>
+          <a:fillRef idx="1">
+            <a:schemeClr val="accent1"/>
+          </a:fillRef>
+          <a:effectRef idx="0">
+            <a:schemeClr val="accent1"/>
+          </a:effectRef>
+          <a:fontRef idx="minor">
+            <a:schemeClr val="lt1"/>
+          </a:fontRef>
+        </p:style>
+        <p:txBody>
+          <a:bodyPr rtlCol="0" anchor="ctr"/>
+          <a:lstStyle/>
+          <a:p>
+            <a:pPr algn="ctr"/>
+            <a:endParaRPr lang="ko-KR" altLang="en-US"/>
+          </a:p>
+        </p:txBody>
+      </p:sp>
+      <p:sp>
+        <p:nvSpPr>
+          <p:cNvPr id="101" name="사각형: 둥근 모서리 100">
+            <a:extLst>
+              <a:ext uri="{FF2B5EF4-FFF2-40B4-BE49-F238E27FC236}">
+                <a16:creationId xmlns:a16="http://schemas.microsoft.com/office/drawing/2014/main" id="{2645FF2A-154F-B93C-3AF7-5DBC86B2A002}"/>
+              </a:ext>
+            </a:extLst>
+          </p:cNvPr>
+          <p:cNvSpPr/>
+          <p:nvPr/>
+        </p:nvSpPr>
+        <p:spPr>
+          <a:xfrm>
+            <a:off x="7510886" y="2030612"/>
+            <a:ext cx="358775" cy="311150"/>
+          </a:xfrm>
+          <a:prstGeom prst="roundRect">
+            <a:avLst>
+              <a:gd name="adj" fmla="val 2239"/>
+            </a:avLst>
+          </a:prstGeom>
+          <a:solidFill>
+            <a:schemeClr val="accent4">
+              <a:lumMod val="40000"/>
+              <a:lumOff val="60000"/>
+            </a:schemeClr>
+          </a:solidFill>
+        </p:spPr>
+        <p:style>
+          <a:lnRef idx="2">
+            <a:schemeClr val="accent1">
+              <a:shade val="50000"/>
+            </a:schemeClr>
+          </a:lnRef>
+          <a:fillRef idx="1">
+            <a:schemeClr val="accent1"/>
+          </a:fillRef>
+          <a:effectRef idx="0">
+            <a:schemeClr val="accent1"/>
+          </a:effectRef>
+          <a:fontRef idx="minor">
+            <a:schemeClr val="lt1"/>
+          </a:fontRef>
+        </p:style>
+        <p:txBody>
+          <a:bodyPr rtlCol="0" anchor="ctr"/>
+          <a:lstStyle/>
+          <a:p>
+            <a:pPr algn="ctr"/>
+            <a:endParaRPr lang="ko-KR" altLang="en-US"/>
+          </a:p>
+        </p:txBody>
+      </p:sp>
+      <p:pic>
+        <p:nvPicPr>
+          <p:cNvPr id="102" name="Picture 2" descr="잎 - 무료 자연개 아이콘">
+            <a:extLst>
+              <a:ext uri="{FF2B5EF4-FFF2-40B4-BE49-F238E27FC236}">
+                <a16:creationId xmlns:a16="http://schemas.microsoft.com/office/drawing/2014/main" id="{501EA00F-EA95-5393-4A19-575D4CB6336D}"/>
+              </a:ext>
+            </a:extLst>
+          </p:cNvPr>
+          <p:cNvPicPr>
+            <a:picLocks noChangeAspect="1" noChangeArrowheads="1"/>
+          </p:cNvPicPr>
+          <p:nvPr/>
+        </p:nvPicPr>
+        <p:blipFill>
+          <a:blip r:embed="rId2">
+            <a:extLst>
+              <a:ext uri="{28A0092B-C50C-407E-A947-70E740481C1C}">
+                <a14:useLocalDpi xmlns:a14="http://schemas.microsoft.com/office/drawing/2010/main" val="0"/>
+              </a:ext>
+            </a:extLst>
+          </a:blip>
+          <a:srcRect/>
+          <a:stretch>
+            <a:fillRect/>
+          </a:stretch>
+        </p:blipFill>
+        <p:spPr bwMode="auto">
+          <a:xfrm>
+            <a:off x="7119052" y="2059484"/>
+            <a:ext cx="251234" cy="251234"/>
+          </a:xfrm>
+          <a:prstGeom prst="rect">
+            <a:avLst/>
+          </a:prstGeom>
+          <a:noFill/>
+          <a:extLst>
+            <a:ext uri="{909E8E84-426E-40DD-AFC4-6F175D3DCCD1}">
+              <a14:hiddenFill xmlns:a14="http://schemas.microsoft.com/office/drawing/2010/main">
+                <a:solidFill>
+                  <a:srgbClr val="FFFFFF"/>
+                </a:solidFill>
+              </a14:hiddenFill>
+            </a:ext>
+          </a:extLst>
+        </p:spPr>
+      </p:pic>
+      <p:pic>
+        <p:nvPicPr>
+          <p:cNvPr id="103" name="Picture 2" descr="Material 디자인 스타일의 달팽이 아이콘">
+            <a:extLst>
+              <a:ext uri="{FF2B5EF4-FFF2-40B4-BE49-F238E27FC236}">
+                <a16:creationId xmlns:a16="http://schemas.microsoft.com/office/drawing/2014/main" id="{572CBE55-1036-70BF-B77C-C570C2BC0B8F}"/>
+              </a:ext>
+            </a:extLst>
+          </p:cNvPr>
+          <p:cNvPicPr>
+            <a:picLocks noChangeAspect="1" noChangeArrowheads="1"/>
+          </p:cNvPicPr>
+          <p:nvPr/>
+        </p:nvPicPr>
+        <p:blipFill>
+          <a:blip r:embed="rId3">
+            <a:extLst>
+              <a:ext uri="{BEBA8EAE-BF5A-486C-A8C5-ECC9F3942E4B}">
+                <a14:imgProps xmlns:a14="http://schemas.microsoft.com/office/drawing/2010/main">
+                  <a14:imgLayer r:embed="rId4">
+                    <a14:imgEffect>
+                      <a14:backgroundRemoval t="10000" b="90000" l="8750" r="91250">
+                        <a14:foregroundMark x1="90833" y1="41250" x2="90833" y2="41250"/>
+                        <a14:foregroundMark x1="91250" y1="16167" x2="91250" y2="16167"/>
+                        <a14:foregroundMark x1="8750" y1="46000" x2="8750" y2="46000"/>
+                      </a14:backgroundRemoval>
+                    </a14:imgEffect>
+                  </a14:imgLayer>
+                </a14:imgProps>
+              </a:ext>
+              <a:ext uri="{28A0092B-C50C-407E-A947-70E740481C1C}">
+                <a14:useLocalDpi xmlns:a14="http://schemas.microsoft.com/office/drawing/2010/main" val="0"/>
+              </a:ext>
+            </a:extLst>
+          </a:blip>
+          <a:srcRect/>
+          <a:stretch>
+            <a:fillRect/>
+          </a:stretch>
+        </p:blipFill>
+        <p:spPr bwMode="auto">
+          <a:xfrm>
+            <a:off x="6667509" y="2034047"/>
+            <a:ext cx="297156" cy="297156"/>
+          </a:xfrm>
+          <a:prstGeom prst="rect">
+            <a:avLst/>
+          </a:prstGeom>
+          <a:noFill/>
+          <a:extLst>
+            <a:ext uri="{909E8E84-426E-40DD-AFC4-6F175D3DCCD1}">
+              <a14:hiddenFill xmlns:a14="http://schemas.microsoft.com/office/drawing/2010/main">
+                <a:solidFill>
+                  <a:srgbClr val="FFFFFF"/>
+                </a:solidFill>
+              </a14:hiddenFill>
+            </a:ext>
+          </a:extLst>
+        </p:spPr>
+      </p:pic>
+      <p:pic>
+        <p:nvPicPr>
+          <p:cNvPr id="104" name="Picture 4" descr="상점 아이콘 구매 기호입니다 장바구니 아이콘재고에 대 한 가방에 대한 스톡 벡터 아트 및 기타 이미지 - 가방, 고객, 구매 -  iStock">
+            <a:extLst>
+              <a:ext uri="{FF2B5EF4-FFF2-40B4-BE49-F238E27FC236}">
+                <a16:creationId xmlns:a16="http://schemas.microsoft.com/office/drawing/2014/main" id="{AE6CC8EE-FCF2-4AE1-2023-1D55A833A6F7}"/>
+              </a:ext>
+            </a:extLst>
+          </p:cNvPr>
+          <p:cNvPicPr>
+            <a:picLocks noChangeAspect="1" noChangeArrowheads="1"/>
+          </p:cNvPicPr>
+          <p:nvPr/>
+        </p:nvPicPr>
+        <p:blipFill>
+          <a:blip r:embed="rId5">
+            <a:extLst>
+              <a:ext uri="{BEBA8EAE-BF5A-486C-A8C5-ECC9F3942E4B}">
+                <a14:imgProps xmlns:a14="http://schemas.microsoft.com/office/drawing/2010/main">
+                  <a14:imgLayer r:embed="rId6">
+                    <a14:imgEffect>
+                      <a14:backgroundRemoval t="10000" b="90000" l="10000" r="90000">
+                        <a14:foregroundMark x1="46154" y1="42067" x2="53846" y2="41106"/>
+                        <a14:foregroundMark x1="63462" y1="32452" x2="63462" y2="32452"/>
+                        <a14:foregroundMark x1="41587" y1="29087" x2="40144" y2="29567"/>
+                      </a14:backgroundRemoval>
+                    </a14:imgEffect>
+                  </a14:imgLayer>
+                </a14:imgProps>
+              </a:ext>
+              <a:ext uri="{28A0092B-C50C-407E-A947-70E740481C1C}">
+                <a14:useLocalDpi xmlns:a14="http://schemas.microsoft.com/office/drawing/2010/main" val="0"/>
+              </a:ext>
+            </a:extLst>
+          </a:blip>
+          <a:srcRect/>
+          <a:stretch>
+            <a:fillRect/>
+          </a:stretch>
+        </p:blipFill>
+        <p:spPr bwMode="auto">
+          <a:xfrm>
+            <a:off x="7499941" y="1994868"/>
+            <a:ext cx="385763" cy="385763"/>
+          </a:xfrm>
+          <a:prstGeom prst="rect">
+            <a:avLst/>
+          </a:prstGeom>
+          <a:noFill/>
+          <a:extLst>
+            <a:ext uri="{909E8E84-426E-40DD-AFC4-6F175D3DCCD1}">
+              <a14:hiddenFill xmlns:a14="http://schemas.microsoft.com/office/drawing/2010/main">
+                <a:solidFill>
+                  <a:srgbClr val="FFFFFF"/>
+                </a:solidFill>
+              </a14:hiddenFill>
+            </a:ext>
+          </a:extLst>
+        </p:spPr>
+      </p:pic>
+      <p:sp>
+        <p:nvSpPr>
+          <p:cNvPr id="105" name="사각형: 둥근 모서리 104">
+            <a:extLst>
+              <a:ext uri="{FF2B5EF4-FFF2-40B4-BE49-F238E27FC236}">
+                <a16:creationId xmlns:a16="http://schemas.microsoft.com/office/drawing/2014/main" id="{9A865C52-BEAB-F19C-84E3-313EFBE186A9}"/>
+              </a:ext>
+            </a:extLst>
+          </p:cNvPr>
+          <p:cNvSpPr/>
+          <p:nvPr/>
+        </p:nvSpPr>
+        <p:spPr>
+          <a:xfrm>
+            <a:off x="7510886" y="2030612"/>
+            <a:ext cx="358775" cy="311150"/>
+          </a:xfrm>
+          <a:prstGeom prst="roundRect">
+            <a:avLst>
+              <a:gd name="adj" fmla="val 2239"/>
+            </a:avLst>
+          </a:prstGeom>
+          <a:solidFill>
+            <a:schemeClr val="accent2">
+              <a:lumMod val="60000"/>
+              <a:lumOff val="40000"/>
+            </a:schemeClr>
+          </a:solidFill>
+        </p:spPr>
+        <p:style>
+          <a:lnRef idx="2">
+            <a:schemeClr val="accent1">
+              <a:shade val="50000"/>
+            </a:schemeClr>
+          </a:lnRef>
+          <a:fillRef idx="1">
+            <a:schemeClr val="accent1"/>
+          </a:fillRef>
+          <a:effectRef idx="0">
+            <a:schemeClr val="accent1"/>
+          </a:effectRef>
+          <a:fontRef idx="minor">
+            <a:schemeClr val="lt1"/>
+          </a:fontRef>
+        </p:style>
+        <p:txBody>
+          <a:bodyPr rtlCol="0" anchor="ctr"/>
+          <a:lstStyle/>
+          <a:p>
+            <a:pPr algn="ctr"/>
+            <a:endParaRPr lang="ko-KR" altLang="en-US"/>
+          </a:p>
+        </p:txBody>
+      </p:sp>
+      <p:sp>
+        <p:nvSpPr>
+          <p:cNvPr id="106" name="사각형: 둥근 모서리 105">
+            <a:extLst>
+              <a:ext uri="{FF2B5EF4-FFF2-40B4-BE49-F238E27FC236}">
+                <a16:creationId xmlns:a16="http://schemas.microsoft.com/office/drawing/2014/main" id="{3BD2DE4D-D46F-CD13-7E27-1265E2B6F8E1}"/>
+              </a:ext>
+            </a:extLst>
+          </p:cNvPr>
+          <p:cNvSpPr/>
+          <p:nvPr/>
+        </p:nvSpPr>
+        <p:spPr>
+          <a:xfrm>
+            <a:off x="7961588" y="2030052"/>
+            <a:ext cx="358775" cy="311150"/>
+          </a:xfrm>
+          <a:prstGeom prst="roundRect">
+            <a:avLst>
+              <a:gd name="adj" fmla="val 2239"/>
+            </a:avLst>
+          </a:prstGeom>
+          <a:solidFill>
+            <a:schemeClr val="accent4">
+              <a:lumMod val="40000"/>
+              <a:lumOff val="60000"/>
+            </a:schemeClr>
+          </a:solidFill>
+        </p:spPr>
+        <p:style>
+          <a:lnRef idx="2">
+            <a:schemeClr val="accent1">
+              <a:shade val="50000"/>
+            </a:schemeClr>
+          </a:lnRef>
+          <a:fillRef idx="1">
+            <a:schemeClr val="accent1"/>
+          </a:fillRef>
+          <a:effectRef idx="0">
+            <a:schemeClr val="accent1"/>
+          </a:effectRef>
+          <a:fontRef idx="minor">
+            <a:schemeClr val="lt1"/>
+          </a:fontRef>
+        </p:style>
+        <p:txBody>
+          <a:bodyPr rtlCol="0" anchor="ctr"/>
+          <a:lstStyle/>
+          <a:p>
+            <a:pPr algn="ctr"/>
+            <a:endParaRPr lang="ko-KR" altLang="en-US"/>
+          </a:p>
+        </p:txBody>
+      </p:sp>
+      <p:pic>
+        <p:nvPicPr>
+          <p:cNvPr id="107" name="Picture 4" descr="상점 아이콘 구매 기호입니다 장바구니 아이콘재고에 대 한 가방에 대한 스톡 벡터 아트 및 기타 이미지 - 가방, 고객, 구매 -  iStock">
+            <a:extLst>
+              <a:ext uri="{FF2B5EF4-FFF2-40B4-BE49-F238E27FC236}">
+                <a16:creationId xmlns:a16="http://schemas.microsoft.com/office/drawing/2014/main" id="{8E8EC0EB-7C03-34A6-2ABA-9AA72F15D9EE}"/>
+              </a:ext>
+            </a:extLst>
+          </p:cNvPr>
+          <p:cNvPicPr>
+            <a:picLocks noChangeAspect="1" noChangeArrowheads="1"/>
+          </p:cNvPicPr>
+          <p:nvPr/>
+        </p:nvPicPr>
+        <p:blipFill>
+          <a:blip r:embed="rId5">
+            <a:extLst>
+              <a:ext uri="{BEBA8EAE-BF5A-486C-A8C5-ECC9F3942E4B}">
+                <a14:imgProps xmlns:a14="http://schemas.microsoft.com/office/drawing/2010/main">
+                  <a14:imgLayer r:embed="rId6">
+                    <a14:imgEffect>
+                      <a14:backgroundRemoval t="10000" b="90000" l="10000" r="90000">
+                        <a14:foregroundMark x1="46154" y1="42067" x2="53846" y2="41106"/>
+                        <a14:foregroundMark x1="63462" y1="32452" x2="63462" y2="32452"/>
+                        <a14:foregroundMark x1="41587" y1="29087" x2="40144" y2="29567"/>
+                      </a14:backgroundRemoval>
+                    </a14:imgEffect>
+                  </a14:imgLayer>
+                </a14:imgProps>
+              </a:ext>
+              <a:ext uri="{28A0092B-C50C-407E-A947-70E740481C1C}">
+                <a14:useLocalDpi xmlns:a14="http://schemas.microsoft.com/office/drawing/2010/main" val="0"/>
+              </a:ext>
+            </a:extLst>
+          </a:blip>
+          <a:srcRect/>
+          <a:stretch>
+            <a:fillRect/>
+          </a:stretch>
+        </p:blipFill>
+        <p:spPr bwMode="auto">
+          <a:xfrm>
+            <a:off x="7950643" y="1996255"/>
+            <a:ext cx="385763" cy="385763"/>
+          </a:xfrm>
+          <a:prstGeom prst="rect">
+            <a:avLst/>
+          </a:prstGeom>
+          <a:noFill/>
+          <a:extLst>
+            <a:ext uri="{909E8E84-426E-40DD-AFC4-6F175D3DCCD1}">
+              <a14:hiddenFill xmlns:a14="http://schemas.microsoft.com/office/drawing/2010/main">
+                <a:solidFill>
+                  <a:srgbClr val="FFFFFF"/>
+                </a:solidFill>
+              </a14:hiddenFill>
+            </a:ext>
+          </a:extLst>
+        </p:spPr>
+      </p:pic>
+      <p:pic>
+        <p:nvPicPr>
+          <p:cNvPr id="108" name="Picture 8" descr="Eggs - Free food icons">
+            <a:extLst>
+              <a:ext uri="{FF2B5EF4-FFF2-40B4-BE49-F238E27FC236}">
+                <a16:creationId xmlns:a16="http://schemas.microsoft.com/office/drawing/2014/main" id="{A0E2303F-F61C-7CE0-0D1F-E0141F811733}"/>
+              </a:ext>
+            </a:extLst>
+          </p:cNvPr>
+          <p:cNvPicPr>
+            <a:picLocks noChangeAspect="1" noChangeArrowheads="1"/>
+          </p:cNvPicPr>
+          <p:nvPr/>
+        </p:nvPicPr>
+        <p:blipFill>
+          <a:blip r:embed="rId8">
+            <a:extLst>
+              <a:ext uri="{28A0092B-C50C-407E-A947-70E740481C1C}">
+                <a14:useLocalDpi xmlns:a14="http://schemas.microsoft.com/office/drawing/2010/main" val="0"/>
+              </a:ext>
+            </a:extLst>
+          </a:blip>
+          <a:srcRect/>
+          <a:stretch>
+            <a:fillRect/>
+          </a:stretch>
+        </p:blipFill>
+        <p:spPr bwMode="auto">
+          <a:xfrm>
+            <a:off x="7569331" y="2061420"/>
+            <a:ext cx="241884" cy="241884"/>
+          </a:xfrm>
+          <a:prstGeom prst="rect">
+            <a:avLst/>
+          </a:prstGeom>
+          <a:noFill/>
+          <a:extLst>
+            <a:ext uri="{909E8E84-426E-40DD-AFC4-6F175D3DCCD1}">
+              <a14:hiddenFill xmlns:a14="http://schemas.microsoft.com/office/drawing/2010/main">
+                <a:solidFill>
+                  <a:srgbClr val="FFFFFF"/>
+                </a:solidFill>
+              </a14:hiddenFill>
+            </a:ext>
+          </a:extLst>
+        </p:spPr>
+      </p:pic>
+      <p:sp>
+        <p:nvSpPr>
+          <p:cNvPr id="109" name="사각형: 둥근 모서리 108">
+            <a:extLst>
+              <a:ext uri="{FF2B5EF4-FFF2-40B4-BE49-F238E27FC236}">
+                <a16:creationId xmlns:a16="http://schemas.microsoft.com/office/drawing/2014/main" id="{43114CF7-BCA1-A983-10CF-2E3B278286B7}"/>
+              </a:ext>
+            </a:extLst>
+          </p:cNvPr>
+          <p:cNvSpPr/>
+          <p:nvPr/>
+        </p:nvSpPr>
+        <p:spPr>
+          <a:xfrm>
+            <a:off x="8799570" y="2025059"/>
+            <a:ext cx="358775" cy="311150"/>
+          </a:xfrm>
+          <a:prstGeom prst="roundRect">
+            <a:avLst>
+              <a:gd name="adj" fmla="val 2239"/>
+            </a:avLst>
+          </a:prstGeom>
+          <a:solidFill>
+            <a:schemeClr val="accent2">
+              <a:lumMod val="60000"/>
+              <a:lumOff val="40000"/>
+            </a:schemeClr>
+          </a:solidFill>
+        </p:spPr>
+        <p:style>
+          <a:lnRef idx="2">
+            <a:schemeClr val="accent1">
+              <a:shade val="50000"/>
+            </a:schemeClr>
+          </a:lnRef>
+          <a:fillRef idx="1">
+            <a:schemeClr val="accent1"/>
+          </a:fillRef>
+          <a:effectRef idx="0">
+            <a:schemeClr val="accent1"/>
+          </a:effectRef>
+          <a:fontRef idx="minor">
+            <a:schemeClr val="lt1"/>
+          </a:fontRef>
+        </p:style>
+        <p:txBody>
+          <a:bodyPr rtlCol="0" anchor="ctr"/>
+          <a:lstStyle/>
+          <a:p>
+            <a:pPr algn="ctr"/>
+            <a:endParaRPr lang="ko-KR" altLang="en-US"/>
+          </a:p>
+        </p:txBody>
+      </p:sp>
+      <p:pic>
+        <p:nvPicPr>
+          <p:cNvPr id="110" name="Picture 2" descr="설정 - 무료 ui개 아이콘">
+            <a:extLst>
+              <a:ext uri="{FF2B5EF4-FFF2-40B4-BE49-F238E27FC236}">
+                <a16:creationId xmlns:a16="http://schemas.microsoft.com/office/drawing/2014/main" id="{389B7980-38F1-13D8-E3E6-E355948D9102}"/>
+              </a:ext>
+            </a:extLst>
+          </p:cNvPr>
+          <p:cNvPicPr>
+            <a:picLocks noChangeAspect="1" noChangeArrowheads="1"/>
+          </p:cNvPicPr>
+          <p:nvPr/>
+        </p:nvPicPr>
+        <p:blipFill>
+          <a:blip r:embed="rId9">
+            <a:extLst>
+              <a:ext uri="{28A0092B-C50C-407E-A947-70E740481C1C}">
+                <a14:useLocalDpi xmlns:a14="http://schemas.microsoft.com/office/drawing/2010/main" val="0"/>
+              </a:ext>
+            </a:extLst>
+          </a:blip>
+          <a:srcRect/>
+          <a:stretch>
+            <a:fillRect/>
+          </a:stretch>
+        </p:blipFill>
+        <p:spPr bwMode="auto">
+          <a:xfrm>
+            <a:off x="8851735" y="2047074"/>
+            <a:ext cx="265099" cy="265099"/>
+          </a:xfrm>
+          <a:prstGeom prst="rect">
+            <a:avLst/>
+          </a:prstGeom>
+          <a:noFill/>
+          <a:extLst>
+            <a:ext uri="{909E8E84-426E-40DD-AFC4-6F175D3DCCD1}">
+              <a14:hiddenFill xmlns:a14="http://schemas.microsoft.com/office/drawing/2010/main">
+                <a:solidFill>
+                  <a:srgbClr val="FFFFFF"/>
+                </a:solidFill>
+              </a14:hiddenFill>
+            </a:ext>
+          </a:extLst>
+        </p:spPr>
+      </p:pic>
+      <p:sp>
+        <p:nvSpPr>
+          <p:cNvPr id="111" name="TextBox 110">
+            <a:extLst>
+              <a:ext uri="{FF2B5EF4-FFF2-40B4-BE49-F238E27FC236}">
+                <a16:creationId xmlns:a16="http://schemas.microsoft.com/office/drawing/2014/main" id="{19297301-A3EE-6D06-0DA5-E2F8452EE3F9}"/>
+              </a:ext>
+            </a:extLst>
+          </p:cNvPr>
+          <p:cNvSpPr txBox="1"/>
+          <p:nvPr/>
+        </p:nvSpPr>
+        <p:spPr>
+          <a:xfrm>
+            <a:off x="6464652" y="1356019"/>
+            <a:ext cx="1670921" cy="276999"/>
+          </a:xfrm>
+          <a:prstGeom prst="rect">
+            <a:avLst/>
+          </a:prstGeom>
+          <a:solidFill>
+            <a:schemeClr val="tx1"/>
+          </a:solidFill>
+        </p:spPr>
+        <p:txBody>
+          <a:bodyPr wrap="square" rtlCol="0">
+            <a:spAutoFit/>
+          </a:bodyPr>
+          <a:lstStyle/>
+          <a:p>
+            <a:pPr algn="ctr"/>
+            <a:r>
+              <a:rPr lang="ko-KR" altLang="en-US" sz="1200" dirty="0">
+                <a:solidFill>
+                  <a:schemeClr val="bg1"/>
+                </a:solidFill>
+              </a:rPr>
+              <a:t>음식 </a:t>
+            </a:r>
+            <a:r>
+              <a:rPr lang="ko-KR" altLang="en-US" sz="1200" dirty="0" err="1">
+                <a:solidFill>
+                  <a:schemeClr val="bg1"/>
+                </a:solidFill>
+              </a:rPr>
+              <a:t>선택시</a:t>
+            </a:r>
+            <a:endParaRPr lang="en-US" altLang="ko-KR" sz="1200" dirty="0">
+              <a:solidFill>
+                <a:schemeClr val="bg1"/>
+              </a:solidFill>
+            </a:endParaRPr>
+          </a:p>
+        </p:txBody>
+      </p:sp>
+      <p:sp>
+        <p:nvSpPr>
+          <p:cNvPr id="112" name="TextBox 111">
+            <a:extLst>
+              <a:ext uri="{FF2B5EF4-FFF2-40B4-BE49-F238E27FC236}">
+                <a16:creationId xmlns:a16="http://schemas.microsoft.com/office/drawing/2014/main" id="{495A2E7D-C9E2-8D9A-33C9-01379708F0FF}"/>
+              </a:ext>
+            </a:extLst>
+          </p:cNvPr>
+          <p:cNvSpPr txBox="1"/>
+          <p:nvPr/>
+        </p:nvSpPr>
+        <p:spPr>
+          <a:xfrm>
+            <a:off x="1462890" y="1320268"/>
+            <a:ext cx="1670921" cy="276999"/>
+          </a:xfrm>
+          <a:prstGeom prst="rect">
+            <a:avLst/>
+          </a:prstGeom>
+          <a:solidFill>
+            <a:schemeClr val="tx1"/>
+          </a:solidFill>
+        </p:spPr>
+        <p:txBody>
+          <a:bodyPr wrap="square" rtlCol="0">
+            <a:spAutoFit/>
+          </a:bodyPr>
+          <a:lstStyle/>
+          <a:p>
+            <a:pPr algn="ctr"/>
+            <a:r>
+              <a:rPr lang="ko-KR" altLang="en-US" sz="1200" dirty="0">
+                <a:solidFill>
+                  <a:schemeClr val="bg1"/>
+                </a:solidFill>
+              </a:rPr>
+              <a:t>상점 디폴트</a:t>
+            </a:r>
+            <a:endParaRPr lang="en-US" altLang="ko-KR" sz="1200" dirty="0">
+              <a:solidFill>
+                <a:schemeClr val="bg1"/>
+              </a:solidFill>
+            </a:endParaRPr>
+          </a:p>
+        </p:txBody>
+      </p:sp>
+    </p:spTree>
+    <p:extLst>
+      <p:ext uri="{BB962C8B-B14F-4D97-AF65-F5344CB8AC3E}">
+        <p14:creationId xmlns:p14="http://schemas.microsoft.com/office/powerpoint/2010/main" val="2087002081"/>
+      </p:ext>
+    </p:extLst>
+  </p:cSld>
+  <p:clrMapOvr>
+    <a:masterClrMapping/>
+  </p:clrMapOvr>
+</p:sld>
+</file>
+
 <file path=ppt/theme/theme1.xml><?xml version="1.0" encoding="utf-8"?>
 <a:theme xmlns:a="http://schemas.openxmlformats.org/drawingml/2006/main" name="Office 테마">
   <a:themeElements>

--- a/UI.pptx
+++ b/UI.pptx
@@ -11,6 +11,7 @@
     <p:sldId id="259" r:id="rId5"/>
     <p:sldId id="260" r:id="rId6"/>
     <p:sldId id="261" r:id="rId7"/>
+    <p:sldId id="262" r:id="rId8"/>
   </p:sldIdLst>
   <p:sldSz cx="12192000" cy="6858000"/>
   <p:notesSz cx="6858000" cy="9144000"/>
@@ -36992,6 +36993,72 @@
 </p:sld>
 </file>
 
+<file path=ppt/slides/slide7.xml><?xml version="1.0" encoding="utf-8"?>
+<p:sld xmlns:a="http://schemas.openxmlformats.org/drawingml/2006/main" xmlns:r="http://schemas.openxmlformats.org/officeDocument/2006/relationships" xmlns:p="http://schemas.openxmlformats.org/presentationml/2006/main">
+  <p:cSld>
+    <p:spTree>
+      <p:nvGrpSpPr>
+        <p:cNvPr id="1" name=""/>
+        <p:cNvGrpSpPr/>
+        <p:nvPr/>
+      </p:nvGrpSpPr>
+      <p:grpSpPr>
+        <a:xfrm>
+          <a:off x="0" y="0"/>
+          <a:ext cx="0" cy="0"/>
+          <a:chOff x="0" y="0"/>
+          <a:chExt cx="0" cy="0"/>
+        </a:xfrm>
+      </p:grpSpPr>
+      <p:pic>
+        <p:nvPicPr>
+          <p:cNvPr id="5" name="그림 4">
+            <a:extLst>
+              <a:ext uri="{FF2B5EF4-FFF2-40B4-BE49-F238E27FC236}">
+                <a16:creationId xmlns:a16="http://schemas.microsoft.com/office/drawing/2014/main" id="{53203168-2906-8582-7B20-373BE23A92A1}"/>
+              </a:ext>
+            </a:extLst>
+          </p:cNvPr>
+          <p:cNvPicPr>
+            <a:picLocks noChangeAspect="1"/>
+          </p:cNvPicPr>
+          <p:nvPr/>
+        </p:nvPicPr>
+        <p:blipFill>
+          <a:blip r:embed="rId2">
+            <a:extLst>
+              <a:ext uri="{28A0092B-C50C-407E-A947-70E740481C1C}">
+                <a14:useLocalDpi xmlns:a14="http://schemas.microsoft.com/office/drawing/2010/main" val="0"/>
+              </a:ext>
+            </a:extLst>
+          </a:blip>
+          <a:stretch>
+            <a:fillRect/>
+          </a:stretch>
+        </p:blipFill>
+        <p:spPr>
+          <a:xfrm>
+            <a:off x="1524000" y="0"/>
+            <a:ext cx="9144000" cy="6858000"/>
+          </a:xfrm>
+          <a:prstGeom prst="rect">
+            <a:avLst/>
+          </a:prstGeom>
+        </p:spPr>
+      </p:pic>
+    </p:spTree>
+    <p:extLst>
+      <p:ext uri="{BB962C8B-B14F-4D97-AF65-F5344CB8AC3E}">
+        <p14:creationId xmlns:p14="http://schemas.microsoft.com/office/powerpoint/2010/main" val="4269694143"/>
+      </p:ext>
+    </p:extLst>
+  </p:cSld>
+  <p:clrMapOvr>
+    <a:masterClrMapping/>
+  </p:clrMapOvr>
+</p:sld>
+</file>
+
 <file path=ppt/theme/theme1.xml><?xml version="1.0" encoding="utf-8"?>
 <a:theme xmlns:a="http://schemas.openxmlformats.org/drawingml/2006/main" name="Office 테마">
   <a:themeElements>
